--- a/slides/06-canvases.pptx
+++ b/slides/06-canvases.pptx
@@ -2121,145 +2121,9 @@
           <a:chExt cx="0" cy="0"/>
         </a:xfrm>
       </p:grpSpPr>
-      <p:sp>
-        <p:nvSpPr>
-          <p:cNvPr id="2" name="Text 0"/>
-          <p:cNvSpPr/>
-          <p:nvPr/>
-        </p:nvSpPr>
-        <p:spPr>
-          <a:xfrm>
-            <a:off x="5968901" y="0"/>
-            <a:ext cx="3174950" cy="5143500"/>
-          </a:xfrm>
-          <a:prstGeom prst="rect">
-            <a:avLst/>
-          </a:prstGeom>
-          <a:solidFill>
-            <a:srgbClr val="1A7F37"/>
-          </a:solidFill>
-          <a:ln/>
-        </p:spPr>
-        <p:txBody>
-          <a:bodyPr wrap="square" rtlCol="0" anchor="ctr"/>
-          <a:lstStyle/>
-          <a:p>
-            <a:pPr indent="0" marL="0">
-              <a:buNone/>
-            </a:pPr>
-            <a:endParaRPr lang="en-US" dirty="0"/>
-          </a:p>
-        </p:txBody>
-      </p:sp>
-      <p:sp>
-        <p:nvSpPr>
-          <p:cNvPr id="3" name="Text 1"/>
-          <p:cNvSpPr/>
-          <p:nvPr/>
-        </p:nvSpPr>
-        <p:spPr>
-          <a:xfrm>
-            <a:off x="5939692" y="1269950"/>
-            <a:ext cx="2979319" cy="2159050"/>
-          </a:xfrm>
-          <a:prstGeom prst="rect">
-            <a:avLst/>
-          </a:prstGeom>
-          <a:noFill/>
-          <a:ln/>
-        </p:spPr>
-        <p:txBody>
-          <a:bodyPr wrap="square" lIns="0" tIns="0" rIns="0" bIns="0" rtlCol="0" anchor="t"/>
-          <a:lstStyle/>
-          <a:p>
-            <a:pPr algn="ctr" indent="0" marL="0">
-              <a:lnSpc>
-                <a:spcPts val="17000"/>
-              </a:lnSpc>
-              <a:buNone/>
-            </a:pPr>
-            <a:r>
-              <a:rPr lang="en-US" sz="15000" b="1" dirty="0">
-                <a:solidFill>
-                  <a:srgbClr val="2DA44E"/>
-                </a:solidFill>
-                <a:latin typeface="Arial" pitchFamily="34" charset="0"/>
-                <a:ea typeface="Arial" pitchFamily="34" charset="-122"/>
-                <a:cs typeface="Arial" pitchFamily="34" charset="-120"/>
-              </a:rPr>
-              <a:t>06</a:t>
-            </a:r>
-            <a:endParaRPr lang="en-US" sz="15000" dirty="0"/>
-          </a:p>
-        </p:txBody>
-      </p:sp>
-      <p:sp>
-        <p:nvSpPr>
-          <p:cNvPr id="4" name="Text 2"/>
-          <p:cNvSpPr/>
-          <p:nvPr/>
-        </p:nvSpPr>
-        <p:spPr>
-          <a:xfrm>
-            <a:off x="6069330" y="3682901"/>
-            <a:ext cx="2720340" cy="431899"/>
-          </a:xfrm>
-          <a:prstGeom prst="rect">
-            <a:avLst/>
-          </a:prstGeom>
-          <a:noFill/>
-          <a:ln/>
-        </p:spPr>
-        <p:txBody>
-          <a:bodyPr wrap="square" lIns="0" tIns="0" rIns="0" bIns="0" rtlCol="0" anchor="t"/>
-          <a:lstStyle/>
-          <a:p>
-            <a:pPr algn="ctr" indent="0" marL="0">
-              <a:lnSpc>
-                <a:spcPts val="1700"/>
-              </a:lnSpc>
-              <a:buNone/>
-            </a:pPr>
-            <a:r>
-              <a:rPr lang="en-US" sz="1350" dirty="0">
-                <a:solidFill>
-                  <a:srgbClr val="FFFFFF"/>
-                </a:solidFill>
-                <a:latin typeface="Arial" pitchFamily="34" charset="0"/>
-                <a:ea typeface="Arial" pitchFamily="34" charset="-122"/>
-                <a:cs typeface="Arial" pitchFamily="34" charset="-120"/>
-              </a:rPr>
-              <a:t>GITHUB COPILOT APP</a:t>
-            </a:r>
-            <a:endParaRPr lang="en-US" sz="1350" dirty="0"/>
-          </a:p>
-          <a:p>
-            <a:pPr algn="ctr" indent="0" marL="0">
-              <a:lnSpc>
-                <a:spcPts val="1700"/>
-              </a:lnSpc>
-              <a:buNone/>
-            </a:pPr>
-            <a:r>
-              <a:rPr lang="en-US" sz="1350" dirty="0">
-                <a:solidFill>
-                  <a:srgbClr val="FFFFFF"/>
-                </a:solidFill>
-                <a:latin typeface="Arial" pitchFamily="34" charset="0"/>
-                <a:ea typeface="Arial" pitchFamily="34" charset="-122"/>
-                <a:cs typeface="Arial" pitchFamily="34" charset="-120"/>
-              </a:rPr>
-              <a:t>FOR BEGINNERS</a:t>
-            </a:r>
-            <a:endParaRPr lang="en-US" sz="1350" dirty="0"/>
-          </a:p>
-        </p:txBody>
-      </p:sp>
       <p:pic>
         <p:nvPicPr>
-          <p:cNvPr id="5" name="Image 0" descr="/Users/danwahlin/.copilot/session-state/56a7a0da-def8-48d4-b5e8-0ac3878cb8dd/files/slides-build/icons/FaGithub-FFFFFF.png">
-            <a:hlinkClick r:id="rId2" tooltip="https://github.com/github/copilot-app-for-beginners/tree/main/06-canvases"/>
-          </p:cNvPr>
+          <p:cNvPr id="2" name="Image 0" descr="/Users/danwahlin/.copilot/session-state/56a7a0da-def8-48d4-b5e8-0ac3878cb8dd/files/slides-build/img/grad-title.jpg">    </p:cNvPr>
           <p:cNvPicPr>
             <a:picLocks noChangeAspect="1"/>
           </p:cNvPicPr>
@@ -2273,6 +2137,32 @@
         </p:blipFill>
         <p:spPr>
           <a:xfrm>
+            <a:off x="0" y="0"/>
+            <a:ext cx="9144000" cy="5143500"/>
+          </a:xfrm>
+          <a:prstGeom prst="rect">
+            <a:avLst/>
+          </a:prstGeom>
+        </p:spPr>
+      </p:pic>
+      <p:pic>
+        <p:nvPicPr>
+          <p:cNvPr id="3" name="Image 1" descr="/Users/danwahlin/.copilot/session-state/56a7a0da-def8-48d4-b5e8-0ac3878cb8dd/files/slides-build/icons/FaGithub-1F2328.png">
+            <a:hlinkClick r:id="rId3" tooltip="https://github.com/github/copilot-app-for-beginners/tree/main/06-canvases"/>
+          </p:cNvPr>
+          <p:cNvPicPr>
+            <a:picLocks noChangeAspect="1"/>
+          </p:cNvPicPr>
+          <p:nvPr/>
+        </p:nvPicPr>
+        <p:blipFill>
+          <a:blip r:embed="rId2"/>
+          <a:stretch>
+            <a:fillRect/>
+          </a:stretch>
+        </p:blipFill>
+        <p:spPr>
+          <a:xfrm>
             <a:off x="8635901" y="203150"/>
             <a:ext cx="304800" cy="304800"/>
           </a:xfrm>
@@ -2283,14 +2173,14 @@
       </p:pic>
       <p:sp>
         <p:nvSpPr>
-          <p:cNvPr id="6" name="Text 3"/>
-          <p:cNvSpPr/>
-          <p:nvPr/>
-        </p:nvSpPr>
-        <p:spPr>
-          <a:xfrm>
-            <a:off x="609600" y="1368475"/>
-            <a:ext cx="5052060" cy="209550"/>
+          <p:cNvPr id="4" name="Text 0"/>
+          <p:cNvSpPr/>
+          <p:nvPr/>
+        </p:nvSpPr>
+        <p:spPr>
+          <a:xfrm>
+            <a:off x="1015901" y="1293912"/>
+            <a:ext cx="6088279" cy="209550"/>
           </a:xfrm>
           <a:prstGeom prst="rect">
             <a:avLst/>
@@ -2322,14 +2212,14 @@
       </p:sp>
       <p:sp>
         <p:nvSpPr>
-          <p:cNvPr id="7" name="Text 4"/>
-          <p:cNvSpPr/>
-          <p:nvPr/>
-        </p:nvSpPr>
-        <p:spPr>
-          <a:xfrm>
-            <a:off x="609600" y="1679525"/>
-            <a:ext cx="5052060" cy="584150"/>
+          <p:cNvPr id="5" name="Text 1"/>
+          <p:cNvSpPr/>
+          <p:nvPr/>
+        </p:nvSpPr>
+        <p:spPr>
+          <a:xfrm>
+            <a:off x="1015901" y="1604963"/>
+            <a:ext cx="6088279" cy="609600"/>
           </a:xfrm>
           <a:prstGeom prst="rect">
             <a:avLst/>
@@ -2343,7 +2233,7 @@
           <a:p>
             <a:pPr algn="l" indent="0" marL="0">
               <a:lnSpc>
-                <a:spcPts val="4600"/>
+                <a:spcPts val="4800"/>
               </a:lnSpc>
               <a:spcBef>
                 <a:spcPts val="800"/>
@@ -2351,7 +2241,7 @@
               <a:buNone/>
             </a:pPr>
             <a:r>
-              <a:rPr lang="en-US" sz="4000" b="1" dirty="0">
+              <a:rPr lang="en-US" sz="4200" b="1" dirty="0">
                 <a:solidFill>
                   <a:srgbClr val="1F2328"/>
                 </a:solidFill>
@@ -2361,19 +2251,19 @@
               </a:rPr>
               <a:t>Canvases</a:t>
             </a:r>
-            <a:endParaRPr lang="en-US" sz="4000" dirty="0"/>
-          </a:p>
-        </p:txBody>
-      </p:sp>
-      <p:sp>
-        <p:nvSpPr>
-          <p:cNvPr id="8" name="Text 5"/>
-          <p:cNvSpPr/>
-          <p:nvPr/>
-        </p:nvSpPr>
-        <p:spPr>
-          <a:xfrm>
-            <a:off x="609600" y="2492276"/>
+            <a:endParaRPr lang="en-US" sz="4200" dirty="0"/>
+          </a:p>
+        </p:txBody>
+      </p:sp>
+      <p:sp>
+        <p:nvSpPr>
+          <p:cNvPr id="6" name="Text 2"/>
+          <p:cNvSpPr/>
+          <p:nvPr/>
+        </p:nvSpPr>
+        <p:spPr>
+          <a:xfrm>
+            <a:off x="1015901" y="2443163"/>
             <a:ext cx="609600" cy="63401"/>
           </a:xfrm>
           <a:prstGeom prst="roundRect">
@@ -2399,14 +2289,14 @@
       </p:sp>
       <p:sp>
         <p:nvSpPr>
-          <p:cNvPr id="9" name="Text 6"/>
-          <p:cNvSpPr/>
-          <p:nvPr/>
-        </p:nvSpPr>
-        <p:spPr>
-          <a:xfrm>
-            <a:off x="609600" y="2784277"/>
-            <a:ext cx="5052060" cy="990749"/>
+          <p:cNvPr id="7" name="Text 3"/>
+          <p:cNvSpPr/>
+          <p:nvPr/>
+        </p:nvSpPr>
+        <p:spPr>
+          <a:xfrm>
+            <a:off x="1015901" y="2735163"/>
+            <a:ext cx="6088279" cy="660499"/>
           </a:xfrm>
           <a:prstGeom prst="rect">
             <a:avLst/>
@@ -2441,21 +2331,21 @@
       </p:sp>
       <p:pic>
         <p:nvPicPr>
-          <p:cNvPr id="10" name="Image 1" descr="/Users/danwahlin/.copilot/session-state/56a7a0da-def8-48d4-b5e8-0ac3878cb8dd/files/slides-build/icons/FaGithub-0969DA.png">    </p:cNvPr>
+          <p:cNvPr id="8" name="Image 2" descr="/Users/danwahlin/.copilot/session-state/56a7a0da-def8-48d4-b5e8-0ac3878cb8dd/files/slides-build/icons/FaGithub-0969DA.png">    </p:cNvPr>
           <p:cNvPicPr>
             <a:picLocks noChangeAspect="1"/>
           </p:cNvPicPr>
           <p:nvPr/>
         </p:nvPicPr>
         <p:blipFill>
-          <a:blip r:embed="rId3"/>
+          <a:blip r:embed="rId4"/>
           <a:stretch>
             <a:fillRect/>
           </a:stretch>
         </p:blipFill>
         <p:spPr>
           <a:xfrm>
-            <a:off x="609600" y="4354562"/>
+            <a:off x="1015901" y="3660725"/>
             <a:ext cx="177701" cy="177701"/>
           </a:xfrm>
           <a:prstGeom prst="rect">
@@ -2465,13 +2355,13 @@
       </p:pic>
       <p:sp>
         <p:nvSpPr>
-          <p:cNvPr id="11" name="Text 7"/>
-          <p:cNvSpPr/>
-          <p:nvPr/>
-        </p:nvSpPr>
-        <p:spPr>
-          <a:xfrm>
-            <a:off x="876151" y="4343400"/>
+          <p:cNvPr id="9" name="Text 4"/>
+          <p:cNvSpPr/>
+          <p:nvPr/>
+        </p:nvSpPr>
+        <p:spPr>
+          <a:xfrm>
+            <a:off x="1282452" y="3649563"/>
             <a:ext cx="3373252" cy="200025"/>
           </a:xfrm>
           <a:prstGeom prst="rect">
@@ -2495,7 +2385,7 @@
                 <a:latin typeface="Arial" pitchFamily="34" charset="0"/>
                 <a:ea typeface="Arial" pitchFamily="34" charset="-122"/>
                 <a:cs typeface="Arial" pitchFamily="34" charset="-120"/>
-                <a:hlinkClick r:id="rId4" invalidUrl="" action="" tgtFrame="" tooltip="https://github.com/github/copilot-app-for-beginners/tree/main/06-canvases" history="1" highlightClick="0" endSnd="0">
+                <a:hlinkClick r:id="rId5" invalidUrl="" action="" tgtFrame="" tooltip="https://github.com/github/copilot-app-for-beginners/tree/main/06-canvases" history="1" highlightClick="0" endSnd="0">
                   <a:extLst>
                     <a:ext uri="{A12FA001-AC4F-418D-AE19-62706E023703}">
                       <ahyp:hlinkClr xmlns:ahyp="http://schemas.microsoft.com/office/drawing/2018/hyperlinkcolor" val="tx"/>
@@ -2541,112 +2431,9 @@
           <a:chExt cx="0" cy="0"/>
         </a:xfrm>
       </p:grpSpPr>
-      <p:sp>
-        <p:nvSpPr>
-          <p:cNvPr id="2" name="Text 0"/>
-          <p:cNvSpPr/>
-          <p:nvPr/>
-        </p:nvSpPr>
-        <p:spPr>
-          <a:xfrm>
-            <a:off x="0" y="0"/>
-            <a:ext cx="9144000" cy="76200"/>
-          </a:xfrm>
-          <a:prstGeom prst="rect">
-            <a:avLst/>
-          </a:prstGeom>
-          <a:solidFill>
-            <a:srgbClr val="1A7F37"/>
-          </a:solidFill>
-          <a:ln/>
-        </p:spPr>
-        <p:txBody>
-          <a:bodyPr wrap="square" rtlCol="0" anchor="ctr"/>
-          <a:lstStyle/>
-          <a:p>
-            <a:pPr indent="0" marL="0">
-              <a:buNone/>
-            </a:pPr>
-            <a:endParaRPr lang="en-US" dirty="0"/>
-          </a:p>
-        </p:txBody>
-      </p:sp>
-      <p:sp>
-        <p:nvSpPr>
-          <p:cNvPr id="3" name="Text 1"/>
-          <p:cNvSpPr/>
-          <p:nvPr/>
-        </p:nvSpPr>
-        <p:spPr>
-          <a:xfrm>
-            <a:off x="7340501" y="177701"/>
-            <a:ext cx="1168301" cy="279350"/>
-          </a:xfrm>
-          <a:prstGeom prst="roundRect">
-            <a:avLst>
-              <a:gd name="adj" fmla="val 22731"/>
-            </a:avLst>
-          </a:prstGeom>
-          <a:solidFill>
-            <a:srgbClr val="1A7F37"/>
-          </a:solidFill>
-          <a:ln/>
-        </p:spPr>
-        <p:txBody>
-          <a:bodyPr wrap="square" rtlCol="0" anchor="ctr"/>
-          <a:lstStyle/>
-          <a:p>
-            <a:pPr indent="0" marL="0">
-              <a:buNone/>
-            </a:pPr>
-            <a:endParaRPr lang="en-US" dirty="0"/>
-          </a:p>
-        </p:txBody>
-      </p:sp>
-      <p:sp>
-        <p:nvSpPr>
-          <p:cNvPr id="4" name="Text 2"/>
-          <p:cNvSpPr/>
-          <p:nvPr/>
-        </p:nvSpPr>
-        <p:spPr>
-          <a:xfrm>
-            <a:off x="7461041" y="231577"/>
-            <a:ext cx="927071" cy="171450"/>
-          </a:xfrm>
-          <a:prstGeom prst="rect">
-            <a:avLst/>
-          </a:prstGeom>
-          <a:noFill/>
-          <a:ln/>
-        </p:spPr>
-        <p:txBody>
-          <a:bodyPr wrap="square" lIns="0" tIns="0" rIns="0" bIns="0" rtlCol="0" anchor="t"/>
-          <a:lstStyle/>
-          <a:p>
-            <a:pPr algn="ctr" indent="0" marL="0">
-              <a:buNone/>
-            </a:pPr>
-            <a:r>
-              <a:rPr lang="en-US" sz="1150" b="1" dirty="0">
-                <a:solidFill>
-                  <a:srgbClr val="FFFFFF"/>
-                </a:solidFill>
-                <a:latin typeface="Arial" pitchFamily="34" charset="0"/>
-                <a:ea typeface="Arial" pitchFamily="34" charset="-122"/>
-                <a:cs typeface="Arial" pitchFamily="34" charset="-120"/>
-              </a:rPr>
-              <a:t>CHAPTER 06</a:t>
-            </a:r>
-            <a:endParaRPr lang="en-US" sz="1150" dirty="0"/>
-          </a:p>
-        </p:txBody>
-      </p:sp>
       <p:pic>
         <p:nvPicPr>
-          <p:cNvPr id="5" name="Image 0" descr="/Users/danwahlin/.copilot/session-state/56a7a0da-def8-48d4-b5e8-0ac3878cb8dd/files/slides-build/icons/FaGithub-1F2328.png">
-            <a:hlinkClick r:id="rId2" tooltip="https://github.com/github/copilot-app-for-beginners/tree/main/06-canvases"/>
-          </p:cNvPr>
+          <p:cNvPr id="2" name="Image 0" descr="/Users/danwahlin/.copilot/session-state/56a7a0da-def8-48d4-b5e8-0ac3878cb8dd/files/slides-build/img/grad-corner.png">    </p:cNvPr>
           <p:cNvPicPr>
             <a:picLocks noChangeAspect="1"/>
           </p:cNvPicPr>
@@ -2660,6 +2447,103 @@
         </p:blipFill>
         <p:spPr>
           <a:xfrm>
+            <a:off x="6349901" y="0"/>
+            <a:ext cx="2793950" cy="1308050"/>
+          </a:xfrm>
+          <a:prstGeom prst="rect">
+            <a:avLst/>
+          </a:prstGeom>
+        </p:spPr>
+      </p:pic>
+      <p:sp>
+        <p:nvSpPr>
+          <p:cNvPr id="3" name="Text 0"/>
+          <p:cNvSpPr/>
+          <p:nvPr/>
+        </p:nvSpPr>
+        <p:spPr>
+          <a:xfrm>
+            <a:off x="7340501" y="177701"/>
+            <a:ext cx="1168301" cy="279350"/>
+          </a:xfrm>
+          <a:prstGeom prst="roundRect">
+            <a:avLst>
+              <a:gd name="adj" fmla="val 22731"/>
+            </a:avLst>
+          </a:prstGeom>
+          <a:solidFill>
+            <a:srgbClr val="1A7F37"/>
+          </a:solidFill>
+          <a:ln/>
+        </p:spPr>
+        <p:txBody>
+          <a:bodyPr wrap="square" rtlCol="0" anchor="ctr"/>
+          <a:lstStyle/>
+          <a:p>
+            <a:pPr indent="0" marL="0">
+              <a:buNone/>
+            </a:pPr>
+            <a:endParaRPr lang="en-US" dirty="0"/>
+          </a:p>
+        </p:txBody>
+      </p:sp>
+      <p:sp>
+        <p:nvSpPr>
+          <p:cNvPr id="4" name="Text 1"/>
+          <p:cNvSpPr/>
+          <p:nvPr/>
+        </p:nvSpPr>
+        <p:spPr>
+          <a:xfrm>
+            <a:off x="7461041" y="231577"/>
+            <a:ext cx="927071" cy="171450"/>
+          </a:xfrm>
+          <a:prstGeom prst="rect">
+            <a:avLst/>
+          </a:prstGeom>
+          <a:noFill/>
+          <a:ln/>
+        </p:spPr>
+        <p:txBody>
+          <a:bodyPr wrap="square" lIns="0" tIns="0" rIns="0" bIns="0" rtlCol="0" anchor="t"/>
+          <a:lstStyle/>
+          <a:p>
+            <a:pPr algn="ctr" indent="0" marL="0">
+              <a:buNone/>
+            </a:pPr>
+            <a:r>
+              <a:rPr lang="en-US" sz="1150" b="1" dirty="0">
+                <a:solidFill>
+                  <a:srgbClr val="FFFFFF"/>
+                </a:solidFill>
+                <a:latin typeface="Arial" pitchFamily="34" charset="0"/>
+                <a:ea typeface="Arial" pitchFamily="34" charset="-122"/>
+                <a:cs typeface="Arial" pitchFamily="34" charset="-120"/>
+              </a:rPr>
+              <a:t>CHAPTER 06</a:t>
+            </a:r>
+            <a:endParaRPr lang="en-US" sz="1150" dirty="0"/>
+          </a:p>
+        </p:txBody>
+      </p:sp>
+      <p:pic>
+        <p:nvPicPr>
+          <p:cNvPr id="5" name="Image 1" descr="/Users/danwahlin/.copilot/session-state/56a7a0da-def8-48d4-b5e8-0ac3878cb8dd/files/slides-build/icons/FaGithub-1F2328.png">
+            <a:hlinkClick r:id="rId3" tooltip="https://github.com/github/copilot-app-for-beginners/tree/main/06-canvases"/>
+          </p:cNvPr>
+          <p:cNvPicPr>
+            <a:picLocks noChangeAspect="1"/>
+          </p:cNvPicPr>
+          <p:nvPr/>
+        </p:nvPicPr>
+        <p:blipFill>
+          <a:blip r:embed="rId2"/>
+          <a:stretch>
+            <a:fillRect/>
+          </a:stretch>
+        </p:blipFill>
+        <p:spPr>
+          <a:xfrm>
             <a:off x="8610600" y="165050"/>
             <a:ext cx="304800" cy="304800"/>
           </a:xfrm>
@@ -2670,7 +2554,7 @@
       </p:pic>
       <p:sp>
         <p:nvSpPr>
-          <p:cNvPr id="6" name="Text 3"/>
+          <p:cNvPr id="6" name="Text 2"/>
           <p:cNvSpPr/>
           <p:nvPr/>
         </p:nvSpPr>
@@ -2709,7 +2593,7 @@
       </p:sp>
       <p:sp>
         <p:nvSpPr>
-          <p:cNvPr id="7" name="Text 4"/>
+          <p:cNvPr id="7" name="Text 3"/>
           <p:cNvSpPr/>
           <p:nvPr/>
         </p:nvSpPr>
@@ -2754,7 +2638,7 @@
       </p:sp>
       <p:sp>
         <p:nvSpPr>
-          <p:cNvPr id="8" name="Text 5"/>
+          <p:cNvPr id="8" name="Text 4"/>
           <p:cNvSpPr/>
           <p:nvPr/>
         </p:nvSpPr>
@@ -2839,7 +2723,7 @@
       </p:sp>
       <p:sp>
         <p:nvSpPr>
-          <p:cNvPr id="9" name="Text 6"/>
+          <p:cNvPr id="9" name="Text 5"/>
           <p:cNvSpPr/>
           <p:nvPr/>
         </p:nvSpPr>
@@ -2871,144 +2755,7 @@
       </p:sp>
       <p:pic>
         <p:nvPicPr>
-          <p:cNvPr id="10" name="Image 1" descr="/Users/danwahlin/.copilot/session-state/56a7a0da-def8-48d4-b5e8-0ac3878cb8dd/files/slides-build/icons/GoMilestone-1A7F37.png">    </p:cNvPr>
-          <p:cNvPicPr>
-            <a:picLocks noChangeAspect="1"/>
-          </p:cNvPicPr>
-          <p:nvPr/>
-        </p:nvPicPr>
-        <p:blipFill>
-          <a:blip r:embed="rId3"/>
-          <a:stretch>
-            <a:fillRect/>
-          </a:stretch>
-        </p:blipFill>
-        <p:spPr>
-          <a:xfrm>
-            <a:off x="590550" y="1848148"/>
-            <a:ext cx="215801" cy="215801"/>
-          </a:xfrm>
-          <a:prstGeom prst="rect">
-            <a:avLst/>
-          </a:prstGeom>
-        </p:spPr>
-      </p:pic>
-      <p:sp>
-        <p:nvSpPr>
-          <p:cNvPr id="11" name="Text 7"/>
-          <p:cNvSpPr/>
-          <p:nvPr/>
-        </p:nvSpPr>
-        <p:spPr>
-          <a:xfrm>
-            <a:off x="1041350" y="1730127"/>
-            <a:ext cx="1562070" cy="228600"/>
-          </a:xfrm>
-          <a:prstGeom prst="rect">
-            <a:avLst/>
-          </a:prstGeom>
-          <a:noFill/>
-          <a:ln/>
-        </p:spPr>
-        <p:txBody>
-          <a:bodyPr wrap="square" lIns="0" tIns="0" rIns="0" bIns="0" rtlCol="0" anchor="t"/>
-          <a:lstStyle/>
-          <a:p>
-            <a:pPr algn="l" indent="0" marL="0">
-              <a:buNone/>
-            </a:pPr>
-            <a:r>
-              <a:rPr lang="en-US" sz="1550" b="1" dirty="0">
-                <a:solidFill>
-                  <a:srgbClr val="1F2328"/>
-                </a:solidFill>
-                <a:latin typeface="Arial" pitchFamily="34" charset="0"/>
-                <a:ea typeface="Arial" pitchFamily="34" charset="-122"/>
-                <a:cs typeface="Arial" pitchFamily="34" charset="-120"/>
-              </a:rPr>
-              <a:t>Five stages</a:t>
-            </a:r>
-            <a:endParaRPr lang="en-US" sz="1550" dirty="0"/>
-          </a:p>
-        </p:txBody>
-      </p:sp>
-      <p:sp>
-        <p:nvSpPr>
-          <p:cNvPr id="12" name="Text 8"/>
-          <p:cNvSpPr/>
-          <p:nvPr/>
-        </p:nvSpPr>
-        <p:spPr>
-          <a:xfrm>
-            <a:off x="1041350" y="1984028"/>
-            <a:ext cx="1562070" cy="198090"/>
-          </a:xfrm>
-          <a:prstGeom prst="rect">
-            <a:avLst/>
-          </a:prstGeom>
-          <a:noFill/>
-          <a:ln/>
-        </p:spPr>
-        <p:txBody>
-          <a:bodyPr wrap="square" lIns="0" tIns="0" rIns="0" bIns="0" rtlCol="0" anchor="t"/>
-          <a:lstStyle/>
-          <a:p>
-            <a:pPr algn="l" indent="0" marL="0">
-              <a:lnSpc>
-                <a:spcPts val="1560"/>
-              </a:lnSpc>
-              <a:buNone/>
-            </a:pPr>
-            <a:r>
-              <a:rPr lang="en-US" sz="1350" dirty="0">
-                <a:solidFill>
-                  <a:srgbClr val="59636E"/>
-                </a:solidFill>
-                <a:latin typeface="Arial" pitchFamily="34" charset="0"/>
-                <a:ea typeface="Arial" pitchFamily="34" charset="-122"/>
-                <a:cs typeface="Arial" pitchFamily="34" charset="-120"/>
-              </a:rPr>
-              <a:t>Propose to Validate.</a:t>
-            </a:r>
-            <a:endParaRPr lang="en-US" sz="1350" dirty="0"/>
-          </a:p>
-        </p:txBody>
-      </p:sp>
-      <p:sp>
-        <p:nvSpPr>
-          <p:cNvPr id="13" name="Text 9"/>
-          <p:cNvSpPr/>
-          <p:nvPr/>
-        </p:nvSpPr>
-        <p:spPr>
-          <a:xfrm>
-            <a:off x="507950" y="2494359"/>
-            <a:ext cx="381000" cy="381000"/>
-          </a:xfrm>
-          <a:prstGeom prst="roundRect">
-            <a:avLst>
-              <a:gd name="adj" fmla="val 23333"/>
-            </a:avLst>
-          </a:prstGeom>
-          <a:solidFill>
-            <a:srgbClr val="DAFBE1"/>
-          </a:solidFill>
-          <a:ln/>
-        </p:spPr>
-        <p:txBody>
-          <a:bodyPr wrap="square" rtlCol="0" anchor="ctr"/>
-          <a:lstStyle/>
-          <a:p>
-            <a:pPr indent="0" marL="0">
-              <a:buNone/>
-            </a:pPr>
-            <a:endParaRPr lang="en-US" dirty="0"/>
-          </a:p>
-        </p:txBody>
-      </p:sp>
-      <p:pic>
-        <p:nvPicPr>
-          <p:cNvPr id="14" name="Image 2" descr="/Users/danwahlin/.copilot/session-state/56a7a0da-def8-48d4-b5e8-0ac3878cb8dd/files/slides-build/icons/GoPencil-1A7F37.png">    </p:cNvPr>
+          <p:cNvPr id="10" name="Image 2" descr="/Users/danwahlin/.copilot/session-state/56a7a0da-def8-48d4-b5e8-0ac3878cb8dd/files/slides-build/icons/GoMilestone-1A7F37.png">    </p:cNvPr>
           <p:cNvPicPr>
             <a:picLocks noChangeAspect="1"/>
           </p:cNvPicPr>
@@ -3022,7 +2769,7 @@
         </p:blipFill>
         <p:spPr>
           <a:xfrm>
-            <a:off x="590550" y="2576959"/>
+            <a:off x="590550" y="1848148"/>
             <a:ext cx="215801" cy="215801"/>
           </a:xfrm>
           <a:prstGeom prst="rect">
@@ -3032,14 +2779,14 @@
       </p:pic>
       <p:sp>
         <p:nvSpPr>
-          <p:cNvPr id="15" name="Text 10"/>
-          <p:cNvSpPr/>
-          <p:nvPr/>
-        </p:nvSpPr>
-        <p:spPr>
-          <a:xfrm>
-            <a:off x="1041350" y="2359819"/>
-            <a:ext cx="2564892" cy="228600"/>
+          <p:cNvPr id="11" name="Text 6"/>
+          <p:cNvSpPr/>
+          <p:nvPr/>
+        </p:nvSpPr>
+        <p:spPr>
+          <a:xfrm>
+            <a:off x="1041350" y="1730127"/>
+            <a:ext cx="1562070" cy="228600"/>
           </a:xfrm>
           <a:prstGeom prst="rect">
             <a:avLst/>
@@ -3063,7 +2810,7 @@
                 <a:ea typeface="Arial" pitchFamily="34" charset="-122"/>
                 <a:cs typeface="Arial" pitchFamily="34" charset="-120"/>
               </a:rPr>
-              <a:t>Proposal</a:t>
+              <a:t>Five stages</a:t>
             </a:r>
             <a:endParaRPr lang="en-US" sz="1550" dirty="0"/>
           </a:p>
@@ -3071,14 +2818,14 @@
       </p:sp>
       <p:sp>
         <p:nvSpPr>
-          <p:cNvPr id="16" name="Text 11"/>
-          <p:cNvSpPr/>
-          <p:nvPr/>
-        </p:nvSpPr>
-        <p:spPr>
-          <a:xfrm>
-            <a:off x="1041350" y="2613720"/>
-            <a:ext cx="2564892" cy="396180"/>
+          <p:cNvPr id="12" name="Text 7"/>
+          <p:cNvSpPr/>
+          <p:nvPr/>
+        </p:nvSpPr>
+        <p:spPr>
+          <a:xfrm>
+            <a:off x="1041350" y="1984028"/>
+            <a:ext cx="1562070" cy="198090"/>
           </a:xfrm>
           <a:prstGeom prst="rect">
             <a:avLst/>
@@ -3105,41 +2852,7 @@
                 <a:ea typeface="Arial" pitchFamily="34" charset="-122"/>
                 <a:cs typeface="Arial" pitchFamily="34" charset="-120"/>
               </a:rPr>
-              <a:t>One field, one </a:t>
-            </a:r>
-            <a:pPr algn="l" indent="0" marL="0">
-              <a:lnSpc>
-                <a:spcPts val="1560"/>
-              </a:lnSpc>
-              <a:buNone/>
-            </a:pPr>
-            <a:r>
-              <a:rPr lang="en-US" sz="1350" b="1" dirty="0">
-                <a:solidFill>
-                  <a:srgbClr val="59636E"/>
-                </a:solidFill>
-                <a:latin typeface="Arial" pitchFamily="34" charset="0"/>
-                <a:ea typeface="Arial" pitchFamily="34" charset="-122"/>
-                <a:cs typeface="Arial" pitchFamily="34" charset="-120"/>
-              </a:rPr>
-              <a:t>Generate plan</a:t>
-            </a:r>
-            <a:pPr algn="l" indent="0" marL="0">
-              <a:lnSpc>
-                <a:spcPts val="1560"/>
-              </a:lnSpc>
-              <a:buNone/>
-            </a:pPr>
-            <a:r>
-              <a:rPr lang="en-US" sz="1350" dirty="0">
-                <a:solidFill>
-                  <a:srgbClr val="59636E"/>
-                </a:solidFill>
-                <a:latin typeface="Arial" pitchFamily="34" charset="0"/>
-                <a:ea typeface="Arial" pitchFamily="34" charset="-122"/>
-                <a:cs typeface="Arial" pitchFamily="34" charset="-120"/>
-              </a:rPr>
-              <a:t> button.</a:t>
+              <a:t>Propose to Validate.</a:t>
             </a:r>
             <a:endParaRPr lang="en-US" sz="1350" dirty="0"/>
           </a:p>
@@ -3147,13 +2860,13 @@
       </p:sp>
       <p:sp>
         <p:nvSpPr>
-          <p:cNvPr id="17" name="Text 12"/>
-          <p:cNvSpPr/>
-          <p:nvPr/>
-        </p:nvSpPr>
-        <p:spPr>
-          <a:xfrm>
-            <a:off x="507950" y="3322141"/>
+          <p:cNvPr id="13" name="Text 8"/>
+          <p:cNvSpPr/>
+          <p:nvPr/>
+        </p:nvSpPr>
+        <p:spPr>
+          <a:xfrm>
+            <a:off x="507950" y="2494359"/>
             <a:ext cx="381000" cy="381000"/>
           </a:xfrm>
           <a:prstGeom prst="roundRect">
@@ -3179,7 +2892,7 @@
       </p:sp>
       <p:pic>
         <p:nvPicPr>
-          <p:cNvPr id="18" name="Image 3" descr="/Users/danwahlin/.copilot/session-state/56a7a0da-def8-48d4-b5e8-0ac3878cb8dd/files/slides-build/icons/GoPlay-1A7F37.png">    </p:cNvPr>
+          <p:cNvPr id="14" name="Image 3" descr="/Users/danwahlin/.copilot/session-state/56a7a0da-def8-48d4-b5e8-0ac3878cb8dd/files/slides-build/icons/GoPencil-1A7F37.png">    </p:cNvPr>
           <p:cNvPicPr>
             <a:picLocks noChangeAspect="1"/>
           </p:cNvPicPr>
@@ -3193,7 +2906,7 @@
         </p:blipFill>
         <p:spPr>
           <a:xfrm>
-            <a:off x="590550" y="3404741"/>
+            <a:off x="590550" y="2576959"/>
             <a:ext cx="215801" cy="215801"/>
           </a:xfrm>
           <a:prstGeom prst="rect">
@@ -3203,13 +2916,13 @@
       </p:pic>
       <p:sp>
         <p:nvSpPr>
-          <p:cNvPr id="19" name="Text 13"/>
-          <p:cNvSpPr/>
-          <p:nvPr/>
-        </p:nvSpPr>
-        <p:spPr>
-          <a:xfrm>
-            <a:off x="1041350" y="3187601"/>
+          <p:cNvPr id="15" name="Text 9"/>
+          <p:cNvSpPr/>
+          <p:nvPr/>
+        </p:nvSpPr>
+        <p:spPr>
+          <a:xfrm>
+            <a:off x="1041350" y="2359819"/>
             <a:ext cx="2564892" cy="228600"/>
           </a:xfrm>
           <a:prstGeom prst="rect">
@@ -3234,7 +2947,7 @@
                 <a:ea typeface="Arial" pitchFamily="34" charset="-122"/>
                 <a:cs typeface="Arial" pitchFamily="34" charset="-120"/>
               </a:rPr>
-              <a:t>Actions</a:t>
+              <a:t>Proposal</a:t>
             </a:r>
             <a:endParaRPr lang="en-US" sz="1550" dirty="0"/>
           </a:p>
@@ -3242,13 +2955,13 @@
       </p:sp>
       <p:sp>
         <p:nvSpPr>
-          <p:cNvPr id="20" name="Text 14"/>
-          <p:cNvSpPr/>
-          <p:nvPr/>
-        </p:nvSpPr>
-        <p:spPr>
-          <a:xfrm>
-            <a:off x="1041350" y="3441502"/>
+          <p:cNvPr id="16" name="Text 10"/>
+          <p:cNvSpPr/>
+          <p:nvPr/>
+        </p:nvSpPr>
+        <p:spPr>
+          <a:xfrm>
+            <a:off x="1041350" y="2613720"/>
             <a:ext cx="2564892" cy="396180"/>
           </a:xfrm>
           <a:prstGeom prst="rect">
@@ -3276,7 +2989,41 @@
                 <a:ea typeface="Arial" pitchFamily="34" charset="-122"/>
                 <a:cs typeface="Arial" pitchFamily="34" charset="-120"/>
               </a:rPr>
-              <a:t>Each one asks the agent to do work.</a:t>
+              <a:t>One field, one </a:t>
+            </a:r>
+            <a:pPr algn="l" indent="0" marL="0">
+              <a:lnSpc>
+                <a:spcPts val="1560"/>
+              </a:lnSpc>
+              <a:buNone/>
+            </a:pPr>
+            <a:r>
+              <a:rPr lang="en-US" sz="1350" b="1" dirty="0">
+                <a:solidFill>
+                  <a:srgbClr val="59636E"/>
+                </a:solidFill>
+                <a:latin typeface="Arial" pitchFamily="34" charset="0"/>
+                <a:ea typeface="Arial" pitchFamily="34" charset="-122"/>
+                <a:cs typeface="Arial" pitchFamily="34" charset="-120"/>
+              </a:rPr>
+              <a:t>Generate plan</a:t>
+            </a:r>
+            <a:pPr algn="l" indent="0" marL="0">
+              <a:lnSpc>
+                <a:spcPts val="1560"/>
+              </a:lnSpc>
+              <a:buNone/>
+            </a:pPr>
+            <a:r>
+              <a:rPr lang="en-US" sz="1350" dirty="0">
+                <a:solidFill>
+                  <a:srgbClr val="59636E"/>
+                </a:solidFill>
+                <a:latin typeface="Arial" pitchFamily="34" charset="0"/>
+                <a:ea typeface="Arial" pitchFamily="34" charset="-122"/>
+                <a:cs typeface="Arial" pitchFamily="34" charset="-120"/>
+              </a:rPr>
+              <a:t> button.</a:t>
             </a:r>
             <a:endParaRPr lang="en-US" sz="1350" dirty="0"/>
           </a:p>
@@ -3284,13 +3031,13 @@
       </p:sp>
       <p:sp>
         <p:nvSpPr>
-          <p:cNvPr id="21" name="Text 15"/>
-          <p:cNvSpPr/>
-          <p:nvPr/>
-        </p:nvSpPr>
-        <p:spPr>
-          <a:xfrm>
-            <a:off x="507950" y="4050804"/>
+          <p:cNvPr id="17" name="Text 11"/>
+          <p:cNvSpPr/>
+          <p:nvPr/>
+        </p:nvSpPr>
+        <p:spPr>
+          <a:xfrm>
+            <a:off x="507950" y="3322141"/>
             <a:ext cx="381000" cy="381000"/>
           </a:xfrm>
           <a:prstGeom prst="roundRect">
@@ -3316,7 +3063,7 @@
       </p:sp>
       <p:pic>
         <p:nvPicPr>
-          <p:cNvPr id="22" name="Image 4" descr="/Users/danwahlin/.copilot/session-state/56a7a0da-def8-48d4-b5e8-0ac3878cb8dd/files/slides-build/icons/GoTasklist-1A7F37.png">    </p:cNvPr>
+          <p:cNvPr id="18" name="Image 4" descr="/Users/danwahlin/.copilot/session-state/56a7a0da-def8-48d4-b5e8-0ac3878cb8dd/files/slides-build/icons/GoPlay-1A7F37.png">    </p:cNvPr>
           <p:cNvPicPr>
             <a:picLocks noChangeAspect="1"/>
           </p:cNvPicPr>
@@ -3330,7 +3077,7 @@
         </p:blipFill>
         <p:spPr>
           <a:xfrm>
-            <a:off x="590550" y="4133404"/>
+            <a:off x="590550" y="3404741"/>
             <a:ext cx="215801" cy="215801"/>
           </a:xfrm>
           <a:prstGeom prst="rect">
@@ -3340,14 +3087,14 @@
       </p:pic>
       <p:sp>
         <p:nvSpPr>
-          <p:cNvPr id="23" name="Text 16"/>
-          <p:cNvSpPr/>
-          <p:nvPr/>
-        </p:nvSpPr>
-        <p:spPr>
-          <a:xfrm>
-            <a:off x="1041350" y="4015383"/>
-            <a:ext cx="2274490" cy="228600"/>
+          <p:cNvPr id="19" name="Text 12"/>
+          <p:cNvSpPr/>
+          <p:nvPr/>
+        </p:nvSpPr>
+        <p:spPr>
+          <a:xfrm>
+            <a:off x="1041350" y="3187601"/>
+            <a:ext cx="2564892" cy="228600"/>
           </a:xfrm>
           <a:prstGeom prst="rect">
             <a:avLst/>
@@ -3371,7 +3118,7 @@
                 <a:ea typeface="Arial" pitchFamily="34" charset="-122"/>
                 <a:cs typeface="Arial" pitchFamily="34" charset="-120"/>
               </a:rPr>
-              <a:t>Checklist and evidence</a:t>
+              <a:t>Actions</a:t>
             </a:r>
             <a:endParaRPr lang="en-US" sz="1550" dirty="0"/>
           </a:p>
@@ -3379,14 +3126,14 @@
       </p:sp>
       <p:sp>
         <p:nvSpPr>
-          <p:cNvPr id="24" name="Text 17"/>
-          <p:cNvSpPr/>
-          <p:nvPr/>
-        </p:nvSpPr>
-        <p:spPr>
-          <a:xfrm>
-            <a:off x="1041350" y="4269284"/>
-            <a:ext cx="2274490" cy="198090"/>
+          <p:cNvPr id="20" name="Text 13"/>
+          <p:cNvSpPr/>
+          <p:nvPr/>
+        </p:nvSpPr>
+        <p:spPr>
+          <a:xfrm>
+            <a:off x="1041350" y="3441502"/>
+            <a:ext cx="2564892" cy="396180"/>
           </a:xfrm>
           <a:prstGeom prst="rect">
             <a:avLst/>
@@ -3413,6 +3160,143 @@
                 <a:ea typeface="Arial" pitchFamily="34" charset="-122"/>
                 <a:cs typeface="Arial" pitchFamily="34" charset="-120"/>
               </a:rPr>
+              <a:t>Each one asks the agent to do work.</a:t>
+            </a:r>
+            <a:endParaRPr lang="en-US" sz="1350" dirty="0"/>
+          </a:p>
+        </p:txBody>
+      </p:sp>
+      <p:sp>
+        <p:nvSpPr>
+          <p:cNvPr id="21" name="Text 14"/>
+          <p:cNvSpPr/>
+          <p:nvPr/>
+        </p:nvSpPr>
+        <p:spPr>
+          <a:xfrm>
+            <a:off x="507950" y="4050804"/>
+            <a:ext cx="381000" cy="381000"/>
+          </a:xfrm>
+          <a:prstGeom prst="roundRect">
+            <a:avLst>
+              <a:gd name="adj" fmla="val 23333"/>
+            </a:avLst>
+          </a:prstGeom>
+          <a:solidFill>
+            <a:srgbClr val="DAFBE1"/>
+          </a:solidFill>
+          <a:ln/>
+        </p:spPr>
+        <p:txBody>
+          <a:bodyPr wrap="square" rtlCol="0" anchor="ctr"/>
+          <a:lstStyle/>
+          <a:p>
+            <a:pPr indent="0" marL="0">
+              <a:buNone/>
+            </a:pPr>
+            <a:endParaRPr lang="en-US" dirty="0"/>
+          </a:p>
+        </p:txBody>
+      </p:sp>
+      <p:pic>
+        <p:nvPicPr>
+          <p:cNvPr id="22" name="Image 5" descr="/Users/danwahlin/.copilot/session-state/56a7a0da-def8-48d4-b5e8-0ac3878cb8dd/files/slides-build/icons/GoTasklist-1A7F37.png">    </p:cNvPr>
+          <p:cNvPicPr>
+            <a:picLocks noChangeAspect="1"/>
+          </p:cNvPicPr>
+          <p:nvPr/>
+        </p:nvPicPr>
+        <p:blipFill>
+          <a:blip r:embed="rId7"/>
+          <a:stretch>
+            <a:fillRect/>
+          </a:stretch>
+        </p:blipFill>
+        <p:spPr>
+          <a:xfrm>
+            <a:off x="590550" y="4133404"/>
+            <a:ext cx="215801" cy="215801"/>
+          </a:xfrm>
+          <a:prstGeom prst="rect">
+            <a:avLst/>
+          </a:prstGeom>
+        </p:spPr>
+      </p:pic>
+      <p:sp>
+        <p:nvSpPr>
+          <p:cNvPr id="23" name="Text 15"/>
+          <p:cNvSpPr/>
+          <p:nvPr/>
+        </p:nvSpPr>
+        <p:spPr>
+          <a:xfrm>
+            <a:off x="1041350" y="4015383"/>
+            <a:ext cx="2274490" cy="228600"/>
+          </a:xfrm>
+          <a:prstGeom prst="rect">
+            <a:avLst/>
+          </a:prstGeom>
+          <a:noFill/>
+          <a:ln/>
+        </p:spPr>
+        <p:txBody>
+          <a:bodyPr wrap="square" lIns="0" tIns="0" rIns="0" bIns="0" rtlCol="0" anchor="t"/>
+          <a:lstStyle/>
+          <a:p>
+            <a:pPr algn="l" indent="0" marL="0">
+              <a:buNone/>
+            </a:pPr>
+            <a:r>
+              <a:rPr lang="en-US" sz="1550" b="1" dirty="0">
+                <a:solidFill>
+                  <a:srgbClr val="1F2328"/>
+                </a:solidFill>
+                <a:latin typeface="Arial" pitchFamily="34" charset="0"/>
+                <a:ea typeface="Arial" pitchFamily="34" charset="-122"/>
+                <a:cs typeface="Arial" pitchFamily="34" charset="-120"/>
+              </a:rPr>
+              <a:t>Checklist and evidence</a:t>
+            </a:r>
+            <a:endParaRPr lang="en-US" sz="1550" dirty="0"/>
+          </a:p>
+        </p:txBody>
+      </p:sp>
+      <p:sp>
+        <p:nvSpPr>
+          <p:cNvPr id="24" name="Text 16"/>
+          <p:cNvSpPr/>
+          <p:nvPr/>
+        </p:nvSpPr>
+        <p:spPr>
+          <a:xfrm>
+            <a:off x="1041350" y="4269284"/>
+            <a:ext cx="2274490" cy="198090"/>
+          </a:xfrm>
+          <a:prstGeom prst="rect">
+            <a:avLst/>
+          </a:prstGeom>
+          <a:noFill/>
+          <a:ln/>
+        </p:spPr>
+        <p:txBody>
+          <a:bodyPr wrap="square" lIns="0" tIns="0" rIns="0" bIns="0" rtlCol="0" anchor="t"/>
+          <a:lstStyle/>
+          <a:p>
+            <a:pPr algn="l" indent="0" marL="0">
+              <a:lnSpc>
+                <a:spcPts val="1560"/>
+              </a:lnSpc>
+              <a:buNone/>
+            </a:pPr>
+            <a:r>
+              <a:rPr lang="en-US" sz="1350" dirty="0">
+                <a:solidFill>
+                  <a:srgbClr val="59636E"/>
+                </a:solidFill>
+                <a:latin typeface="Arial" pitchFamily="34" charset="0"/>
+                <a:ea typeface="Arial" pitchFamily="34" charset="-122"/>
+                <a:cs typeface="Arial" pitchFamily="34" charset="-120"/>
+              </a:rPr>
               <a:t>Marked only from real output.</a:t>
             </a:r>
             <a:endParaRPr lang="en-US" sz="1350" dirty="0"/>
@@ -3421,7 +3305,7 @@
       </p:sp>
       <p:sp>
         <p:nvSpPr>
-          <p:cNvPr id="25" name="Text 18"/>
+          <p:cNvPr id="25" name="Text 17"/>
           <p:cNvSpPr/>
           <p:nvPr/>
         </p:nvSpPr>
@@ -3464,14 +3348,14 @@
       </p:sp>
       <p:pic>
         <p:nvPicPr>
-          <p:cNvPr id="26" name="Image 5" descr="/Users/danwahlin/.copilot/session-state/56a7a0da-def8-48d4-b5e8-0ac3878cb8dd/files/slides-build/img/06-workbench-crop.png">    </p:cNvPr>
+          <p:cNvPr id="26" name="Image 6" descr="/Users/danwahlin/.copilot/session-state/56a7a0da-def8-48d4-b5e8-0ac3878cb8dd/files/slides-build/img/06-workbench-crop.png">    </p:cNvPr>
           <p:cNvPicPr>
             <a:picLocks noChangeAspect="1"/>
           </p:cNvPicPr>
           <p:nvPr/>
         </p:nvPicPr>
         <p:blipFill>
-          <a:blip r:embed="rId7"/>
+          <a:blip r:embed="rId8"/>
           <a:stretch>
             <a:fillRect/>
           </a:stretch>
@@ -3518,112 +3402,9 @@
           <a:chExt cx="0" cy="0"/>
         </a:xfrm>
       </p:grpSpPr>
-      <p:sp>
-        <p:nvSpPr>
-          <p:cNvPr id="2" name="Text 0"/>
-          <p:cNvSpPr/>
-          <p:nvPr/>
-        </p:nvSpPr>
-        <p:spPr>
-          <a:xfrm>
-            <a:off x="0" y="0"/>
-            <a:ext cx="9144000" cy="76200"/>
-          </a:xfrm>
-          <a:prstGeom prst="rect">
-            <a:avLst/>
-          </a:prstGeom>
-          <a:solidFill>
-            <a:srgbClr val="1A7F37"/>
-          </a:solidFill>
-          <a:ln/>
-        </p:spPr>
-        <p:txBody>
-          <a:bodyPr wrap="square" rtlCol="0" anchor="ctr"/>
-          <a:lstStyle/>
-          <a:p>
-            <a:pPr indent="0" marL="0">
-              <a:buNone/>
-            </a:pPr>
-            <a:endParaRPr lang="en-US" dirty="0"/>
-          </a:p>
-        </p:txBody>
-      </p:sp>
-      <p:sp>
-        <p:nvSpPr>
-          <p:cNvPr id="3" name="Text 1"/>
-          <p:cNvSpPr/>
-          <p:nvPr/>
-        </p:nvSpPr>
-        <p:spPr>
-          <a:xfrm>
-            <a:off x="7340501" y="177701"/>
-            <a:ext cx="1168301" cy="279350"/>
-          </a:xfrm>
-          <a:prstGeom prst="roundRect">
-            <a:avLst>
-              <a:gd name="adj" fmla="val 22731"/>
-            </a:avLst>
-          </a:prstGeom>
-          <a:solidFill>
-            <a:srgbClr val="1A7F37"/>
-          </a:solidFill>
-          <a:ln/>
-        </p:spPr>
-        <p:txBody>
-          <a:bodyPr wrap="square" rtlCol="0" anchor="ctr"/>
-          <a:lstStyle/>
-          <a:p>
-            <a:pPr indent="0" marL="0">
-              <a:buNone/>
-            </a:pPr>
-            <a:endParaRPr lang="en-US" dirty="0"/>
-          </a:p>
-        </p:txBody>
-      </p:sp>
-      <p:sp>
-        <p:nvSpPr>
-          <p:cNvPr id="4" name="Text 2"/>
-          <p:cNvSpPr/>
-          <p:nvPr/>
-        </p:nvSpPr>
-        <p:spPr>
-          <a:xfrm>
-            <a:off x="7461041" y="231577"/>
-            <a:ext cx="927071" cy="171450"/>
-          </a:xfrm>
-          <a:prstGeom prst="rect">
-            <a:avLst/>
-          </a:prstGeom>
-          <a:noFill/>
-          <a:ln/>
-        </p:spPr>
-        <p:txBody>
-          <a:bodyPr wrap="square" lIns="0" tIns="0" rIns="0" bIns="0" rtlCol="0" anchor="t"/>
-          <a:lstStyle/>
-          <a:p>
-            <a:pPr algn="ctr" indent="0" marL="0">
-              <a:buNone/>
-            </a:pPr>
-            <a:r>
-              <a:rPr lang="en-US" sz="1150" b="1" dirty="0">
-                <a:solidFill>
-                  <a:srgbClr val="FFFFFF"/>
-                </a:solidFill>
-                <a:latin typeface="Arial" pitchFamily="34" charset="0"/>
-                <a:ea typeface="Arial" pitchFamily="34" charset="-122"/>
-                <a:cs typeface="Arial" pitchFamily="34" charset="-120"/>
-              </a:rPr>
-              <a:t>CHAPTER 06</a:t>
-            </a:r>
-            <a:endParaRPr lang="en-US" sz="1150" dirty="0"/>
-          </a:p>
-        </p:txBody>
-      </p:sp>
       <p:pic>
         <p:nvPicPr>
-          <p:cNvPr id="5" name="Image 0" descr="/Users/danwahlin/.copilot/session-state/56a7a0da-def8-48d4-b5e8-0ac3878cb8dd/files/slides-build/icons/FaGithub-1F2328.png">
-            <a:hlinkClick r:id="rId2" tooltip="https://github.com/github/copilot-app-for-beginners/tree/main/06-canvases"/>
-          </p:cNvPr>
+          <p:cNvPr id="2" name="Image 0" descr="/Users/danwahlin/.copilot/session-state/56a7a0da-def8-48d4-b5e8-0ac3878cb8dd/files/slides-build/img/grad-corner.png">    </p:cNvPr>
           <p:cNvPicPr>
             <a:picLocks noChangeAspect="1"/>
           </p:cNvPicPr>
@@ -3637,6 +3418,103 @@
         </p:blipFill>
         <p:spPr>
           <a:xfrm>
+            <a:off x="6349901" y="0"/>
+            <a:ext cx="2793950" cy="1308050"/>
+          </a:xfrm>
+          <a:prstGeom prst="rect">
+            <a:avLst/>
+          </a:prstGeom>
+        </p:spPr>
+      </p:pic>
+      <p:sp>
+        <p:nvSpPr>
+          <p:cNvPr id="3" name="Text 0"/>
+          <p:cNvSpPr/>
+          <p:nvPr/>
+        </p:nvSpPr>
+        <p:spPr>
+          <a:xfrm>
+            <a:off x="7340501" y="177701"/>
+            <a:ext cx="1168301" cy="279350"/>
+          </a:xfrm>
+          <a:prstGeom prst="roundRect">
+            <a:avLst>
+              <a:gd name="adj" fmla="val 22731"/>
+            </a:avLst>
+          </a:prstGeom>
+          <a:solidFill>
+            <a:srgbClr val="1A7F37"/>
+          </a:solidFill>
+          <a:ln/>
+        </p:spPr>
+        <p:txBody>
+          <a:bodyPr wrap="square" rtlCol="0" anchor="ctr"/>
+          <a:lstStyle/>
+          <a:p>
+            <a:pPr indent="0" marL="0">
+              <a:buNone/>
+            </a:pPr>
+            <a:endParaRPr lang="en-US" dirty="0"/>
+          </a:p>
+        </p:txBody>
+      </p:sp>
+      <p:sp>
+        <p:nvSpPr>
+          <p:cNvPr id="4" name="Text 1"/>
+          <p:cNvSpPr/>
+          <p:nvPr/>
+        </p:nvSpPr>
+        <p:spPr>
+          <a:xfrm>
+            <a:off x="7461041" y="231577"/>
+            <a:ext cx="927071" cy="171450"/>
+          </a:xfrm>
+          <a:prstGeom prst="rect">
+            <a:avLst/>
+          </a:prstGeom>
+          <a:noFill/>
+          <a:ln/>
+        </p:spPr>
+        <p:txBody>
+          <a:bodyPr wrap="square" lIns="0" tIns="0" rIns="0" bIns="0" rtlCol="0" anchor="t"/>
+          <a:lstStyle/>
+          <a:p>
+            <a:pPr algn="ctr" indent="0" marL="0">
+              <a:buNone/>
+            </a:pPr>
+            <a:r>
+              <a:rPr lang="en-US" sz="1150" b="1" dirty="0">
+                <a:solidFill>
+                  <a:srgbClr val="FFFFFF"/>
+                </a:solidFill>
+                <a:latin typeface="Arial" pitchFamily="34" charset="0"/>
+                <a:ea typeface="Arial" pitchFamily="34" charset="-122"/>
+                <a:cs typeface="Arial" pitchFamily="34" charset="-120"/>
+              </a:rPr>
+              <a:t>CHAPTER 06</a:t>
+            </a:r>
+            <a:endParaRPr lang="en-US" sz="1150" dirty="0"/>
+          </a:p>
+        </p:txBody>
+      </p:sp>
+      <p:pic>
+        <p:nvPicPr>
+          <p:cNvPr id="5" name="Image 1" descr="/Users/danwahlin/.copilot/session-state/56a7a0da-def8-48d4-b5e8-0ac3878cb8dd/files/slides-build/icons/FaGithub-1F2328.png">
+            <a:hlinkClick r:id="rId3" tooltip="https://github.com/github/copilot-app-for-beginners/tree/main/06-canvases"/>
+          </p:cNvPr>
+          <p:cNvPicPr>
+            <a:picLocks noChangeAspect="1"/>
+          </p:cNvPicPr>
+          <p:nvPr/>
+        </p:nvPicPr>
+        <p:blipFill>
+          <a:blip r:embed="rId2"/>
+          <a:stretch>
+            <a:fillRect/>
+          </a:stretch>
+        </p:blipFill>
+        <p:spPr>
+          <a:xfrm>
             <a:off x="8610600" y="165050"/>
             <a:ext cx="304800" cy="304800"/>
           </a:xfrm>
@@ -3647,7 +3525,7 @@
       </p:pic>
       <p:sp>
         <p:nvSpPr>
-          <p:cNvPr id="6" name="Text 3"/>
+          <p:cNvPr id="6" name="Text 2"/>
           <p:cNvSpPr/>
           <p:nvPr/>
         </p:nvSpPr>
@@ -3686,7 +3564,7 @@
       </p:sp>
       <p:sp>
         <p:nvSpPr>
-          <p:cNvPr id="7" name="Text 4"/>
+          <p:cNvPr id="7" name="Text 3"/>
           <p:cNvSpPr/>
           <p:nvPr/>
         </p:nvSpPr>
@@ -3731,7 +3609,7 @@
       </p:sp>
       <p:sp>
         <p:nvSpPr>
-          <p:cNvPr id="8" name="Text 5"/>
+          <p:cNvPr id="8" name="Text 4"/>
           <p:cNvSpPr/>
           <p:nvPr/>
         </p:nvSpPr>
@@ -3816,7 +3694,7 @@
       </p:sp>
       <p:sp>
         <p:nvSpPr>
-          <p:cNvPr id="9" name="Text 6"/>
+          <p:cNvPr id="9" name="Text 5"/>
           <p:cNvSpPr/>
           <p:nvPr/>
         </p:nvSpPr>
@@ -3848,7 +3726,7 @@
       </p:sp>
       <p:sp>
         <p:nvSpPr>
-          <p:cNvPr id="10" name="Text 7"/>
+          <p:cNvPr id="10" name="Text 6"/>
           <p:cNvSpPr/>
           <p:nvPr/>
         </p:nvSpPr>
@@ -3887,7 +3765,7 @@
       </p:sp>
       <p:sp>
         <p:nvSpPr>
-          <p:cNvPr id="11" name="Text 8"/>
+          <p:cNvPr id="11" name="Text 7"/>
           <p:cNvSpPr/>
           <p:nvPr/>
         </p:nvSpPr>
@@ -3930,14 +3808,14 @@
       </p:sp>
       <p:pic>
         <p:nvPicPr>
-          <p:cNvPr id="12" name="Image 1" descr="/Users/danwahlin/.copilot/session-state/56a7a0da-def8-48d4-b5e8-0ac3878cb8dd/files/slides-build/img/06-plan-crop.png">    </p:cNvPr>
+          <p:cNvPr id="12" name="Image 2" descr="/Users/danwahlin/.copilot/session-state/56a7a0da-def8-48d4-b5e8-0ac3878cb8dd/files/slides-build/img/06-plan-crop.png">    </p:cNvPr>
           <p:cNvPicPr>
             <a:picLocks noChangeAspect="1"/>
           </p:cNvPicPr>
           <p:nvPr/>
         </p:nvPicPr>
         <p:blipFill>
-          <a:blip r:embed="rId3"/>
+          <a:blip r:embed="rId4"/>
           <a:stretch>
             <a:fillRect/>
           </a:stretch>
@@ -3954,7 +3832,7 @@
       </p:pic>
       <p:sp>
         <p:nvSpPr>
-          <p:cNvPr id="13" name="Text 9"/>
+          <p:cNvPr id="13" name="Text 8"/>
           <p:cNvSpPr/>
           <p:nvPr/>
         </p:nvSpPr>
@@ -3986,7 +3864,7 @@
       </p:sp>
       <p:sp>
         <p:nvSpPr>
-          <p:cNvPr id="14" name="Text 10"/>
+          <p:cNvPr id="14" name="Text 9"/>
           <p:cNvSpPr/>
           <p:nvPr/>
         </p:nvSpPr>
@@ -4025,7 +3903,7 @@
       </p:sp>
       <p:sp>
         <p:nvSpPr>
-          <p:cNvPr id="15" name="Text 11"/>
+          <p:cNvPr id="15" name="Text 10"/>
           <p:cNvSpPr/>
           <p:nvPr/>
         </p:nvSpPr>
@@ -4068,14 +3946,14 @@
       </p:sp>
       <p:pic>
         <p:nvPicPr>
-          <p:cNvPr id="16" name="Image 2" descr="/Users/danwahlin/.copilot/session-state/56a7a0da-def8-48d4-b5e8-0ac3878cb8dd/files/slides-build/img/06-baseline-ev-crop.png">    </p:cNvPr>
+          <p:cNvPr id="16" name="Image 3" descr="/Users/danwahlin/.copilot/session-state/56a7a0da-def8-48d4-b5e8-0ac3878cb8dd/files/slides-build/img/06-baseline-ev-crop.png">    </p:cNvPr>
           <p:cNvPicPr>
             <a:picLocks noChangeAspect="1"/>
           </p:cNvPicPr>
           <p:nvPr/>
         </p:nvPicPr>
         <p:blipFill>
-          <a:blip r:embed="rId4"/>
+          <a:blip r:embed="rId5"/>
           <a:stretch>
             <a:fillRect/>
           </a:stretch>
@@ -4092,7 +3970,7 @@
       </p:pic>
       <p:sp>
         <p:nvSpPr>
-          <p:cNvPr id="17" name="Text 12"/>
+          <p:cNvPr id="17" name="Text 11"/>
           <p:cNvSpPr/>
           <p:nvPr/>
         </p:nvSpPr>
@@ -4249,112 +4127,9 @@
           <a:chExt cx="0" cy="0"/>
         </a:xfrm>
       </p:grpSpPr>
-      <p:sp>
-        <p:nvSpPr>
-          <p:cNvPr id="2" name="Text 0"/>
-          <p:cNvSpPr/>
-          <p:nvPr/>
-        </p:nvSpPr>
-        <p:spPr>
-          <a:xfrm>
-            <a:off x="0" y="0"/>
-            <a:ext cx="9144000" cy="76200"/>
-          </a:xfrm>
-          <a:prstGeom prst="rect">
-            <a:avLst/>
-          </a:prstGeom>
-          <a:solidFill>
-            <a:srgbClr val="1A7F37"/>
-          </a:solidFill>
-          <a:ln/>
-        </p:spPr>
-        <p:txBody>
-          <a:bodyPr wrap="square" rtlCol="0" anchor="ctr"/>
-          <a:lstStyle/>
-          <a:p>
-            <a:pPr indent="0" marL="0">
-              <a:buNone/>
-            </a:pPr>
-            <a:endParaRPr lang="en-US" dirty="0"/>
-          </a:p>
-        </p:txBody>
-      </p:sp>
-      <p:sp>
-        <p:nvSpPr>
-          <p:cNvPr id="3" name="Text 1"/>
-          <p:cNvSpPr/>
-          <p:nvPr/>
-        </p:nvSpPr>
-        <p:spPr>
-          <a:xfrm>
-            <a:off x="7340501" y="177701"/>
-            <a:ext cx="1168301" cy="279350"/>
-          </a:xfrm>
-          <a:prstGeom prst="roundRect">
-            <a:avLst>
-              <a:gd name="adj" fmla="val 22731"/>
-            </a:avLst>
-          </a:prstGeom>
-          <a:solidFill>
-            <a:srgbClr val="1A7F37"/>
-          </a:solidFill>
-          <a:ln/>
-        </p:spPr>
-        <p:txBody>
-          <a:bodyPr wrap="square" rtlCol="0" anchor="ctr"/>
-          <a:lstStyle/>
-          <a:p>
-            <a:pPr indent="0" marL="0">
-              <a:buNone/>
-            </a:pPr>
-            <a:endParaRPr lang="en-US" dirty="0"/>
-          </a:p>
-        </p:txBody>
-      </p:sp>
-      <p:sp>
-        <p:nvSpPr>
-          <p:cNvPr id="4" name="Text 2"/>
-          <p:cNvSpPr/>
-          <p:nvPr/>
-        </p:nvSpPr>
-        <p:spPr>
-          <a:xfrm>
-            <a:off x="7461041" y="231577"/>
-            <a:ext cx="927071" cy="171450"/>
-          </a:xfrm>
-          <a:prstGeom prst="rect">
-            <a:avLst/>
-          </a:prstGeom>
-          <a:noFill/>
-          <a:ln/>
-        </p:spPr>
-        <p:txBody>
-          <a:bodyPr wrap="square" lIns="0" tIns="0" rIns="0" bIns="0" rtlCol="0" anchor="t"/>
-          <a:lstStyle/>
-          <a:p>
-            <a:pPr algn="ctr" indent="0" marL="0">
-              <a:buNone/>
-            </a:pPr>
-            <a:r>
-              <a:rPr lang="en-US" sz="1150" b="1" dirty="0">
-                <a:solidFill>
-                  <a:srgbClr val="FFFFFF"/>
-                </a:solidFill>
-                <a:latin typeface="Arial" pitchFamily="34" charset="0"/>
-                <a:ea typeface="Arial" pitchFamily="34" charset="-122"/>
-                <a:cs typeface="Arial" pitchFamily="34" charset="-120"/>
-              </a:rPr>
-              <a:t>CHAPTER 06</a:t>
-            </a:r>
-            <a:endParaRPr lang="en-US" sz="1150" dirty="0"/>
-          </a:p>
-        </p:txBody>
-      </p:sp>
       <p:pic>
         <p:nvPicPr>
-          <p:cNvPr id="5" name="Image 0" descr="/Users/danwahlin/.copilot/session-state/56a7a0da-def8-48d4-b5e8-0ac3878cb8dd/files/slides-build/icons/FaGithub-1F2328.png">
-            <a:hlinkClick r:id="rId2" tooltip="https://github.com/github/copilot-app-for-beginners/tree/main/06-canvases"/>
-          </p:cNvPr>
+          <p:cNvPr id="2" name="Image 0" descr="/Users/danwahlin/.copilot/session-state/56a7a0da-def8-48d4-b5e8-0ac3878cb8dd/files/slides-build/img/grad-corner.png">    </p:cNvPr>
           <p:cNvPicPr>
             <a:picLocks noChangeAspect="1"/>
           </p:cNvPicPr>
@@ -4368,6 +4143,103 @@
         </p:blipFill>
         <p:spPr>
           <a:xfrm>
+            <a:off x="6349901" y="0"/>
+            <a:ext cx="2793950" cy="1308050"/>
+          </a:xfrm>
+          <a:prstGeom prst="rect">
+            <a:avLst/>
+          </a:prstGeom>
+        </p:spPr>
+      </p:pic>
+      <p:sp>
+        <p:nvSpPr>
+          <p:cNvPr id="3" name="Text 0"/>
+          <p:cNvSpPr/>
+          <p:nvPr/>
+        </p:nvSpPr>
+        <p:spPr>
+          <a:xfrm>
+            <a:off x="7340501" y="177701"/>
+            <a:ext cx="1168301" cy="279350"/>
+          </a:xfrm>
+          <a:prstGeom prst="roundRect">
+            <a:avLst>
+              <a:gd name="adj" fmla="val 22731"/>
+            </a:avLst>
+          </a:prstGeom>
+          <a:solidFill>
+            <a:srgbClr val="1A7F37"/>
+          </a:solidFill>
+          <a:ln/>
+        </p:spPr>
+        <p:txBody>
+          <a:bodyPr wrap="square" rtlCol="0" anchor="ctr"/>
+          <a:lstStyle/>
+          <a:p>
+            <a:pPr indent="0" marL="0">
+              <a:buNone/>
+            </a:pPr>
+            <a:endParaRPr lang="en-US" dirty="0"/>
+          </a:p>
+        </p:txBody>
+      </p:sp>
+      <p:sp>
+        <p:nvSpPr>
+          <p:cNvPr id="4" name="Text 1"/>
+          <p:cNvSpPr/>
+          <p:nvPr/>
+        </p:nvSpPr>
+        <p:spPr>
+          <a:xfrm>
+            <a:off x="7461041" y="231577"/>
+            <a:ext cx="927071" cy="171450"/>
+          </a:xfrm>
+          <a:prstGeom prst="rect">
+            <a:avLst/>
+          </a:prstGeom>
+          <a:noFill/>
+          <a:ln/>
+        </p:spPr>
+        <p:txBody>
+          <a:bodyPr wrap="square" lIns="0" tIns="0" rIns="0" bIns="0" rtlCol="0" anchor="t"/>
+          <a:lstStyle/>
+          <a:p>
+            <a:pPr algn="ctr" indent="0" marL="0">
+              <a:buNone/>
+            </a:pPr>
+            <a:r>
+              <a:rPr lang="en-US" sz="1150" b="1" dirty="0">
+                <a:solidFill>
+                  <a:srgbClr val="FFFFFF"/>
+                </a:solidFill>
+                <a:latin typeface="Arial" pitchFamily="34" charset="0"/>
+                <a:ea typeface="Arial" pitchFamily="34" charset="-122"/>
+                <a:cs typeface="Arial" pitchFamily="34" charset="-120"/>
+              </a:rPr>
+              <a:t>CHAPTER 06</a:t>
+            </a:r>
+            <a:endParaRPr lang="en-US" sz="1150" dirty="0"/>
+          </a:p>
+        </p:txBody>
+      </p:sp>
+      <p:pic>
+        <p:nvPicPr>
+          <p:cNvPr id="5" name="Image 1" descr="/Users/danwahlin/.copilot/session-state/56a7a0da-def8-48d4-b5e8-0ac3878cb8dd/files/slides-build/icons/FaGithub-1F2328.png">
+            <a:hlinkClick r:id="rId3" tooltip="https://github.com/github/copilot-app-for-beginners/tree/main/06-canvases"/>
+          </p:cNvPr>
+          <p:cNvPicPr>
+            <a:picLocks noChangeAspect="1"/>
+          </p:cNvPicPr>
+          <p:nvPr/>
+        </p:nvPicPr>
+        <p:blipFill>
+          <a:blip r:embed="rId2"/>
+          <a:stretch>
+            <a:fillRect/>
+          </a:stretch>
+        </p:blipFill>
+        <p:spPr>
+          <a:xfrm>
             <a:off x="8610600" y="165050"/>
             <a:ext cx="304800" cy="304800"/>
           </a:xfrm>
@@ -4378,7 +4250,7 @@
       </p:pic>
       <p:sp>
         <p:nvSpPr>
-          <p:cNvPr id="6" name="Text 3"/>
+          <p:cNvPr id="6" name="Text 2"/>
           <p:cNvSpPr/>
           <p:nvPr/>
         </p:nvSpPr>
@@ -4417,7 +4289,7 @@
       </p:sp>
       <p:sp>
         <p:nvSpPr>
-          <p:cNvPr id="7" name="Text 4"/>
+          <p:cNvPr id="7" name="Text 3"/>
           <p:cNvSpPr/>
           <p:nvPr/>
         </p:nvSpPr>
@@ -4462,7 +4334,7 @@
       </p:sp>
       <p:sp>
         <p:nvSpPr>
-          <p:cNvPr id="8" name="Text 5"/>
+          <p:cNvPr id="8" name="Text 4"/>
           <p:cNvSpPr/>
           <p:nvPr/>
         </p:nvSpPr>
@@ -4587,7 +4459,7 @@
       </p:sp>
       <p:sp>
         <p:nvSpPr>
-          <p:cNvPr id="9" name="Text 6"/>
+          <p:cNvPr id="9" name="Text 5"/>
           <p:cNvSpPr/>
           <p:nvPr/>
         </p:nvSpPr>
@@ -4630,14 +4502,14 @@
       </p:sp>
       <p:pic>
         <p:nvPicPr>
-          <p:cNvPr id="10" name="Image 1" descr="/Users/danwahlin/.copilot/session-state/56a7a0da-def8-48d4-b5e8-0ac3878cb8dd/files/slides-build/img/06-implement-crop.png">    </p:cNvPr>
+          <p:cNvPr id="10" name="Image 2" descr="/Users/danwahlin/.copilot/session-state/56a7a0da-def8-48d4-b5e8-0ac3878cb8dd/files/slides-build/img/06-implement-crop.png">    </p:cNvPr>
           <p:cNvPicPr>
             <a:picLocks noChangeAspect="1"/>
           </p:cNvPicPr>
           <p:nvPr/>
         </p:nvPicPr>
         <p:blipFill>
-          <a:blip r:embed="rId3"/>
+          <a:blip r:embed="rId4"/>
           <a:stretch>
             <a:fillRect/>
           </a:stretch>
@@ -4654,7 +4526,7 @@
       </p:pic>
       <p:sp>
         <p:nvSpPr>
-          <p:cNvPr id="11" name="Text 7"/>
+          <p:cNvPr id="11" name="Text 6"/>
           <p:cNvSpPr/>
           <p:nvPr/>
         </p:nvSpPr>
@@ -4690,7 +4562,7 @@
       </p:sp>
       <p:sp>
         <p:nvSpPr>
-          <p:cNvPr id="12" name="Text 8"/>
+          <p:cNvPr id="12" name="Text 7"/>
           <p:cNvSpPr/>
           <p:nvPr/>
         </p:nvSpPr>
@@ -4720,7 +4592,7 @@
       </p:sp>
       <p:sp>
         <p:nvSpPr>
-          <p:cNvPr id="13" name="Shape 9"/>
+          <p:cNvPr id="13" name="Shape 8"/>
           <p:cNvSpPr/>
           <p:nvPr/>
         </p:nvSpPr>
@@ -4743,7 +4615,7 @@
       </p:sp>
       <p:sp>
         <p:nvSpPr>
-          <p:cNvPr id="14" name="Text 10"/>
+          <p:cNvPr id="14" name="Text 9"/>
           <p:cNvSpPr/>
           <p:nvPr/>
         </p:nvSpPr>
@@ -4785,7 +4657,7 @@
       </p:sp>
       <p:sp>
         <p:nvSpPr>
-          <p:cNvPr id="15" name="Text 11"/>
+          <p:cNvPr id="15" name="Text 10"/>
           <p:cNvSpPr/>
           <p:nvPr/>
         </p:nvSpPr>
@@ -4827,7 +4699,7 @@
       </p:sp>
       <p:sp>
         <p:nvSpPr>
-          <p:cNvPr id="16" name="Shape 12"/>
+          <p:cNvPr id="16" name="Shape 11"/>
           <p:cNvSpPr/>
           <p:nvPr/>
         </p:nvSpPr>
@@ -4850,7 +4722,7 @@
       </p:sp>
       <p:sp>
         <p:nvSpPr>
-          <p:cNvPr id="17" name="Text 13"/>
+          <p:cNvPr id="17" name="Text 12"/>
           <p:cNvSpPr/>
           <p:nvPr/>
         </p:nvSpPr>
@@ -4892,7 +4764,7 @@
       </p:sp>
       <p:sp>
         <p:nvSpPr>
-          <p:cNvPr id="18" name="Text 14"/>
+          <p:cNvPr id="18" name="Text 13"/>
           <p:cNvSpPr/>
           <p:nvPr/>
         </p:nvSpPr>
@@ -4934,7 +4806,7 @@
       </p:sp>
       <p:sp>
         <p:nvSpPr>
-          <p:cNvPr id="19" name="Shape 15"/>
+          <p:cNvPr id="19" name="Shape 14"/>
           <p:cNvSpPr/>
           <p:nvPr/>
         </p:nvSpPr>
@@ -4957,7 +4829,7 @@
       </p:sp>
       <p:sp>
         <p:nvSpPr>
-          <p:cNvPr id="20" name="Text 16"/>
+          <p:cNvPr id="20" name="Text 15"/>
           <p:cNvSpPr/>
           <p:nvPr/>
         </p:nvSpPr>
@@ -4999,7 +4871,7 @@
       </p:sp>
       <p:sp>
         <p:nvSpPr>
-          <p:cNvPr id="21" name="Text 17"/>
+          <p:cNvPr id="21" name="Text 16"/>
           <p:cNvSpPr/>
           <p:nvPr/>
         </p:nvSpPr>
@@ -5041,7 +4913,7 @@
       </p:sp>
       <p:sp>
         <p:nvSpPr>
-          <p:cNvPr id="22" name="Text 18"/>
+          <p:cNvPr id="22" name="Text 17"/>
           <p:cNvSpPr/>
           <p:nvPr/>
         </p:nvSpPr>
@@ -5083,7 +4955,7 @@
       </p:sp>
       <p:sp>
         <p:nvSpPr>
-          <p:cNvPr id="23" name="Text 19"/>
+          <p:cNvPr id="23" name="Text 18"/>
           <p:cNvSpPr/>
           <p:nvPr/>
         </p:nvSpPr>
@@ -5125,7 +4997,7 @@
       </p:sp>
       <p:sp>
         <p:nvSpPr>
-          <p:cNvPr id="24" name="Text 20"/>
+          <p:cNvPr id="24" name="Text 19"/>
           <p:cNvSpPr/>
           <p:nvPr/>
         </p:nvSpPr>
@@ -5161,14 +5033,14 @@
       </p:sp>
       <p:pic>
         <p:nvPicPr>
-          <p:cNvPr id="25" name="Image 2" descr="/Users/danwahlin/.copilot/session-state/56a7a0da-def8-48d4-b5e8-0ac3878cb8dd/files/slides-build/icons/GoFileDiff-8250DF.png">    </p:cNvPr>
+          <p:cNvPr id="25" name="Image 3" descr="/Users/danwahlin/.copilot/session-state/56a7a0da-def8-48d4-b5e8-0ac3878cb8dd/files/slides-build/icons/GoFileDiff-8250DF.png">    </p:cNvPr>
           <p:cNvPicPr>
             <a:picLocks noChangeAspect="1"/>
           </p:cNvPicPr>
           <p:nvPr/>
         </p:nvPicPr>
         <p:blipFill>
-          <a:blip r:embed="rId4"/>
+          <a:blip r:embed="rId5"/>
           <a:stretch>
             <a:fillRect/>
           </a:stretch>
@@ -5185,7 +5057,7 @@
       </p:pic>
       <p:sp>
         <p:nvSpPr>
-          <p:cNvPr id="26" name="Text 21"/>
+          <p:cNvPr id="26" name="Text 20"/>
           <p:cNvSpPr/>
           <p:nvPr/>
         </p:nvSpPr>
@@ -5291,112 +5163,9 @@
           <a:chExt cx="0" cy="0"/>
         </a:xfrm>
       </p:grpSpPr>
-      <p:sp>
-        <p:nvSpPr>
-          <p:cNvPr id="2" name="Text 0"/>
-          <p:cNvSpPr/>
-          <p:nvPr/>
-        </p:nvSpPr>
-        <p:spPr>
-          <a:xfrm>
-            <a:off x="0" y="0"/>
-            <a:ext cx="9144000" cy="76200"/>
-          </a:xfrm>
-          <a:prstGeom prst="rect">
-            <a:avLst/>
-          </a:prstGeom>
-          <a:solidFill>
-            <a:srgbClr val="1A7F37"/>
-          </a:solidFill>
-          <a:ln/>
-        </p:spPr>
-        <p:txBody>
-          <a:bodyPr wrap="square" rtlCol="0" anchor="ctr"/>
-          <a:lstStyle/>
-          <a:p>
-            <a:pPr indent="0" marL="0">
-              <a:buNone/>
-            </a:pPr>
-            <a:endParaRPr lang="en-US" dirty="0"/>
-          </a:p>
-        </p:txBody>
-      </p:sp>
-      <p:sp>
-        <p:nvSpPr>
-          <p:cNvPr id="3" name="Text 1"/>
-          <p:cNvSpPr/>
-          <p:nvPr/>
-        </p:nvSpPr>
-        <p:spPr>
-          <a:xfrm>
-            <a:off x="7340501" y="177701"/>
-            <a:ext cx="1168301" cy="279350"/>
-          </a:xfrm>
-          <a:prstGeom prst="roundRect">
-            <a:avLst>
-              <a:gd name="adj" fmla="val 22731"/>
-            </a:avLst>
-          </a:prstGeom>
-          <a:solidFill>
-            <a:srgbClr val="1A7F37"/>
-          </a:solidFill>
-          <a:ln/>
-        </p:spPr>
-        <p:txBody>
-          <a:bodyPr wrap="square" rtlCol="0" anchor="ctr"/>
-          <a:lstStyle/>
-          <a:p>
-            <a:pPr indent="0" marL="0">
-              <a:buNone/>
-            </a:pPr>
-            <a:endParaRPr lang="en-US" dirty="0"/>
-          </a:p>
-        </p:txBody>
-      </p:sp>
-      <p:sp>
-        <p:nvSpPr>
-          <p:cNvPr id="4" name="Text 2"/>
-          <p:cNvSpPr/>
-          <p:nvPr/>
-        </p:nvSpPr>
-        <p:spPr>
-          <a:xfrm>
-            <a:off x="7461041" y="231577"/>
-            <a:ext cx="927071" cy="171450"/>
-          </a:xfrm>
-          <a:prstGeom prst="rect">
-            <a:avLst/>
-          </a:prstGeom>
-          <a:noFill/>
-          <a:ln/>
-        </p:spPr>
-        <p:txBody>
-          <a:bodyPr wrap="square" lIns="0" tIns="0" rIns="0" bIns="0" rtlCol="0" anchor="t"/>
-          <a:lstStyle/>
-          <a:p>
-            <a:pPr algn="ctr" indent="0" marL="0">
-              <a:buNone/>
-            </a:pPr>
-            <a:r>
-              <a:rPr lang="en-US" sz="1150" b="1" dirty="0">
-                <a:solidFill>
-                  <a:srgbClr val="FFFFFF"/>
-                </a:solidFill>
-                <a:latin typeface="Arial" pitchFamily="34" charset="0"/>
-                <a:ea typeface="Arial" pitchFamily="34" charset="-122"/>
-                <a:cs typeface="Arial" pitchFamily="34" charset="-120"/>
-              </a:rPr>
-              <a:t>CHAPTER 06</a:t>
-            </a:r>
-            <a:endParaRPr lang="en-US" sz="1150" dirty="0"/>
-          </a:p>
-        </p:txBody>
-      </p:sp>
       <p:pic>
         <p:nvPicPr>
-          <p:cNvPr id="5" name="Image 0" descr="/Users/danwahlin/.copilot/session-state/56a7a0da-def8-48d4-b5e8-0ac3878cb8dd/files/slides-build/icons/FaGithub-1F2328.png">
-            <a:hlinkClick r:id="rId2" tooltip="https://github.com/github/copilot-app-for-beginners/tree/main/06-canvases"/>
-          </p:cNvPr>
+          <p:cNvPr id="2" name="Image 0" descr="/Users/danwahlin/.copilot/session-state/56a7a0da-def8-48d4-b5e8-0ac3878cb8dd/files/slides-build/img/grad-corner.png">    </p:cNvPr>
           <p:cNvPicPr>
             <a:picLocks noChangeAspect="1"/>
           </p:cNvPicPr>
@@ -5410,6 +5179,103 @@
         </p:blipFill>
         <p:spPr>
           <a:xfrm>
+            <a:off x="6349901" y="0"/>
+            <a:ext cx="2793950" cy="1308050"/>
+          </a:xfrm>
+          <a:prstGeom prst="rect">
+            <a:avLst/>
+          </a:prstGeom>
+        </p:spPr>
+      </p:pic>
+      <p:sp>
+        <p:nvSpPr>
+          <p:cNvPr id="3" name="Text 0"/>
+          <p:cNvSpPr/>
+          <p:nvPr/>
+        </p:nvSpPr>
+        <p:spPr>
+          <a:xfrm>
+            <a:off x="7340501" y="177701"/>
+            <a:ext cx="1168301" cy="279350"/>
+          </a:xfrm>
+          <a:prstGeom prst="roundRect">
+            <a:avLst>
+              <a:gd name="adj" fmla="val 22731"/>
+            </a:avLst>
+          </a:prstGeom>
+          <a:solidFill>
+            <a:srgbClr val="1A7F37"/>
+          </a:solidFill>
+          <a:ln/>
+        </p:spPr>
+        <p:txBody>
+          <a:bodyPr wrap="square" rtlCol="0" anchor="ctr"/>
+          <a:lstStyle/>
+          <a:p>
+            <a:pPr indent="0" marL="0">
+              <a:buNone/>
+            </a:pPr>
+            <a:endParaRPr lang="en-US" dirty="0"/>
+          </a:p>
+        </p:txBody>
+      </p:sp>
+      <p:sp>
+        <p:nvSpPr>
+          <p:cNvPr id="4" name="Text 1"/>
+          <p:cNvSpPr/>
+          <p:nvPr/>
+        </p:nvSpPr>
+        <p:spPr>
+          <a:xfrm>
+            <a:off x="7461041" y="231577"/>
+            <a:ext cx="927071" cy="171450"/>
+          </a:xfrm>
+          <a:prstGeom prst="rect">
+            <a:avLst/>
+          </a:prstGeom>
+          <a:noFill/>
+          <a:ln/>
+        </p:spPr>
+        <p:txBody>
+          <a:bodyPr wrap="square" lIns="0" tIns="0" rIns="0" bIns="0" rtlCol="0" anchor="t"/>
+          <a:lstStyle/>
+          <a:p>
+            <a:pPr algn="ctr" indent="0" marL="0">
+              <a:buNone/>
+            </a:pPr>
+            <a:r>
+              <a:rPr lang="en-US" sz="1150" b="1" dirty="0">
+                <a:solidFill>
+                  <a:srgbClr val="FFFFFF"/>
+                </a:solidFill>
+                <a:latin typeface="Arial" pitchFamily="34" charset="0"/>
+                <a:ea typeface="Arial" pitchFamily="34" charset="-122"/>
+                <a:cs typeface="Arial" pitchFamily="34" charset="-120"/>
+              </a:rPr>
+              <a:t>CHAPTER 06</a:t>
+            </a:r>
+            <a:endParaRPr lang="en-US" sz="1150" dirty="0"/>
+          </a:p>
+        </p:txBody>
+      </p:sp>
+      <p:pic>
+        <p:nvPicPr>
+          <p:cNvPr id="5" name="Image 1" descr="/Users/danwahlin/.copilot/session-state/56a7a0da-def8-48d4-b5e8-0ac3878cb8dd/files/slides-build/icons/FaGithub-1F2328.png">
+            <a:hlinkClick r:id="rId3" tooltip="https://github.com/github/copilot-app-for-beginners/tree/main/06-canvases"/>
+          </p:cNvPr>
+          <p:cNvPicPr>
+            <a:picLocks noChangeAspect="1"/>
+          </p:cNvPicPr>
+          <p:nvPr/>
+        </p:nvPicPr>
+        <p:blipFill>
+          <a:blip r:embed="rId2"/>
+          <a:stretch>
+            <a:fillRect/>
+          </a:stretch>
+        </p:blipFill>
+        <p:spPr>
+          <a:xfrm>
             <a:off x="8610600" y="165050"/>
             <a:ext cx="304800" cy="304800"/>
           </a:xfrm>
@@ -5420,7 +5286,7 @@
       </p:pic>
       <p:sp>
         <p:nvSpPr>
-          <p:cNvPr id="6" name="Text 3"/>
+          <p:cNvPr id="6" name="Text 2"/>
           <p:cNvSpPr/>
           <p:nvPr/>
         </p:nvSpPr>
@@ -5459,7 +5325,7 @@
       </p:sp>
       <p:sp>
         <p:nvSpPr>
-          <p:cNvPr id="7" name="Text 4"/>
+          <p:cNvPr id="7" name="Text 3"/>
           <p:cNvSpPr/>
           <p:nvPr/>
         </p:nvSpPr>
@@ -5504,7 +5370,7 @@
       </p:sp>
       <p:sp>
         <p:nvSpPr>
-          <p:cNvPr id="8" name="Text 5"/>
+          <p:cNvPr id="8" name="Text 4"/>
           <p:cNvSpPr/>
           <p:nvPr/>
         </p:nvSpPr>
@@ -5589,7 +5455,7 @@
       </p:sp>
       <p:sp>
         <p:nvSpPr>
-          <p:cNvPr id="9" name="Text 6"/>
+          <p:cNvPr id="9" name="Text 5"/>
           <p:cNvSpPr/>
           <p:nvPr/>
         </p:nvSpPr>
@@ -5632,14 +5498,14 @@
       </p:sp>
       <p:pic>
         <p:nvPicPr>
-          <p:cNvPr id="10" name="Image 1" descr="/Users/danwahlin/.copilot/session-state/56a7a0da-def8-48d4-b5e8-0ac3878cb8dd/files/slides-build/img/06-validate-crop.png">    </p:cNvPr>
+          <p:cNvPr id="10" name="Image 2" descr="/Users/danwahlin/.copilot/session-state/56a7a0da-def8-48d4-b5e8-0ac3878cb8dd/files/slides-build/img/06-validate-crop.png">    </p:cNvPr>
           <p:cNvPicPr>
             <a:picLocks noChangeAspect="1"/>
           </p:cNvPicPr>
           <p:nvPr/>
         </p:nvPicPr>
         <p:blipFill>
-          <a:blip r:embed="rId3"/>
+          <a:blip r:embed="rId4"/>
           <a:stretch>
             <a:fillRect/>
           </a:stretch>
@@ -5656,7 +5522,7 @@
       </p:pic>
       <p:sp>
         <p:nvSpPr>
-          <p:cNvPr id="11" name="Text 7"/>
+          <p:cNvPr id="11" name="Text 6"/>
           <p:cNvSpPr/>
           <p:nvPr/>
         </p:nvSpPr>
@@ -5690,7 +5556,7 @@
       </p:sp>
       <p:sp>
         <p:nvSpPr>
-          <p:cNvPr id="12" name="Text 8"/>
+          <p:cNvPr id="12" name="Text 7"/>
           <p:cNvSpPr/>
           <p:nvPr/>
         </p:nvSpPr>
@@ -5729,7 +5595,7 @@
       </p:sp>
       <p:sp>
         <p:nvSpPr>
-          <p:cNvPr id="13" name="Text 9"/>
+          <p:cNvPr id="13" name="Text 8"/>
           <p:cNvSpPr/>
           <p:nvPr/>
         </p:nvSpPr>
@@ -5768,7 +5634,7 @@
       </p:sp>
       <p:sp>
         <p:nvSpPr>
-          <p:cNvPr id="14" name="Text 10"/>
+          <p:cNvPr id="14" name="Text 9"/>
           <p:cNvSpPr/>
           <p:nvPr/>
         </p:nvSpPr>
@@ -5807,7 +5673,7 @@
       </p:sp>
       <p:sp>
         <p:nvSpPr>
-          <p:cNvPr id="15" name="Text 11"/>
+          <p:cNvPr id="15" name="Text 10"/>
           <p:cNvSpPr/>
           <p:nvPr/>
         </p:nvSpPr>
@@ -5843,7 +5709,7 @@
       </p:sp>
       <p:sp>
         <p:nvSpPr>
-          <p:cNvPr id="16" name="Text 12"/>
+          <p:cNvPr id="16" name="Text 11"/>
           <p:cNvSpPr/>
           <p:nvPr/>
         </p:nvSpPr>
@@ -5882,7 +5748,7 @@
       </p:sp>
       <p:sp>
         <p:nvSpPr>
-          <p:cNvPr id="17" name="Text 13"/>
+          <p:cNvPr id="17" name="Text 12"/>
           <p:cNvSpPr/>
           <p:nvPr/>
         </p:nvSpPr>
@@ -5921,7 +5787,7 @@
       </p:sp>
       <p:sp>
         <p:nvSpPr>
-          <p:cNvPr id="18" name="Text 14"/>
+          <p:cNvPr id="18" name="Text 13"/>
           <p:cNvSpPr/>
           <p:nvPr/>
         </p:nvSpPr>
@@ -5960,7 +5826,7 @@
       </p:sp>
       <p:sp>
         <p:nvSpPr>
-          <p:cNvPr id="19" name="Text 15"/>
+          <p:cNvPr id="19" name="Text 14"/>
           <p:cNvSpPr/>
           <p:nvPr/>
         </p:nvSpPr>
@@ -6032,112 +5898,9 @@
           <a:chExt cx="0" cy="0"/>
         </a:xfrm>
       </p:grpSpPr>
-      <p:sp>
-        <p:nvSpPr>
-          <p:cNvPr id="2" name="Text 0"/>
-          <p:cNvSpPr/>
-          <p:nvPr/>
-        </p:nvSpPr>
-        <p:spPr>
-          <a:xfrm>
-            <a:off x="0" y="0"/>
-            <a:ext cx="9144000" cy="76200"/>
-          </a:xfrm>
-          <a:prstGeom prst="rect">
-            <a:avLst/>
-          </a:prstGeom>
-          <a:solidFill>
-            <a:srgbClr val="BC4C00"/>
-          </a:solidFill>
-          <a:ln/>
-        </p:spPr>
-        <p:txBody>
-          <a:bodyPr wrap="square" rtlCol="0" anchor="ctr"/>
-          <a:lstStyle/>
-          <a:p>
-            <a:pPr indent="0" marL="0">
-              <a:buNone/>
-            </a:pPr>
-            <a:endParaRPr lang="en-US" dirty="0"/>
-          </a:p>
-        </p:txBody>
-      </p:sp>
-      <p:sp>
-        <p:nvSpPr>
-          <p:cNvPr id="3" name="Text 1"/>
-          <p:cNvSpPr/>
-          <p:nvPr/>
-        </p:nvSpPr>
-        <p:spPr>
-          <a:xfrm>
-            <a:off x="7340501" y="177701"/>
-            <a:ext cx="1168301" cy="279350"/>
-          </a:xfrm>
-          <a:prstGeom prst="roundRect">
-            <a:avLst>
-              <a:gd name="adj" fmla="val 22731"/>
-            </a:avLst>
-          </a:prstGeom>
-          <a:solidFill>
-            <a:srgbClr val="1A7F37"/>
-          </a:solidFill>
-          <a:ln/>
-        </p:spPr>
-        <p:txBody>
-          <a:bodyPr wrap="square" rtlCol="0" anchor="ctr"/>
-          <a:lstStyle/>
-          <a:p>
-            <a:pPr indent="0" marL="0">
-              <a:buNone/>
-            </a:pPr>
-            <a:endParaRPr lang="en-US" dirty="0"/>
-          </a:p>
-        </p:txBody>
-      </p:sp>
-      <p:sp>
-        <p:nvSpPr>
-          <p:cNvPr id="4" name="Text 2"/>
-          <p:cNvSpPr/>
-          <p:nvPr/>
-        </p:nvSpPr>
-        <p:spPr>
-          <a:xfrm>
-            <a:off x="7461041" y="231577"/>
-            <a:ext cx="927071" cy="171450"/>
-          </a:xfrm>
-          <a:prstGeom prst="rect">
-            <a:avLst/>
-          </a:prstGeom>
-          <a:noFill/>
-          <a:ln/>
-        </p:spPr>
-        <p:txBody>
-          <a:bodyPr wrap="square" lIns="0" tIns="0" rIns="0" bIns="0" rtlCol="0" anchor="t"/>
-          <a:lstStyle/>
-          <a:p>
-            <a:pPr algn="ctr" indent="0" marL="0">
-              <a:buNone/>
-            </a:pPr>
-            <a:r>
-              <a:rPr lang="en-US" sz="1150" b="1" dirty="0">
-                <a:solidFill>
-                  <a:srgbClr val="FFFFFF"/>
-                </a:solidFill>
-                <a:latin typeface="Arial" pitchFamily="34" charset="0"/>
-                <a:ea typeface="Arial" pitchFamily="34" charset="-122"/>
-                <a:cs typeface="Arial" pitchFamily="34" charset="-120"/>
-              </a:rPr>
-              <a:t>CHAPTER 06</a:t>
-            </a:r>
-            <a:endParaRPr lang="en-US" sz="1150" dirty="0"/>
-          </a:p>
-        </p:txBody>
-      </p:sp>
       <p:pic>
         <p:nvPicPr>
-          <p:cNvPr id="5" name="Image 0" descr="/Users/danwahlin/.copilot/session-state/56a7a0da-def8-48d4-b5e8-0ac3878cb8dd/files/slides-build/icons/FaGithub-1F2328.png">
-            <a:hlinkClick r:id="rId2" tooltip="https://github.com/github/copilot-app-for-beginners/tree/main/06-canvases"/>
-          </p:cNvPr>
+          <p:cNvPr id="2" name="Image 0" descr="/Users/danwahlin/.copilot/session-state/56a7a0da-def8-48d4-b5e8-0ac3878cb8dd/files/slides-build/img/grad-corner.png">    </p:cNvPr>
           <p:cNvPicPr>
             <a:picLocks noChangeAspect="1"/>
           </p:cNvPicPr>
@@ -6151,6 +5914,103 @@
         </p:blipFill>
         <p:spPr>
           <a:xfrm>
+            <a:off x="6349901" y="0"/>
+            <a:ext cx="2793950" cy="1308050"/>
+          </a:xfrm>
+          <a:prstGeom prst="rect">
+            <a:avLst/>
+          </a:prstGeom>
+        </p:spPr>
+      </p:pic>
+      <p:sp>
+        <p:nvSpPr>
+          <p:cNvPr id="3" name="Text 0"/>
+          <p:cNvSpPr/>
+          <p:nvPr/>
+        </p:nvSpPr>
+        <p:spPr>
+          <a:xfrm>
+            <a:off x="7340501" y="177701"/>
+            <a:ext cx="1168301" cy="279350"/>
+          </a:xfrm>
+          <a:prstGeom prst="roundRect">
+            <a:avLst>
+              <a:gd name="adj" fmla="val 22731"/>
+            </a:avLst>
+          </a:prstGeom>
+          <a:solidFill>
+            <a:srgbClr val="1A7F37"/>
+          </a:solidFill>
+          <a:ln/>
+        </p:spPr>
+        <p:txBody>
+          <a:bodyPr wrap="square" rtlCol="0" anchor="ctr"/>
+          <a:lstStyle/>
+          <a:p>
+            <a:pPr indent="0" marL="0">
+              <a:buNone/>
+            </a:pPr>
+            <a:endParaRPr lang="en-US" dirty="0"/>
+          </a:p>
+        </p:txBody>
+      </p:sp>
+      <p:sp>
+        <p:nvSpPr>
+          <p:cNvPr id="4" name="Text 1"/>
+          <p:cNvSpPr/>
+          <p:nvPr/>
+        </p:nvSpPr>
+        <p:spPr>
+          <a:xfrm>
+            <a:off x="7461041" y="231577"/>
+            <a:ext cx="927071" cy="171450"/>
+          </a:xfrm>
+          <a:prstGeom prst="rect">
+            <a:avLst/>
+          </a:prstGeom>
+          <a:noFill/>
+          <a:ln/>
+        </p:spPr>
+        <p:txBody>
+          <a:bodyPr wrap="square" lIns="0" tIns="0" rIns="0" bIns="0" rtlCol="0" anchor="t"/>
+          <a:lstStyle/>
+          <a:p>
+            <a:pPr algn="ctr" indent="0" marL="0">
+              <a:buNone/>
+            </a:pPr>
+            <a:r>
+              <a:rPr lang="en-US" sz="1150" b="1" dirty="0">
+                <a:solidFill>
+                  <a:srgbClr val="FFFFFF"/>
+                </a:solidFill>
+                <a:latin typeface="Arial" pitchFamily="34" charset="0"/>
+                <a:ea typeface="Arial" pitchFamily="34" charset="-122"/>
+                <a:cs typeface="Arial" pitchFamily="34" charset="-120"/>
+              </a:rPr>
+              <a:t>CHAPTER 06</a:t>
+            </a:r>
+            <a:endParaRPr lang="en-US" sz="1150" dirty="0"/>
+          </a:p>
+        </p:txBody>
+      </p:sp>
+      <p:pic>
+        <p:nvPicPr>
+          <p:cNvPr id="5" name="Image 1" descr="/Users/danwahlin/.copilot/session-state/56a7a0da-def8-48d4-b5e8-0ac3878cb8dd/files/slides-build/icons/FaGithub-1F2328.png">
+            <a:hlinkClick r:id="rId3" tooltip="https://github.com/github/copilot-app-for-beginners/tree/main/06-canvases"/>
+          </p:cNvPr>
+          <p:cNvPicPr>
+            <a:picLocks noChangeAspect="1"/>
+          </p:cNvPicPr>
+          <p:nvPr/>
+        </p:nvPicPr>
+        <p:blipFill>
+          <a:blip r:embed="rId2"/>
+          <a:stretch>
+            <a:fillRect/>
+          </a:stretch>
+        </p:blipFill>
+        <p:spPr>
+          <a:xfrm>
             <a:off x="8610600" y="165050"/>
             <a:ext cx="304800" cy="304800"/>
           </a:xfrm>
@@ -6161,7 +6021,7 @@
       </p:pic>
       <p:sp>
         <p:nvSpPr>
-          <p:cNvPr id="6" name="Text 3"/>
+          <p:cNvPr id="6" name="Text 2"/>
           <p:cNvSpPr/>
           <p:nvPr/>
         </p:nvSpPr>
@@ -6200,7 +6060,7 @@
       </p:sp>
       <p:sp>
         <p:nvSpPr>
-          <p:cNvPr id="7" name="Text 4"/>
+          <p:cNvPr id="7" name="Text 3"/>
           <p:cNvSpPr/>
           <p:nvPr/>
         </p:nvSpPr>
@@ -6245,7 +6105,7 @@
       </p:sp>
       <p:sp>
         <p:nvSpPr>
-          <p:cNvPr id="8" name="Text 5"/>
+          <p:cNvPr id="8" name="Text 4"/>
           <p:cNvSpPr/>
           <p:nvPr/>
         </p:nvSpPr>
@@ -6290,7 +6150,7 @@
       </p:sp>
       <p:sp>
         <p:nvSpPr>
-          <p:cNvPr id="9" name="Text 6"/>
+          <p:cNvPr id="9" name="Text 5"/>
           <p:cNvSpPr/>
           <p:nvPr/>
         </p:nvSpPr>
@@ -6326,7 +6186,7 @@
       </p:sp>
       <p:sp>
         <p:nvSpPr>
-          <p:cNvPr id="10" name="Text 7"/>
+          <p:cNvPr id="10" name="Text 6"/>
           <p:cNvSpPr/>
           <p:nvPr/>
         </p:nvSpPr>
@@ -6365,7 +6225,7 @@
       </p:sp>
       <p:sp>
         <p:nvSpPr>
-          <p:cNvPr id="11" name="Text 8"/>
+          <p:cNvPr id="11" name="Text 7"/>
           <p:cNvSpPr/>
           <p:nvPr/>
         </p:nvSpPr>
@@ -6404,7 +6264,7 @@
       </p:sp>
       <p:sp>
         <p:nvSpPr>
-          <p:cNvPr id="12" name="Text 9"/>
+          <p:cNvPr id="12" name="Text 8"/>
           <p:cNvSpPr/>
           <p:nvPr/>
         </p:nvSpPr>
@@ -6440,7 +6300,7 @@
       </p:sp>
       <p:sp>
         <p:nvSpPr>
-          <p:cNvPr id="13" name="Text 10"/>
+          <p:cNvPr id="13" name="Text 9"/>
           <p:cNvSpPr/>
           <p:nvPr/>
         </p:nvSpPr>
@@ -6479,7 +6339,7 @@
       </p:sp>
       <p:sp>
         <p:nvSpPr>
-          <p:cNvPr id="14" name="Text 11"/>
+          <p:cNvPr id="14" name="Text 10"/>
           <p:cNvSpPr/>
           <p:nvPr/>
         </p:nvSpPr>
@@ -6518,7 +6378,7 @@
       </p:sp>
       <p:sp>
         <p:nvSpPr>
-          <p:cNvPr id="15" name="Text 12"/>
+          <p:cNvPr id="15" name="Text 11"/>
           <p:cNvSpPr/>
           <p:nvPr/>
         </p:nvSpPr>
@@ -6554,7 +6414,7 @@
       </p:sp>
       <p:sp>
         <p:nvSpPr>
-          <p:cNvPr id="16" name="Text 13"/>
+          <p:cNvPr id="16" name="Text 12"/>
           <p:cNvSpPr/>
           <p:nvPr/>
         </p:nvSpPr>
@@ -6593,7 +6453,7 @@
       </p:sp>
       <p:sp>
         <p:nvSpPr>
-          <p:cNvPr id="17" name="Text 14"/>
+          <p:cNvPr id="17" name="Text 13"/>
           <p:cNvSpPr/>
           <p:nvPr/>
         </p:nvSpPr>
@@ -6632,7 +6492,7 @@
       </p:sp>
       <p:sp>
         <p:nvSpPr>
-          <p:cNvPr id="18" name="Text 15"/>
+          <p:cNvPr id="18" name="Text 14"/>
           <p:cNvSpPr/>
           <p:nvPr/>
         </p:nvSpPr>
@@ -6668,7 +6528,7 @@
       </p:sp>
       <p:sp>
         <p:nvSpPr>
-          <p:cNvPr id="19" name="Text 16"/>
+          <p:cNvPr id="19" name="Text 15"/>
           <p:cNvSpPr/>
           <p:nvPr/>
         </p:nvSpPr>
@@ -6707,7 +6567,7 @@
       </p:sp>
       <p:sp>
         <p:nvSpPr>
-          <p:cNvPr id="20" name="Text 17"/>
+          <p:cNvPr id="20" name="Text 16"/>
           <p:cNvSpPr/>
           <p:nvPr/>
         </p:nvSpPr>
@@ -6746,7 +6606,7 @@
       </p:sp>
       <p:sp>
         <p:nvSpPr>
-          <p:cNvPr id="21" name="Text 18"/>
+          <p:cNvPr id="21" name="Text 17"/>
           <p:cNvSpPr/>
           <p:nvPr/>
         </p:nvSpPr>
@@ -6782,7 +6642,7 @@
       </p:sp>
       <p:sp>
         <p:nvSpPr>
-          <p:cNvPr id="22" name="Text 19"/>
+          <p:cNvPr id="22" name="Text 18"/>
           <p:cNvSpPr/>
           <p:nvPr/>
         </p:nvSpPr>
@@ -6821,7 +6681,7 @@
       </p:sp>
       <p:sp>
         <p:nvSpPr>
-          <p:cNvPr id="23" name="Text 20"/>
+          <p:cNvPr id="23" name="Text 19"/>
           <p:cNvSpPr/>
           <p:nvPr/>
         </p:nvSpPr>
@@ -6860,7 +6720,7 @@
       </p:sp>
       <p:sp>
         <p:nvSpPr>
-          <p:cNvPr id="24" name="Text 21"/>
+          <p:cNvPr id="24" name="Text 20"/>
           <p:cNvSpPr/>
           <p:nvPr/>
         </p:nvSpPr>
@@ -6896,7 +6756,7 @@
       </p:sp>
       <p:sp>
         <p:nvSpPr>
-          <p:cNvPr id="25" name="Text 22"/>
+          <p:cNvPr id="25" name="Text 21"/>
           <p:cNvSpPr/>
           <p:nvPr/>
         </p:nvSpPr>
@@ -6935,7 +6795,7 @@
       </p:sp>
       <p:sp>
         <p:nvSpPr>
-          <p:cNvPr id="26" name="Text 23"/>
+          <p:cNvPr id="26" name="Text 22"/>
           <p:cNvSpPr/>
           <p:nvPr/>
         </p:nvSpPr>
@@ -6971,7 +6831,7 @@
       </p:sp>
       <p:sp>
         <p:nvSpPr>
-          <p:cNvPr id="27" name="Text 24"/>
+          <p:cNvPr id="27" name="Text 23"/>
           <p:cNvSpPr/>
           <p:nvPr/>
         </p:nvSpPr>
@@ -7003,14 +6863,14 @@
       </p:sp>
       <p:pic>
         <p:nvPicPr>
-          <p:cNvPr id="28" name="Image 1" descr="/Users/danwahlin/.copilot/session-state/56a7a0da-def8-48d4-b5e8-0ac3878cb8dd/files/slides-build/icons/GoGoal-BC4C00.png">    </p:cNvPr>
+          <p:cNvPr id="28" name="Image 2" descr="/Users/danwahlin/.copilot/session-state/56a7a0da-def8-48d4-b5e8-0ac3878cb8dd/files/slides-build/icons/GoGoal-BC4C00.png">    </p:cNvPr>
           <p:cNvPicPr>
             <a:picLocks noChangeAspect="1"/>
           </p:cNvPicPr>
           <p:nvPr/>
         </p:nvPicPr>
         <p:blipFill>
-          <a:blip r:embed="rId3"/>
+          <a:blip r:embed="rId4"/>
           <a:stretch>
             <a:fillRect/>
           </a:stretch>
@@ -7027,7 +6887,7 @@
       </p:pic>
       <p:sp>
         <p:nvSpPr>
-          <p:cNvPr id="29" name="Text 25"/>
+          <p:cNvPr id="29" name="Text 24"/>
           <p:cNvSpPr/>
           <p:nvPr/>
         </p:nvSpPr>
@@ -7069,7 +6929,7 @@
       </p:sp>
       <p:sp>
         <p:nvSpPr>
-          <p:cNvPr id="30" name="Text 26"/>
+          <p:cNvPr id="30" name="Text 25"/>
           <p:cNvSpPr/>
           <p:nvPr/>
         </p:nvSpPr>
@@ -7145,7 +7005,7 @@
       </p:sp>
       <p:sp>
         <p:nvSpPr>
-          <p:cNvPr id="31" name="Text 27"/>
+          <p:cNvPr id="31" name="Text 26"/>
           <p:cNvSpPr/>
           <p:nvPr/>
         </p:nvSpPr>
@@ -7181,7 +7041,7 @@
       </p:sp>
       <p:sp>
         <p:nvSpPr>
-          <p:cNvPr id="32" name="Text 28"/>
+          <p:cNvPr id="32" name="Text 27"/>
           <p:cNvSpPr/>
           <p:nvPr/>
         </p:nvSpPr>
@@ -7213,14 +7073,14 @@
       </p:sp>
       <p:pic>
         <p:nvPicPr>
-          <p:cNvPr id="33" name="Image 2" descr="/Users/danwahlin/.copilot/session-state/56a7a0da-def8-48d4-b5e8-0ac3878cb8dd/files/slides-build/icons/FaGithub-59636E.png">    </p:cNvPr>
+          <p:cNvPr id="33" name="Image 3" descr="/Users/danwahlin/.copilot/session-state/56a7a0da-def8-48d4-b5e8-0ac3878cb8dd/files/slides-build/icons/FaGithub-59636E.png">    </p:cNvPr>
           <p:cNvPicPr>
             <a:picLocks noChangeAspect="1"/>
           </p:cNvPicPr>
           <p:nvPr/>
         </p:nvPicPr>
         <p:blipFill>
-          <a:blip r:embed="rId4"/>
+          <a:blip r:embed="rId5"/>
           <a:stretch>
             <a:fillRect/>
           </a:stretch>
@@ -7237,7 +7097,7 @@
       </p:pic>
       <p:sp>
         <p:nvSpPr>
-          <p:cNvPr id="34" name="Text 29"/>
+          <p:cNvPr id="34" name="Text 28"/>
           <p:cNvSpPr/>
           <p:nvPr/>
         </p:nvSpPr>
@@ -7279,7 +7139,7 @@
       </p:sp>
       <p:sp>
         <p:nvSpPr>
-          <p:cNvPr id="35" name="Text 30"/>
+          <p:cNvPr id="35" name="Text 29"/>
           <p:cNvSpPr/>
           <p:nvPr/>
         </p:nvSpPr>
@@ -7351,112 +7211,9 @@
           <a:chExt cx="0" cy="0"/>
         </a:xfrm>
       </p:grpSpPr>
-      <p:sp>
-        <p:nvSpPr>
-          <p:cNvPr id="2" name="Text 0"/>
-          <p:cNvSpPr/>
-          <p:nvPr/>
-        </p:nvSpPr>
-        <p:spPr>
-          <a:xfrm>
-            <a:off x="0" y="0"/>
-            <a:ext cx="9144000" cy="76200"/>
-          </a:xfrm>
-          <a:prstGeom prst="rect">
-            <a:avLst/>
-          </a:prstGeom>
-          <a:solidFill>
-            <a:srgbClr val="1A7F37"/>
-          </a:solidFill>
-          <a:ln/>
-        </p:spPr>
-        <p:txBody>
-          <a:bodyPr wrap="square" rtlCol="0" anchor="ctr"/>
-          <a:lstStyle/>
-          <a:p>
-            <a:pPr indent="0" marL="0">
-              <a:buNone/>
-            </a:pPr>
-            <a:endParaRPr lang="en-US" dirty="0"/>
-          </a:p>
-        </p:txBody>
-      </p:sp>
-      <p:sp>
-        <p:nvSpPr>
-          <p:cNvPr id="3" name="Text 1"/>
-          <p:cNvSpPr/>
-          <p:nvPr/>
-        </p:nvSpPr>
-        <p:spPr>
-          <a:xfrm>
-            <a:off x="7340501" y="177701"/>
-            <a:ext cx="1168301" cy="279350"/>
-          </a:xfrm>
-          <a:prstGeom prst="roundRect">
-            <a:avLst>
-              <a:gd name="adj" fmla="val 22731"/>
-            </a:avLst>
-          </a:prstGeom>
-          <a:solidFill>
-            <a:srgbClr val="1A7F37"/>
-          </a:solidFill>
-          <a:ln/>
-        </p:spPr>
-        <p:txBody>
-          <a:bodyPr wrap="square" rtlCol="0" anchor="ctr"/>
-          <a:lstStyle/>
-          <a:p>
-            <a:pPr indent="0" marL="0">
-              <a:buNone/>
-            </a:pPr>
-            <a:endParaRPr lang="en-US" dirty="0"/>
-          </a:p>
-        </p:txBody>
-      </p:sp>
-      <p:sp>
-        <p:nvSpPr>
-          <p:cNvPr id="4" name="Text 2"/>
-          <p:cNvSpPr/>
-          <p:nvPr/>
-        </p:nvSpPr>
-        <p:spPr>
-          <a:xfrm>
-            <a:off x="7461041" y="231577"/>
-            <a:ext cx="927071" cy="171450"/>
-          </a:xfrm>
-          <a:prstGeom prst="rect">
-            <a:avLst/>
-          </a:prstGeom>
-          <a:noFill/>
-          <a:ln/>
-        </p:spPr>
-        <p:txBody>
-          <a:bodyPr wrap="square" lIns="0" tIns="0" rIns="0" bIns="0" rtlCol="0" anchor="t"/>
-          <a:lstStyle/>
-          <a:p>
-            <a:pPr algn="ctr" indent="0" marL="0">
-              <a:buNone/>
-            </a:pPr>
-            <a:r>
-              <a:rPr lang="en-US" sz="1150" b="1" dirty="0">
-                <a:solidFill>
-                  <a:srgbClr val="FFFFFF"/>
-                </a:solidFill>
-                <a:latin typeface="Arial" pitchFamily="34" charset="0"/>
-                <a:ea typeface="Arial" pitchFamily="34" charset="-122"/>
-                <a:cs typeface="Arial" pitchFamily="34" charset="-120"/>
-              </a:rPr>
-              <a:t>CHAPTER 06</a:t>
-            </a:r>
-            <a:endParaRPr lang="en-US" sz="1150" dirty="0"/>
-          </a:p>
-        </p:txBody>
-      </p:sp>
       <p:pic>
         <p:nvPicPr>
-          <p:cNvPr id="5" name="Image 0" descr="/Users/danwahlin/.copilot/session-state/56a7a0da-def8-48d4-b5e8-0ac3878cb8dd/files/slides-build/icons/FaGithub-1F2328.png">
-            <a:hlinkClick r:id="rId2" tooltip="https://github.com/github/copilot-app-for-beginners/tree/main/06-canvases"/>
-          </p:cNvPr>
+          <p:cNvPr id="2" name="Image 0" descr="/Users/danwahlin/.copilot/session-state/56a7a0da-def8-48d4-b5e8-0ac3878cb8dd/files/slides-build/img/grad-corner.png">    </p:cNvPr>
           <p:cNvPicPr>
             <a:picLocks noChangeAspect="1"/>
           </p:cNvPicPr>
@@ -7470,6 +7227,103 @@
         </p:blipFill>
         <p:spPr>
           <a:xfrm>
+            <a:off x="6349901" y="0"/>
+            <a:ext cx="2793950" cy="1308050"/>
+          </a:xfrm>
+          <a:prstGeom prst="rect">
+            <a:avLst/>
+          </a:prstGeom>
+        </p:spPr>
+      </p:pic>
+      <p:sp>
+        <p:nvSpPr>
+          <p:cNvPr id="3" name="Text 0"/>
+          <p:cNvSpPr/>
+          <p:nvPr/>
+        </p:nvSpPr>
+        <p:spPr>
+          <a:xfrm>
+            <a:off x="7340501" y="177701"/>
+            <a:ext cx="1168301" cy="279350"/>
+          </a:xfrm>
+          <a:prstGeom prst="roundRect">
+            <a:avLst>
+              <a:gd name="adj" fmla="val 22731"/>
+            </a:avLst>
+          </a:prstGeom>
+          <a:solidFill>
+            <a:srgbClr val="1A7F37"/>
+          </a:solidFill>
+          <a:ln/>
+        </p:spPr>
+        <p:txBody>
+          <a:bodyPr wrap="square" rtlCol="0" anchor="ctr"/>
+          <a:lstStyle/>
+          <a:p>
+            <a:pPr indent="0" marL="0">
+              <a:buNone/>
+            </a:pPr>
+            <a:endParaRPr lang="en-US" dirty="0"/>
+          </a:p>
+        </p:txBody>
+      </p:sp>
+      <p:sp>
+        <p:nvSpPr>
+          <p:cNvPr id="4" name="Text 1"/>
+          <p:cNvSpPr/>
+          <p:nvPr/>
+        </p:nvSpPr>
+        <p:spPr>
+          <a:xfrm>
+            <a:off x="7461041" y="231577"/>
+            <a:ext cx="927071" cy="171450"/>
+          </a:xfrm>
+          <a:prstGeom prst="rect">
+            <a:avLst/>
+          </a:prstGeom>
+          <a:noFill/>
+          <a:ln/>
+        </p:spPr>
+        <p:txBody>
+          <a:bodyPr wrap="square" lIns="0" tIns="0" rIns="0" bIns="0" rtlCol="0" anchor="t"/>
+          <a:lstStyle/>
+          <a:p>
+            <a:pPr algn="ctr" indent="0" marL="0">
+              <a:buNone/>
+            </a:pPr>
+            <a:r>
+              <a:rPr lang="en-US" sz="1150" b="1" dirty="0">
+                <a:solidFill>
+                  <a:srgbClr val="FFFFFF"/>
+                </a:solidFill>
+                <a:latin typeface="Arial" pitchFamily="34" charset="0"/>
+                <a:ea typeface="Arial" pitchFamily="34" charset="-122"/>
+                <a:cs typeface="Arial" pitchFamily="34" charset="-120"/>
+              </a:rPr>
+              <a:t>CHAPTER 06</a:t>
+            </a:r>
+            <a:endParaRPr lang="en-US" sz="1150" dirty="0"/>
+          </a:p>
+        </p:txBody>
+      </p:sp>
+      <p:pic>
+        <p:nvPicPr>
+          <p:cNvPr id="5" name="Image 1" descr="/Users/danwahlin/.copilot/session-state/56a7a0da-def8-48d4-b5e8-0ac3878cb8dd/files/slides-build/icons/FaGithub-1F2328.png">
+            <a:hlinkClick r:id="rId3" tooltip="https://github.com/github/copilot-app-for-beginners/tree/main/06-canvases"/>
+          </p:cNvPr>
+          <p:cNvPicPr>
+            <a:picLocks noChangeAspect="1"/>
+          </p:cNvPicPr>
+          <p:nvPr/>
+        </p:nvPicPr>
+        <p:blipFill>
+          <a:blip r:embed="rId2"/>
+          <a:stretch>
+            <a:fillRect/>
+          </a:stretch>
+        </p:blipFill>
+        <p:spPr>
+          <a:xfrm>
             <a:off x="8610600" y="165050"/>
             <a:ext cx="304800" cy="304800"/>
           </a:xfrm>
@@ -7480,7 +7334,7 @@
       </p:pic>
       <p:sp>
         <p:nvSpPr>
-          <p:cNvPr id="6" name="Text 3"/>
+          <p:cNvPr id="6" name="Text 2"/>
           <p:cNvSpPr/>
           <p:nvPr/>
         </p:nvSpPr>
@@ -7519,7 +7373,7 @@
       </p:sp>
       <p:sp>
         <p:nvSpPr>
-          <p:cNvPr id="7" name="Text 4"/>
+          <p:cNvPr id="7" name="Text 3"/>
           <p:cNvSpPr/>
           <p:nvPr/>
         </p:nvSpPr>
@@ -7564,7 +7418,7 @@
       </p:sp>
       <p:sp>
         <p:nvSpPr>
-          <p:cNvPr id="8" name="Text 5"/>
+          <p:cNvPr id="8" name="Text 4"/>
           <p:cNvSpPr/>
           <p:nvPr/>
         </p:nvSpPr>
@@ -7600,7 +7454,7 @@
       </p:sp>
       <p:sp>
         <p:nvSpPr>
-          <p:cNvPr id="9" name="Text 6"/>
+          <p:cNvPr id="9" name="Text 5"/>
           <p:cNvSpPr/>
           <p:nvPr/>
         </p:nvSpPr>
@@ -7632,7 +7486,7 @@
       </p:sp>
       <p:sp>
         <p:nvSpPr>
-          <p:cNvPr id="10" name="Text 7"/>
+          <p:cNvPr id="10" name="Text 6"/>
           <p:cNvSpPr/>
           <p:nvPr/>
         </p:nvSpPr>
@@ -7671,7 +7525,7 @@
       </p:sp>
       <p:sp>
         <p:nvSpPr>
-          <p:cNvPr id="11" name="Text 8"/>
+          <p:cNvPr id="11" name="Text 7"/>
           <p:cNvSpPr/>
           <p:nvPr/>
         </p:nvSpPr>
@@ -7713,7 +7567,7 @@
       </p:sp>
       <p:sp>
         <p:nvSpPr>
-          <p:cNvPr id="12" name="Text 9"/>
+          <p:cNvPr id="12" name="Text 8"/>
           <p:cNvSpPr/>
           <p:nvPr/>
         </p:nvSpPr>
@@ -7749,7 +7603,7 @@
       </p:sp>
       <p:sp>
         <p:nvSpPr>
-          <p:cNvPr id="13" name="Text 10"/>
+          <p:cNvPr id="13" name="Text 9"/>
           <p:cNvSpPr/>
           <p:nvPr/>
         </p:nvSpPr>
@@ -7781,7 +7635,7 @@
       </p:sp>
       <p:sp>
         <p:nvSpPr>
-          <p:cNvPr id="14" name="Text 11"/>
+          <p:cNvPr id="14" name="Text 10"/>
           <p:cNvSpPr/>
           <p:nvPr/>
         </p:nvSpPr>
@@ -7820,7 +7674,7 @@
       </p:sp>
       <p:sp>
         <p:nvSpPr>
-          <p:cNvPr id="15" name="Text 12"/>
+          <p:cNvPr id="15" name="Text 11"/>
           <p:cNvSpPr/>
           <p:nvPr/>
         </p:nvSpPr>
@@ -7896,7 +7750,7 @@
       </p:sp>
       <p:sp>
         <p:nvSpPr>
-          <p:cNvPr id="16" name="Text 13"/>
+          <p:cNvPr id="16" name="Text 12"/>
           <p:cNvSpPr/>
           <p:nvPr/>
         </p:nvSpPr>
@@ -7932,7 +7786,7 @@
       </p:sp>
       <p:sp>
         <p:nvSpPr>
-          <p:cNvPr id="17" name="Text 14"/>
+          <p:cNvPr id="17" name="Text 13"/>
           <p:cNvSpPr/>
           <p:nvPr/>
         </p:nvSpPr>
@@ -7964,7 +7818,7 @@
       </p:sp>
       <p:sp>
         <p:nvSpPr>
-          <p:cNvPr id="18" name="Text 15"/>
+          <p:cNvPr id="18" name="Text 14"/>
           <p:cNvSpPr/>
           <p:nvPr/>
         </p:nvSpPr>
@@ -8003,7 +7857,7 @@
       </p:sp>
       <p:sp>
         <p:nvSpPr>
-          <p:cNvPr id="19" name="Text 16"/>
+          <p:cNvPr id="19" name="Text 15"/>
           <p:cNvSpPr/>
           <p:nvPr/>
         </p:nvSpPr>
@@ -8045,7 +7899,7 @@
       </p:sp>
       <p:sp>
         <p:nvSpPr>
-          <p:cNvPr id="20" name="Text 17"/>
+          <p:cNvPr id="20" name="Text 16"/>
           <p:cNvSpPr/>
           <p:nvPr/>
         </p:nvSpPr>
@@ -8081,7 +7935,7 @@
       </p:sp>
       <p:sp>
         <p:nvSpPr>
-          <p:cNvPr id="21" name="Text 18"/>
+          <p:cNvPr id="21" name="Text 17"/>
           <p:cNvSpPr/>
           <p:nvPr/>
         </p:nvSpPr>
@@ -8113,7 +7967,7 @@
       </p:sp>
       <p:sp>
         <p:nvSpPr>
-          <p:cNvPr id="22" name="Text 19"/>
+          <p:cNvPr id="22" name="Text 18"/>
           <p:cNvSpPr/>
           <p:nvPr/>
         </p:nvSpPr>
@@ -8152,7 +8006,7 @@
       </p:sp>
       <p:sp>
         <p:nvSpPr>
-          <p:cNvPr id="23" name="Text 20"/>
+          <p:cNvPr id="23" name="Text 19"/>
           <p:cNvSpPr/>
           <p:nvPr/>
         </p:nvSpPr>
@@ -8194,7 +8048,7 @@
       </p:sp>
       <p:sp>
         <p:nvSpPr>
-          <p:cNvPr id="24" name="Text 21"/>
+          <p:cNvPr id="24" name="Text 20"/>
           <p:cNvSpPr/>
           <p:nvPr/>
         </p:nvSpPr>
@@ -8230,7 +8084,7 @@
       </p:sp>
       <p:sp>
         <p:nvSpPr>
-          <p:cNvPr id="25" name="Text 22"/>
+          <p:cNvPr id="25" name="Text 21"/>
           <p:cNvSpPr/>
           <p:nvPr/>
         </p:nvSpPr>
@@ -8262,14 +8116,14 @@
       </p:sp>
       <p:pic>
         <p:nvPicPr>
-          <p:cNvPr id="26" name="Image 1" descr="/Users/danwahlin/.copilot/session-state/56a7a0da-def8-48d4-b5e8-0ac3878cb8dd/files/slides-build/icons/FaGithub-0969DA.png">    </p:cNvPr>
+          <p:cNvPr id="26" name="Image 2" descr="/Users/danwahlin/.copilot/session-state/56a7a0da-def8-48d4-b5e8-0ac3878cb8dd/files/slides-build/icons/FaGithub-0969DA.png">    </p:cNvPr>
           <p:cNvPicPr>
             <a:picLocks noChangeAspect="1"/>
           </p:cNvPicPr>
           <p:nvPr/>
         </p:nvPicPr>
         <p:blipFill>
-          <a:blip r:embed="rId3"/>
+          <a:blip r:embed="rId4"/>
           <a:stretch>
             <a:fillRect/>
           </a:stretch>
@@ -8286,7 +8140,7 @@
       </p:pic>
       <p:sp>
         <p:nvSpPr>
-          <p:cNvPr id="27" name="Text 23"/>
+          <p:cNvPr id="27" name="Text 22"/>
           <p:cNvSpPr/>
           <p:nvPr/>
         </p:nvSpPr>
@@ -8325,7 +8179,7 @@
       </p:sp>
       <p:sp>
         <p:nvSpPr>
-          <p:cNvPr id="28" name="Text 24"/>
+          <p:cNvPr id="28" name="Text 23"/>
           <p:cNvSpPr/>
           <p:nvPr/>
         </p:nvSpPr>
@@ -8355,7 +8209,7 @@
                 <a:latin typeface="Arial" pitchFamily="34" charset="0"/>
                 <a:ea typeface="Arial" pitchFamily="34" charset="-122"/>
                 <a:cs typeface="Arial" pitchFamily="34" charset="-120"/>
-                <a:hlinkClick r:id="rId4" invalidUrl="" action="" tgtFrame="" tooltip="https://github.com/github/copilot-app-for-beginners/tree/main/06-canvases" history="1" highlightClick="0" endSnd="0">
+                <a:hlinkClick r:id="rId5" invalidUrl="" action="" tgtFrame="" tooltip="https://github.com/github/copilot-app-for-beginners/tree/main/06-canvases" history="1" highlightClick="0" endSnd="0">
                   <a:extLst>
                     <a:ext uri="{A12FA001-AC4F-418D-AE19-62706E023703}">
                       <ahyp:hlinkClr xmlns:ahyp="http://schemas.microsoft.com/office/drawing/2018/hyperlinkcolor" val="tx"/>
@@ -8371,7 +8225,7 @@
       </p:sp>
       <p:sp>
         <p:nvSpPr>
-          <p:cNvPr id="29" name="Text 25"/>
+          <p:cNvPr id="29" name="Text 24"/>
           <p:cNvSpPr/>
           <p:nvPr/>
         </p:nvSpPr>
@@ -8410,7 +8264,7 @@
       </p:sp>
       <p:sp>
         <p:nvSpPr>
-          <p:cNvPr id="30" name="Text 26"/>
+          <p:cNvPr id="30" name="Text 25"/>
           <p:cNvSpPr/>
           <p:nvPr/>
         </p:nvSpPr>
@@ -8440,7 +8294,7 @@
                 <a:latin typeface="Arial" pitchFamily="34" charset="0"/>
                 <a:ea typeface="Arial" pitchFamily="34" charset="-122"/>
                 <a:cs typeface="Arial" pitchFamily="34" charset="-120"/>
-                <a:hlinkClick r:id="rId5" invalidUrl="" action="" tgtFrame="" tooltip="https://github.com/github/copilot-app-for-beginners/tree/main/07-automations" history="1" highlightClick="0" endSnd="0">
+                <a:hlinkClick r:id="rId6" invalidUrl="" action="" tgtFrame="" tooltip="https://github.com/github/copilot-app-for-beginners/tree/main/07-automations" history="1" highlightClick="0" endSnd="0">
                   <a:extLst>
                     <a:ext uri="{A12FA001-AC4F-418D-AE19-62706E023703}">
                       <ahyp:hlinkClr xmlns:ahyp="http://schemas.microsoft.com/office/drawing/2018/hyperlinkcolor" val="tx"/>
@@ -8486,112 +8340,9 @@
           <a:chExt cx="0" cy="0"/>
         </a:xfrm>
       </p:grpSpPr>
-      <p:sp>
-        <p:nvSpPr>
-          <p:cNvPr id="2" name="Text 0"/>
-          <p:cNvSpPr/>
-          <p:nvPr/>
-        </p:nvSpPr>
-        <p:spPr>
-          <a:xfrm>
-            <a:off x="0" y="0"/>
-            <a:ext cx="9144000" cy="76200"/>
-          </a:xfrm>
-          <a:prstGeom prst="rect">
-            <a:avLst/>
-          </a:prstGeom>
-          <a:solidFill>
-            <a:srgbClr val="1A7F37"/>
-          </a:solidFill>
-          <a:ln/>
-        </p:spPr>
-        <p:txBody>
-          <a:bodyPr wrap="square" rtlCol="0" anchor="ctr"/>
-          <a:lstStyle/>
-          <a:p>
-            <a:pPr indent="0" marL="0">
-              <a:buNone/>
-            </a:pPr>
-            <a:endParaRPr lang="en-US" dirty="0"/>
-          </a:p>
-        </p:txBody>
-      </p:sp>
-      <p:sp>
-        <p:nvSpPr>
-          <p:cNvPr id="3" name="Text 1"/>
-          <p:cNvSpPr/>
-          <p:nvPr/>
-        </p:nvSpPr>
-        <p:spPr>
-          <a:xfrm>
-            <a:off x="7340501" y="177701"/>
-            <a:ext cx="1168301" cy="279350"/>
-          </a:xfrm>
-          <a:prstGeom prst="roundRect">
-            <a:avLst>
-              <a:gd name="adj" fmla="val 22731"/>
-            </a:avLst>
-          </a:prstGeom>
-          <a:solidFill>
-            <a:srgbClr val="1A7F37"/>
-          </a:solidFill>
-          <a:ln/>
-        </p:spPr>
-        <p:txBody>
-          <a:bodyPr wrap="square" rtlCol="0" anchor="ctr"/>
-          <a:lstStyle/>
-          <a:p>
-            <a:pPr indent="0" marL="0">
-              <a:buNone/>
-            </a:pPr>
-            <a:endParaRPr lang="en-US" dirty="0"/>
-          </a:p>
-        </p:txBody>
-      </p:sp>
-      <p:sp>
-        <p:nvSpPr>
-          <p:cNvPr id="4" name="Text 2"/>
-          <p:cNvSpPr/>
-          <p:nvPr/>
-        </p:nvSpPr>
-        <p:spPr>
-          <a:xfrm>
-            <a:off x="7461041" y="231577"/>
-            <a:ext cx="927071" cy="171450"/>
-          </a:xfrm>
-          <a:prstGeom prst="rect">
-            <a:avLst/>
-          </a:prstGeom>
-          <a:noFill/>
-          <a:ln/>
-        </p:spPr>
-        <p:txBody>
-          <a:bodyPr wrap="square" lIns="0" tIns="0" rIns="0" bIns="0" rtlCol="0" anchor="t"/>
-          <a:lstStyle/>
-          <a:p>
-            <a:pPr algn="ctr" indent="0" marL="0">
-              <a:buNone/>
-            </a:pPr>
-            <a:r>
-              <a:rPr lang="en-US" sz="1150" b="1" dirty="0">
-                <a:solidFill>
-                  <a:srgbClr val="FFFFFF"/>
-                </a:solidFill>
-                <a:latin typeface="Arial" pitchFamily="34" charset="0"/>
-                <a:ea typeface="Arial" pitchFamily="34" charset="-122"/>
-                <a:cs typeface="Arial" pitchFamily="34" charset="-120"/>
-              </a:rPr>
-              <a:t>CHAPTER 06</a:t>
-            </a:r>
-            <a:endParaRPr lang="en-US" sz="1150" dirty="0"/>
-          </a:p>
-        </p:txBody>
-      </p:sp>
       <p:pic>
         <p:nvPicPr>
-          <p:cNvPr id="5" name="Image 0" descr="/Users/danwahlin/.copilot/session-state/56a7a0da-def8-48d4-b5e8-0ac3878cb8dd/files/slides-build/icons/FaGithub-1F2328.png">
-            <a:hlinkClick r:id="rId2" tooltip="https://github.com/github/copilot-app-for-beginners/tree/main/06-canvases"/>
-          </p:cNvPr>
+          <p:cNvPr id="2" name="Image 0" descr="/Users/danwahlin/.copilot/session-state/56a7a0da-def8-48d4-b5e8-0ac3878cb8dd/files/slides-build/img/grad-corner.png">    </p:cNvPr>
           <p:cNvPicPr>
             <a:picLocks noChangeAspect="1"/>
           </p:cNvPicPr>
@@ -8605,6 +8356,103 @@
         </p:blipFill>
         <p:spPr>
           <a:xfrm>
+            <a:off x="6349901" y="0"/>
+            <a:ext cx="2793950" cy="1308050"/>
+          </a:xfrm>
+          <a:prstGeom prst="rect">
+            <a:avLst/>
+          </a:prstGeom>
+        </p:spPr>
+      </p:pic>
+      <p:sp>
+        <p:nvSpPr>
+          <p:cNvPr id="3" name="Text 0"/>
+          <p:cNvSpPr/>
+          <p:nvPr/>
+        </p:nvSpPr>
+        <p:spPr>
+          <a:xfrm>
+            <a:off x="7340501" y="177701"/>
+            <a:ext cx="1168301" cy="279350"/>
+          </a:xfrm>
+          <a:prstGeom prst="roundRect">
+            <a:avLst>
+              <a:gd name="adj" fmla="val 22731"/>
+            </a:avLst>
+          </a:prstGeom>
+          <a:solidFill>
+            <a:srgbClr val="1A7F37"/>
+          </a:solidFill>
+          <a:ln/>
+        </p:spPr>
+        <p:txBody>
+          <a:bodyPr wrap="square" rtlCol="0" anchor="ctr"/>
+          <a:lstStyle/>
+          <a:p>
+            <a:pPr indent="0" marL="0">
+              <a:buNone/>
+            </a:pPr>
+            <a:endParaRPr lang="en-US" dirty="0"/>
+          </a:p>
+        </p:txBody>
+      </p:sp>
+      <p:sp>
+        <p:nvSpPr>
+          <p:cNvPr id="4" name="Text 1"/>
+          <p:cNvSpPr/>
+          <p:nvPr/>
+        </p:nvSpPr>
+        <p:spPr>
+          <a:xfrm>
+            <a:off x="7461041" y="231577"/>
+            <a:ext cx="927071" cy="171450"/>
+          </a:xfrm>
+          <a:prstGeom prst="rect">
+            <a:avLst/>
+          </a:prstGeom>
+          <a:noFill/>
+          <a:ln/>
+        </p:spPr>
+        <p:txBody>
+          <a:bodyPr wrap="square" lIns="0" tIns="0" rIns="0" bIns="0" rtlCol="0" anchor="t"/>
+          <a:lstStyle/>
+          <a:p>
+            <a:pPr algn="ctr" indent="0" marL="0">
+              <a:buNone/>
+            </a:pPr>
+            <a:r>
+              <a:rPr lang="en-US" sz="1150" b="1" dirty="0">
+                <a:solidFill>
+                  <a:srgbClr val="FFFFFF"/>
+                </a:solidFill>
+                <a:latin typeface="Arial" pitchFamily="34" charset="0"/>
+                <a:ea typeface="Arial" pitchFamily="34" charset="-122"/>
+                <a:cs typeface="Arial" pitchFamily="34" charset="-120"/>
+              </a:rPr>
+              <a:t>CHAPTER 06</a:t>
+            </a:r>
+            <a:endParaRPr lang="en-US" sz="1150" dirty="0"/>
+          </a:p>
+        </p:txBody>
+      </p:sp>
+      <p:pic>
+        <p:nvPicPr>
+          <p:cNvPr id="5" name="Image 1" descr="/Users/danwahlin/.copilot/session-state/56a7a0da-def8-48d4-b5e8-0ac3878cb8dd/files/slides-build/icons/FaGithub-1F2328.png">
+            <a:hlinkClick r:id="rId3" tooltip="https://github.com/github/copilot-app-for-beginners/tree/main/06-canvases"/>
+          </p:cNvPr>
+          <p:cNvPicPr>
+            <a:picLocks noChangeAspect="1"/>
+          </p:cNvPicPr>
+          <p:nvPr/>
+        </p:nvPicPr>
+        <p:blipFill>
+          <a:blip r:embed="rId2"/>
+          <a:stretch>
+            <a:fillRect/>
+          </a:stretch>
+        </p:blipFill>
+        <p:spPr>
+          <a:xfrm>
             <a:off x="8610600" y="165050"/>
             <a:ext cx="304800" cy="304800"/>
           </a:xfrm>
@@ -8615,7 +8463,7 @@
       </p:pic>
       <p:sp>
         <p:nvSpPr>
-          <p:cNvPr id="6" name="Text 3"/>
+          <p:cNvPr id="6" name="Text 2"/>
           <p:cNvSpPr/>
           <p:nvPr/>
         </p:nvSpPr>
@@ -8654,7 +8502,7 @@
       </p:sp>
       <p:sp>
         <p:nvSpPr>
-          <p:cNvPr id="7" name="Text 4"/>
+          <p:cNvPr id="7" name="Text 3"/>
           <p:cNvSpPr/>
           <p:nvPr/>
         </p:nvSpPr>
@@ -8699,7 +8547,7 @@
       </p:sp>
       <p:sp>
         <p:nvSpPr>
-          <p:cNvPr id="8" name="Text 5"/>
+          <p:cNvPr id="8" name="Text 4"/>
           <p:cNvSpPr/>
           <p:nvPr/>
         </p:nvSpPr>
@@ -8731,7 +8579,7 @@
       </p:sp>
       <p:sp>
         <p:nvSpPr>
-          <p:cNvPr id="9" name="Shape 6"/>
+          <p:cNvPr id="9" name="Shape 5"/>
           <p:cNvSpPr/>
           <p:nvPr/>
         </p:nvSpPr>
@@ -8754,7 +8602,7 @@
       </p:sp>
       <p:sp>
         <p:nvSpPr>
-          <p:cNvPr id="10" name="Shape 7"/>
+          <p:cNvPr id="10" name="Shape 6"/>
           <p:cNvSpPr/>
           <p:nvPr/>
         </p:nvSpPr>
@@ -8777,7 +8625,7 @@
       </p:sp>
       <p:sp>
         <p:nvSpPr>
-          <p:cNvPr id="11" name="Shape 8"/>
+          <p:cNvPr id="11" name="Shape 7"/>
           <p:cNvSpPr/>
           <p:nvPr/>
         </p:nvSpPr>
@@ -8800,7 +8648,7 @@
       </p:sp>
       <p:sp>
         <p:nvSpPr>
-          <p:cNvPr id="12" name="Shape 9"/>
+          <p:cNvPr id="12" name="Shape 8"/>
           <p:cNvSpPr/>
           <p:nvPr/>
         </p:nvSpPr>
@@ -8823,7 +8671,7 @@
       </p:sp>
       <p:sp>
         <p:nvSpPr>
-          <p:cNvPr id="13" name="Text 10"/>
+          <p:cNvPr id="13" name="Text 9"/>
           <p:cNvSpPr/>
           <p:nvPr/>
         </p:nvSpPr>
@@ -8862,7 +8710,7 @@
       </p:sp>
       <p:sp>
         <p:nvSpPr>
-          <p:cNvPr id="14" name="Text 11"/>
+          <p:cNvPr id="14" name="Text 10"/>
           <p:cNvSpPr/>
           <p:nvPr/>
         </p:nvSpPr>
@@ -8901,7 +8749,7 @@
       </p:sp>
       <p:sp>
         <p:nvSpPr>
-          <p:cNvPr id="15" name="Text 12"/>
+          <p:cNvPr id="15" name="Text 11"/>
           <p:cNvSpPr/>
           <p:nvPr/>
         </p:nvSpPr>
@@ -8943,7 +8791,7 @@
       </p:sp>
       <p:sp>
         <p:nvSpPr>
-          <p:cNvPr id="16" name="Text 13"/>
+          <p:cNvPr id="16" name="Text 12"/>
           <p:cNvSpPr/>
           <p:nvPr/>
         </p:nvSpPr>
@@ -8975,7 +8823,7 @@
       </p:sp>
       <p:sp>
         <p:nvSpPr>
-          <p:cNvPr id="17" name="Shape 14"/>
+          <p:cNvPr id="17" name="Shape 13"/>
           <p:cNvSpPr/>
           <p:nvPr/>
         </p:nvSpPr>
@@ -8998,7 +8846,7 @@
       </p:sp>
       <p:sp>
         <p:nvSpPr>
-          <p:cNvPr id="18" name="Shape 15"/>
+          <p:cNvPr id="18" name="Shape 14"/>
           <p:cNvSpPr/>
           <p:nvPr/>
         </p:nvSpPr>
@@ -9021,7 +8869,7 @@
       </p:sp>
       <p:sp>
         <p:nvSpPr>
-          <p:cNvPr id="19" name="Shape 16"/>
+          <p:cNvPr id="19" name="Shape 15"/>
           <p:cNvSpPr/>
           <p:nvPr/>
         </p:nvSpPr>
@@ -9044,7 +8892,7 @@
       </p:sp>
       <p:sp>
         <p:nvSpPr>
-          <p:cNvPr id="20" name="Shape 17"/>
+          <p:cNvPr id="20" name="Shape 16"/>
           <p:cNvSpPr/>
           <p:nvPr/>
         </p:nvSpPr>
@@ -9067,7 +8915,7 @@
       </p:sp>
       <p:sp>
         <p:nvSpPr>
-          <p:cNvPr id="21" name="Text 18"/>
+          <p:cNvPr id="21" name="Text 17"/>
           <p:cNvSpPr/>
           <p:nvPr/>
         </p:nvSpPr>
@@ -9106,7 +8954,7 @@
       </p:sp>
       <p:sp>
         <p:nvSpPr>
-          <p:cNvPr id="22" name="Text 19"/>
+          <p:cNvPr id="22" name="Text 18"/>
           <p:cNvSpPr/>
           <p:nvPr/>
         </p:nvSpPr>
@@ -9145,7 +8993,7 @@
       </p:sp>
       <p:sp>
         <p:nvSpPr>
-          <p:cNvPr id="23" name="Text 20"/>
+          <p:cNvPr id="23" name="Text 19"/>
           <p:cNvSpPr/>
           <p:nvPr/>
         </p:nvSpPr>
@@ -9187,7 +9035,7 @@
       </p:sp>
       <p:sp>
         <p:nvSpPr>
-          <p:cNvPr id="24" name="Text 21"/>
+          <p:cNvPr id="24" name="Text 20"/>
           <p:cNvSpPr/>
           <p:nvPr/>
         </p:nvSpPr>
@@ -9219,7 +9067,7 @@
       </p:sp>
       <p:sp>
         <p:nvSpPr>
-          <p:cNvPr id="25" name="Shape 22"/>
+          <p:cNvPr id="25" name="Shape 21"/>
           <p:cNvSpPr/>
           <p:nvPr/>
         </p:nvSpPr>
@@ -9242,7 +9090,7 @@
       </p:sp>
       <p:sp>
         <p:nvSpPr>
-          <p:cNvPr id="26" name="Shape 23"/>
+          <p:cNvPr id="26" name="Shape 22"/>
           <p:cNvSpPr/>
           <p:nvPr/>
         </p:nvSpPr>
@@ -9265,7 +9113,7 @@
       </p:sp>
       <p:sp>
         <p:nvSpPr>
-          <p:cNvPr id="27" name="Shape 24"/>
+          <p:cNvPr id="27" name="Shape 23"/>
           <p:cNvSpPr/>
           <p:nvPr/>
         </p:nvSpPr>
@@ -9288,7 +9136,7 @@
       </p:sp>
       <p:sp>
         <p:nvSpPr>
-          <p:cNvPr id="28" name="Shape 25"/>
+          <p:cNvPr id="28" name="Shape 24"/>
           <p:cNvSpPr/>
           <p:nvPr/>
         </p:nvSpPr>
@@ -9311,7 +9159,7 @@
       </p:sp>
       <p:sp>
         <p:nvSpPr>
-          <p:cNvPr id="29" name="Text 26"/>
+          <p:cNvPr id="29" name="Text 25"/>
           <p:cNvSpPr/>
           <p:nvPr/>
         </p:nvSpPr>
@@ -9350,7 +9198,7 @@
       </p:sp>
       <p:sp>
         <p:nvSpPr>
-          <p:cNvPr id="30" name="Text 27"/>
+          <p:cNvPr id="30" name="Text 26"/>
           <p:cNvSpPr/>
           <p:nvPr/>
         </p:nvSpPr>
@@ -9389,7 +9237,7 @@
       </p:sp>
       <p:sp>
         <p:nvSpPr>
-          <p:cNvPr id="31" name="Text 28"/>
+          <p:cNvPr id="31" name="Text 27"/>
           <p:cNvSpPr/>
           <p:nvPr/>
         </p:nvSpPr>
@@ -9563,82 +9411,9 @@
           </a:p>
         </p:txBody>
       </p:sp>
-      <p:sp>
-        <p:nvSpPr>
-          <p:cNvPr id="5" name="Text 3"/>
-          <p:cNvSpPr/>
-          <p:nvPr/>
-        </p:nvSpPr>
-        <p:spPr>
-          <a:xfrm>
-            <a:off x="7340501" y="177701"/>
-            <a:ext cx="1168301" cy="279350"/>
-          </a:xfrm>
-          <a:prstGeom prst="roundRect">
-            <a:avLst>
-              <a:gd name="adj" fmla="val 22731"/>
-            </a:avLst>
-          </a:prstGeom>
-          <a:solidFill>
-            <a:srgbClr val="1A7F37"/>
-          </a:solidFill>
-          <a:ln/>
-        </p:spPr>
-        <p:txBody>
-          <a:bodyPr wrap="square" rtlCol="0" anchor="ctr"/>
-          <a:lstStyle/>
-          <a:p>
-            <a:pPr indent="0" marL="0">
-              <a:buNone/>
-            </a:pPr>
-            <a:endParaRPr lang="en-US" dirty="0"/>
-          </a:p>
-        </p:txBody>
-      </p:sp>
-      <p:sp>
-        <p:nvSpPr>
-          <p:cNvPr id="6" name="Text 4"/>
-          <p:cNvSpPr/>
-          <p:nvPr/>
-        </p:nvSpPr>
-        <p:spPr>
-          <a:xfrm>
-            <a:off x="7461041" y="231577"/>
-            <a:ext cx="927071" cy="171450"/>
-          </a:xfrm>
-          <a:prstGeom prst="rect">
-            <a:avLst/>
-          </a:prstGeom>
-          <a:noFill/>
-          <a:ln/>
-        </p:spPr>
-        <p:txBody>
-          <a:bodyPr wrap="square" lIns="0" tIns="0" rIns="0" bIns="0" rtlCol="0" anchor="t"/>
-          <a:lstStyle/>
-          <a:p>
-            <a:pPr algn="ctr" indent="0" marL="0">
-              <a:buNone/>
-            </a:pPr>
-            <a:r>
-              <a:rPr lang="en-US" sz="1150" b="1" dirty="0">
-                <a:solidFill>
-                  <a:srgbClr val="FFFFFF"/>
-                </a:solidFill>
-                <a:latin typeface="Arial" pitchFamily="34" charset="0"/>
-                <a:ea typeface="Arial" pitchFamily="34" charset="-122"/>
-                <a:cs typeface="Arial" pitchFamily="34" charset="-120"/>
-              </a:rPr>
-              <a:t>CHAPTER 06</a:t>
-            </a:r>
-            <a:endParaRPr lang="en-US" sz="1150" dirty="0"/>
-          </a:p>
-        </p:txBody>
-      </p:sp>
       <p:pic>
         <p:nvPicPr>
-          <p:cNvPr id="7" name="Image 0" descr="/Users/danwahlin/.copilot/session-state/56a7a0da-def8-48d4-b5e8-0ac3878cb8dd/files/slides-build/icons/FaGithub-1F2328.png">
-            <a:hlinkClick r:id="rId2" tooltip="https://github.com/github/copilot-app-for-beginners/tree/main/06-canvases"/>
-          </p:cNvPr>
+          <p:cNvPr id="5" name="Image 0" descr="/Users/danwahlin/.copilot/session-state/56a7a0da-def8-48d4-b5e8-0ac3878cb8dd/files/slides-build/img/grad-corner.png">    </p:cNvPr>
           <p:cNvPicPr>
             <a:picLocks noChangeAspect="1"/>
           </p:cNvPicPr>
@@ -9652,6 +9427,103 @@
         </p:blipFill>
         <p:spPr>
           <a:xfrm>
+            <a:off x="6349901" y="0"/>
+            <a:ext cx="2793950" cy="1308050"/>
+          </a:xfrm>
+          <a:prstGeom prst="rect">
+            <a:avLst/>
+          </a:prstGeom>
+        </p:spPr>
+      </p:pic>
+      <p:sp>
+        <p:nvSpPr>
+          <p:cNvPr id="6" name="Text 3"/>
+          <p:cNvSpPr/>
+          <p:nvPr/>
+        </p:nvSpPr>
+        <p:spPr>
+          <a:xfrm>
+            <a:off x="7340501" y="177701"/>
+            <a:ext cx="1168301" cy="279350"/>
+          </a:xfrm>
+          <a:prstGeom prst="roundRect">
+            <a:avLst>
+              <a:gd name="adj" fmla="val 22731"/>
+            </a:avLst>
+          </a:prstGeom>
+          <a:solidFill>
+            <a:srgbClr val="1A7F37"/>
+          </a:solidFill>
+          <a:ln/>
+        </p:spPr>
+        <p:txBody>
+          <a:bodyPr wrap="square" rtlCol="0" anchor="ctr"/>
+          <a:lstStyle/>
+          <a:p>
+            <a:pPr indent="0" marL="0">
+              <a:buNone/>
+            </a:pPr>
+            <a:endParaRPr lang="en-US" dirty="0"/>
+          </a:p>
+        </p:txBody>
+      </p:sp>
+      <p:sp>
+        <p:nvSpPr>
+          <p:cNvPr id="7" name="Text 4"/>
+          <p:cNvSpPr/>
+          <p:nvPr/>
+        </p:nvSpPr>
+        <p:spPr>
+          <a:xfrm>
+            <a:off x="7461041" y="231577"/>
+            <a:ext cx="927071" cy="171450"/>
+          </a:xfrm>
+          <a:prstGeom prst="rect">
+            <a:avLst/>
+          </a:prstGeom>
+          <a:noFill/>
+          <a:ln/>
+        </p:spPr>
+        <p:txBody>
+          <a:bodyPr wrap="square" lIns="0" tIns="0" rIns="0" bIns="0" rtlCol="0" anchor="t"/>
+          <a:lstStyle/>
+          <a:p>
+            <a:pPr algn="ctr" indent="0" marL="0">
+              <a:buNone/>
+            </a:pPr>
+            <a:r>
+              <a:rPr lang="en-US" sz="1150" b="1" dirty="0">
+                <a:solidFill>
+                  <a:srgbClr val="FFFFFF"/>
+                </a:solidFill>
+                <a:latin typeface="Arial" pitchFamily="34" charset="0"/>
+                <a:ea typeface="Arial" pitchFamily="34" charset="-122"/>
+                <a:cs typeface="Arial" pitchFamily="34" charset="-120"/>
+              </a:rPr>
+              <a:t>CHAPTER 06</a:t>
+            </a:r>
+            <a:endParaRPr lang="en-US" sz="1150" dirty="0"/>
+          </a:p>
+        </p:txBody>
+      </p:sp>
+      <p:pic>
+        <p:nvPicPr>
+          <p:cNvPr id="8" name="Image 1" descr="/Users/danwahlin/.copilot/session-state/56a7a0da-def8-48d4-b5e8-0ac3878cb8dd/files/slides-build/icons/FaGithub-1F2328.png">
+            <a:hlinkClick r:id="rId3" tooltip="https://github.com/github/copilot-app-for-beginners/tree/main/06-canvases"/>
+          </p:cNvPr>
+          <p:cNvPicPr>
+            <a:picLocks noChangeAspect="1"/>
+          </p:cNvPicPr>
+          <p:nvPr/>
+        </p:nvPicPr>
+        <p:blipFill>
+          <a:blip r:embed="rId2"/>
+          <a:stretch>
+            <a:fillRect/>
+          </a:stretch>
+        </p:blipFill>
+        <p:spPr>
+          <a:xfrm>
             <a:off x="8610600" y="165050"/>
             <a:ext cx="304800" cy="304800"/>
           </a:xfrm>
@@ -9662,7 +9534,7 @@
       </p:pic>
       <p:sp>
         <p:nvSpPr>
-          <p:cNvPr id="8" name="Text 5"/>
+          <p:cNvPr id="9" name="Text 5"/>
           <p:cNvSpPr/>
           <p:nvPr/>
         </p:nvSpPr>
@@ -9701,7 +9573,7 @@
       </p:sp>
       <p:sp>
         <p:nvSpPr>
-          <p:cNvPr id="9" name="Text 6"/>
+          <p:cNvPr id="10" name="Text 6"/>
           <p:cNvSpPr/>
           <p:nvPr/>
         </p:nvSpPr>
@@ -9746,7 +9618,7 @@
       </p:sp>
       <p:sp>
         <p:nvSpPr>
-          <p:cNvPr id="10" name="Text 7"/>
+          <p:cNvPr id="11" name="Text 7"/>
           <p:cNvSpPr/>
           <p:nvPr/>
         </p:nvSpPr>
@@ -9778,7 +9650,7 @@
       </p:sp>
       <p:sp>
         <p:nvSpPr>
-          <p:cNvPr id="11" name="Text 8"/>
+          <p:cNvPr id="12" name="Text 8"/>
           <p:cNvSpPr/>
           <p:nvPr/>
         </p:nvSpPr>
@@ -9850,112 +9722,9 @@
           <a:chExt cx="0" cy="0"/>
         </a:xfrm>
       </p:grpSpPr>
-      <p:sp>
-        <p:nvSpPr>
-          <p:cNvPr id="2" name="Text 0"/>
-          <p:cNvSpPr/>
-          <p:nvPr/>
-        </p:nvSpPr>
-        <p:spPr>
-          <a:xfrm>
-            <a:off x="0" y="0"/>
-            <a:ext cx="9144000" cy="76200"/>
-          </a:xfrm>
-          <a:prstGeom prst="rect">
-            <a:avLst/>
-          </a:prstGeom>
-          <a:solidFill>
-            <a:srgbClr val="9A6700"/>
-          </a:solidFill>
-          <a:ln/>
-        </p:spPr>
-        <p:txBody>
-          <a:bodyPr wrap="square" rtlCol="0" anchor="ctr"/>
-          <a:lstStyle/>
-          <a:p>
-            <a:pPr indent="0" marL="0">
-              <a:buNone/>
-            </a:pPr>
-            <a:endParaRPr lang="en-US" dirty="0"/>
-          </a:p>
-        </p:txBody>
-      </p:sp>
-      <p:sp>
-        <p:nvSpPr>
-          <p:cNvPr id="3" name="Text 1"/>
-          <p:cNvSpPr/>
-          <p:nvPr/>
-        </p:nvSpPr>
-        <p:spPr>
-          <a:xfrm>
-            <a:off x="7340501" y="177701"/>
-            <a:ext cx="1168301" cy="279350"/>
-          </a:xfrm>
-          <a:prstGeom prst="roundRect">
-            <a:avLst>
-              <a:gd name="adj" fmla="val 22731"/>
-            </a:avLst>
-          </a:prstGeom>
-          <a:solidFill>
-            <a:srgbClr val="1A7F37"/>
-          </a:solidFill>
-          <a:ln/>
-        </p:spPr>
-        <p:txBody>
-          <a:bodyPr wrap="square" rtlCol="0" anchor="ctr"/>
-          <a:lstStyle/>
-          <a:p>
-            <a:pPr indent="0" marL="0">
-              <a:buNone/>
-            </a:pPr>
-            <a:endParaRPr lang="en-US" dirty="0"/>
-          </a:p>
-        </p:txBody>
-      </p:sp>
-      <p:sp>
-        <p:nvSpPr>
-          <p:cNvPr id="4" name="Text 2"/>
-          <p:cNvSpPr/>
-          <p:nvPr/>
-        </p:nvSpPr>
-        <p:spPr>
-          <a:xfrm>
-            <a:off x="7461041" y="231577"/>
-            <a:ext cx="927071" cy="171450"/>
-          </a:xfrm>
-          <a:prstGeom prst="rect">
-            <a:avLst/>
-          </a:prstGeom>
-          <a:noFill/>
-          <a:ln/>
-        </p:spPr>
-        <p:txBody>
-          <a:bodyPr wrap="square" lIns="0" tIns="0" rIns="0" bIns="0" rtlCol="0" anchor="t"/>
-          <a:lstStyle/>
-          <a:p>
-            <a:pPr algn="ctr" indent="0" marL="0">
-              <a:buNone/>
-            </a:pPr>
-            <a:r>
-              <a:rPr lang="en-US" sz="1150" b="1" dirty="0">
-                <a:solidFill>
-                  <a:srgbClr val="FFFFFF"/>
-                </a:solidFill>
-                <a:latin typeface="Arial" pitchFamily="34" charset="0"/>
-                <a:ea typeface="Arial" pitchFamily="34" charset="-122"/>
-                <a:cs typeface="Arial" pitchFamily="34" charset="-120"/>
-              </a:rPr>
-              <a:t>CHAPTER 06</a:t>
-            </a:r>
-            <a:endParaRPr lang="en-US" sz="1150" dirty="0"/>
-          </a:p>
-        </p:txBody>
-      </p:sp>
       <p:pic>
         <p:nvPicPr>
-          <p:cNvPr id="5" name="Image 0" descr="/Users/danwahlin/.copilot/session-state/56a7a0da-def8-48d4-b5e8-0ac3878cb8dd/files/slides-build/icons/FaGithub-1F2328.png">
-            <a:hlinkClick r:id="rId2" tooltip="https://github.com/github/copilot-app-for-beginners/tree/main/06-canvases"/>
-          </p:cNvPr>
+          <p:cNvPr id="2" name="Image 0" descr="/Users/danwahlin/.copilot/session-state/56a7a0da-def8-48d4-b5e8-0ac3878cb8dd/files/slides-build/img/grad-corner.png">    </p:cNvPr>
           <p:cNvPicPr>
             <a:picLocks noChangeAspect="1"/>
           </p:cNvPicPr>
@@ -9969,6 +9738,103 @@
         </p:blipFill>
         <p:spPr>
           <a:xfrm>
+            <a:off x="6349901" y="0"/>
+            <a:ext cx="2793950" cy="1308050"/>
+          </a:xfrm>
+          <a:prstGeom prst="rect">
+            <a:avLst/>
+          </a:prstGeom>
+        </p:spPr>
+      </p:pic>
+      <p:sp>
+        <p:nvSpPr>
+          <p:cNvPr id="3" name="Text 0"/>
+          <p:cNvSpPr/>
+          <p:nvPr/>
+        </p:nvSpPr>
+        <p:spPr>
+          <a:xfrm>
+            <a:off x="7340501" y="177701"/>
+            <a:ext cx="1168301" cy="279350"/>
+          </a:xfrm>
+          <a:prstGeom prst="roundRect">
+            <a:avLst>
+              <a:gd name="adj" fmla="val 22731"/>
+            </a:avLst>
+          </a:prstGeom>
+          <a:solidFill>
+            <a:srgbClr val="1A7F37"/>
+          </a:solidFill>
+          <a:ln/>
+        </p:spPr>
+        <p:txBody>
+          <a:bodyPr wrap="square" rtlCol="0" anchor="ctr"/>
+          <a:lstStyle/>
+          <a:p>
+            <a:pPr indent="0" marL="0">
+              <a:buNone/>
+            </a:pPr>
+            <a:endParaRPr lang="en-US" dirty="0"/>
+          </a:p>
+        </p:txBody>
+      </p:sp>
+      <p:sp>
+        <p:nvSpPr>
+          <p:cNvPr id="4" name="Text 1"/>
+          <p:cNvSpPr/>
+          <p:nvPr/>
+        </p:nvSpPr>
+        <p:spPr>
+          <a:xfrm>
+            <a:off x="7461041" y="231577"/>
+            <a:ext cx="927071" cy="171450"/>
+          </a:xfrm>
+          <a:prstGeom prst="rect">
+            <a:avLst/>
+          </a:prstGeom>
+          <a:noFill/>
+          <a:ln/>
+        </p:spPr>
+        <p:txBody>
+          <a:bodyPr wrap="square" lIns="0" tIns="0" rIns="0" bIns="0" rtlCol="0" anchor="t"/>
+          <a:lstStyle/>
+          <a:p>
+            <a:pPr algn="ctr" indent="0" marL="0">
+              <a:buNone/>
+            </a:pPr>
+            <a:r>
+              <a:rPr lang="en-US" sz="1150" b="1" dirty="0">
+                <a:solidFill>
+                  <a:srgbClr val="FFFFFF"/>
+                </a:solidFill>
+                <a:latin typeface="Arial" pitchFamily="34" charset="0"/>
+                <a:ea typeface="Arial" pitchFamily="34" charset="-122"/>
+                <a:cs typeface="Arial" pitchFamily="34" charset="-120"/>
+              </a:rPr>
+              <a:t>CHAPTER 06</a:t>
+            </a:r>
+            <a:endParaRPr lang="en-US" sz="1150" dirty="0"/>
+          </a:p>
+        </p:txBody>
+      </p:sp>
+      <p:pic>
+        <p:nvPicPr>
+          <p:cNvPr id="5" name="Image 1" descr="/Users/danwahlin/.copilot/session-state/56a7a0da-def8-48d4-b5e8-0ac3878cb8dd/files/slides-build/icons/FaGithub-1F2328.png">
+            <a:hlinkClick r:id="rId3" tooltip="https://github.com/github/copilot-app-for-beginners/tree/main/06-canvases"/>
+          </p:cNvPr>
+          <p:cNvPicPr>
+            <a:picLocks noChangeAspect="1"/>
+          </p:cNvPicPr>
+          <p:nvPr/>
+        </p:nvPicPr>
+        <p:blipFill>
+          <a:blip r:embed="rId2"/>
+          <a:stretch>
+            <a:fillRect/>
+          </a:stretch>
+        </p:blipFill>
+        <p:spPr>
+          <a:xfrm>
             <a:off x="8610600" y="165050"/>
             <a:ext cx="304800" cy="304800"/>
           </a:xfrm>
@@ -9979,7 +9845,7 @@
       </p:pic>
       <p:sp>
         <p:nvSpPr>
-          <p:cNvPr id="6" name="Text 3"/>
+          <p:cNvPr id="6" name="Text 2"/>
           <p:cNvSpPr/>
           <p:nvPr/>
         </p:nvSpPr>
@@ -10018,7 +9884,7 @@
       </p:sp>
       <p:sp>
         <p:nvSpPr>
-          <p:cNvPr id="7" name="Text 4"/>
+          <p:cNvPr id="7" name="Text 3"/>
           <p:cNvSpPr/>
           <p:nvPr/>
         </p:nvSpPr>
@@ -10063,7 +9929,7 @@
       </p:sp>
       <p:sp>
         <p:nvSpPr>
-          <p:cNvPr id="8" name="Text 5"/>
+          <p:cNvPr id="8" name="Text 4"/>
           <p:cNvSpPr/>
           <p:nvPr/>
         </p:nvSpPr>
@@ -10108,7 +9974,7 @@
       </p:sp>
       <p:sp>
         <p:nvSpPr>
-          <p:cNvPr id="9" name="Text 6"/>
+          <p:cNvPr id="9" name="Text 5"/>
           <p:cNvSpPr/>
           <p:nvPr/>
         </p:nvSpPr>
@@ -10151,14 +10017,14 @@
       </p:sp>
       <p:pic>
         <p:nvPicPr>
-          <p:cNvPr id="10" name="Image 1" descr="/Users/danwahlin/.copilot/session-state/56a7a0da-def8-48d4-b5e8-0ac3878cb8dd/files/slides-build/img/06-arrangement-board-canvas.jpg">    </p:cNvPr>
+          <p:cNvPr id="10" name="Image 2" descr="/Users/danwahlin/.copilot/session-state/56a7a0da-def8-48d4-b5e8-0ac3878cb8dd/files/slides-build/img/06-arrangement-board-canvas.jpg">    </p:cNvPr>
           <p:cNvPicPr>
             <a:picLocks noChangeAspect="1"/>
           </p:cNvPicPr>
           <p:nvPr/>
         </p:nvPicPr>
         <p:blipFill>
-          <a:blip r:embed="rId3"/>
+          <a:blip r:embed="rId4"/>
           <a:stretch>
             <a:fillRect/>
           </a:stretch>
@@ -10175,7 +10041,7 @@
       </p:pic>
       <p:sp>
         <p:nvSpPr>
-          <p:cNvPr id="11" name="Text 7"/>
+          <p:cNvPr id="11" name="Text 6"/>
           <p:cNvSpPr/>
           <p:nvPr/>
         </p:nvSpPr>
@@ -10211,7 +10077,7 @@
       </p:sp>
       <p:sp>
         <p:nvSpPr>
-          <p:cNvPr id="12" name="Text 8"/>
+          <p:cNvPr id="12" name="Text 7"/>
           <p:cNvSpPr/>
           <p:nvPr/>
         </p:nvSpPr>
@@ -10241,7 +10107,7 @@
       </p:sp>
       <p:sp>
         <p:nvSpPr>
-          <p:cNvPr id="13" name="Shape 9"/>
+          <p:cNvPr id="13" name="Shape 8"/>
           <p:cNvSpPr/>
           <p:nvPr/>
         </p:nvSpPr>
@@ -10264,7 +10130,7 @@
       </p:sp>
       <p:sp>
         <p:nvSpPr>
-          <p:cNvPr id="14" name="Text 10"/>
+          <p:cNvPr id="14" name="Text 9"/>
           <p:cNvSpPr/>
           <p:nvPr/>
         </p:nvSpPr>
@@ -10306,7 +10172,7 @@
       </p:sp>
       <p:sp>
         <p:nvSpPr>
-          <p:cNvPr id="15" name="Text 11"/>
+          <p:cNvPr id="15" name="Text 10"/>
           <p:cNvSpPr/>
           <p:nvPr/>
         </p:nvSpPr>
@@ -10348,7 +10214,7 @@
       </p:sp>
       <p:sp>
         <p:nvSpPr>
-          <p:cNvPr id="16" name="Shape 12"/>
+          <p:cNvPr id="16" name="Shape 11"/>
           <p:cNvSpPr/>
           <p:nvPr/>
         </p:nvSpPr>
@@ -10371,7 +10237,7 @@
       </p:sp>
       <p:sp>
         <p:nvSpPr>
-          <p:cNvPr id="17" name="Text 13"/>
+          <p:cNvPr id="17" name="Text 12"/>
           <p:cNvSpPr/>
           <p:nvPr/>
         </p:nvSpPr>
@@ -10413,7 +10279,7 @@
       </p:sp>
       <p:sp>
         <p:nvSpPr>
-          <p:cNvPr id="18" name="Text 14"/>
+          <p:cNvPr id="18" name="Text 13"/>
           <p:cNvSpPr/>
           <p:nvPr/>
         </p:nvSpPr>
@@ -10455,7 +10321,7 @@
       </p:sp>
       <p:sp>
         <p:nvSpPr>
-          <p:cNvPr id="19" name="Shape 15"/>
+          <p:cNvPr id="19" name="Shape 14"/>
           <p:cNvSpPr/>
           <p:nvPr/>
         </p:nvSpPr>
@@ -10478,7 +10344,7 @@
       </p:sp>
       <p:sp>
         <p:nvSpPr>
-          <p:cNvPr id="20" name="Text 16"/>
+          <p:cNvPr id="20" name="Text 15"/>
           <p:cNvSpPr/>
           <p:nvPr/>
         </p:nvSpPr>
@@ -10520,7 +10386,7 @@
       </p:sp>
       <p:sp>
         <p:nvSpPr>
-          <p:cNvPr id="21" name="Text 17"/>
+          <p:cNvPr id="21" name="Text 16"/>
           <p:cNvSpPr/>
           <p:nvPr/>
         </p:nvSpPr>
@@ -10562,7 +10428,7 @@
       </p:sp>
       <p:sp>
         <p:nvSpPr>
-          <p:cNvPr id="22" name="Text 18"/>
+          <p:cNvPr id="22" name="Text 17"/>
           <p:cNvSpPr/>
           <p:nvPr/>
         </p:nvSpPr>
@@ -10604,7 +10470,7 @@
       </p:sp>
       <p:sp>
         <p:nvSpPr>
-          <p:cNvPr id="23" name="Text 19"/>
+          <p:cNvPr id="23" name="Text 18"/>
           <p:cNvSpPr/>
           <p:nvPr/>
         </p:nvSpPr>
@@ -10676,112 +10542,9 @@
           <a:chExt cx="0" cy="0"/>
         </a:xfrm>
       </p:grpSpPr>
-      <p:sp>
-        <p:nvSpPr>
-          <p:cNvPr id="2" name="Text 0"/>
-          <p:cNvSpPr/>
-          <p:nvPr/>
-        </p:nvSpPr>
-        <p:spPr>
-          <a:xfrm>
-            <a:off x="0" y="0"/>
-            <a:ext cx="9144000" cy="76200"/>
-          </a:xfrm>
-          <a:prstGeom prst="rect">
-            <a:avLst/>
-          </a:prstGeom>
-          <a:solidFill>
-            <a:srgbClr val="0969DA"/>
-          </a:solidFill>
-          <a:ln/>
-        </p:spPr>
-        <p:txBody>
-          <a:bodyPr wrap="square" rtlCol="0" anchor="ctr"/>
-          <a:lstStyle/>
-          <a:p>
-            <a:pPr indent="0" marL="0">
-              <a:buNone/>
-            </a:pPr>
-            <a:endParaRPr lang="en-US" dirty="0"/>
-          </a:p>
-        </p:txBody>
-      </p:sp>
-      <p:sp>
-        <p:nvSpPr>
-          <p:cNvPr id="3" name="Text 1"/>
-          <p:cNvSpPr/>
-          <p:nvPr/>
-        </p:nvSpPr>
-        <p:spPr>
-          <a:xfrm>
-            <a:off x="7340501" y="177701"/>
-            <a:ext cx="1168301" cy="279350"/>
-          </a:xfrm>
-          <a:prstGeom prst="roundRect">
-            <a:avLst>
-              <a:gd name="adj" fmla="val 22731"/>
-            </a:avLst>
-          </a:prstGeom>
-          <a:solidFill>
-            <a:srgbClr val="1A7F37"/>
-          </a:solidFill>
-          <a:ln/>
-        </p:spPr>
-        <p:txBody>
-          <a:bodyPr wrap="square" rtlCol="0" anchor="ctr"/>
-          <a:lstStyle/>
-          <a:p>
-            <a:pPr indent="0" marL="0">
-              <a:buNone/>
-            </a:pPr>
-            <a:endParaRPr lang="en-US" dirty="0"/>
-          </a:p>
-        </p:txBody>
-      </p:sp>
-      <p:sp>
-        <p:nvSpPr>
-          <p:cNvPr id="4" name="Text 2"/>
-          <p:cNvSpPr/>
-          <p:nvPr/>
-        </p:nvSpPr>
-        <p:spPr>
-          <a:xfrm>
-            <a:off x="7461041" y="231577"/>
-            <a:ext cx="927071" cy="171450"/>
-          </a:xfrm>
-          <a:prstGeom prst="rect">
-            <a:avLst/>
-          </a:prstGeom>
-          <a:noFill/>
-          <a:ln/>
-        </p:spPr>
-        <p:txBody>
-          <a:bodyPr wrap="square" lIns="0" tIns="0" rIns="0" bIns="0" rtlCol="0" anchor="t"/>
-          <a:lstStyle/>
-          <a:p>
-            <a:pPr algn="ctr" indent="0" marL="0">
-              <a:buNone/>
-            </a:pPr>
-            <a:r>
-              <a:rPr lang="en-US" sz="1150" b="1" dirty="0">
-                <a:solidFill>
-                  <a:srgbClr val="FFFFFF"/>
-                </a:solidFill>
-                <a:latin typeface="Arial" pitchFamily="34" charset="0"/>
-                <a:ea typeface="Arial" pitchFamily="34" charset="-122"/>
-                <a:cs typeface="Arial" pitchFamily="34" charset="-120"/>
-              </a:rPr>
-              <a:t>CHAPTER 06</a:t>
-            </a:r>
-            <a:endParaRPr lang="en-US" sz="1150" dirty="0"/>
-          </a:p>
-        </p:txBody>
-      </p:sp>
       <p:pic>
         <p:nvPicPr>
-          <p:cNvPr id="5" name="Image 0" descr="/Users/danwahlin/.copilot/session-state/56a7a0da-def8-48d4-b5e8-0ac3878cb8dd/files/slides-build/icons/FaGithub-1F2328.png">
-            <a:hlinkClick r:id="rId2" tooltip="https://github.com/github/copilot-app-for-beginners/tree/main/06-canvases"/>
-          </p:cNvPr>
+          <p:cNvPr id="2" name="Image 0" descr="/Users/danwahlin/.copilot/session-state/56a7a0da-def8-48d4-b5e8-0ac3878cb8dd/files/slides-build/img/grad-corner.png">    </p:cNvPr>
           <p:cNvPicPr>
             <a:picLocks noChangeAspect="1"/>
           </p:cNvPicPr>
@@ -10795,6 +10558,103 @@
         </p:blipFill>
         <p:spPr>
           <a:xfrm>
+            <a:off x="6349901" y="0"/>
+            <a:ext cx="2793950" cy="1308050"/>
+          </a:xfrm>
+          <a:prstGeom prst="rect">
+            <a:avLst/>
+          </a:prstGeom>
+        </p:spPr>
+      </p:pic>
+      <p:sp>
+        <p:nvSpPr>
+          <p:cNvPr id="3" name="Text 0"/>
+          <p:cNvSpPr/>
+          <p:nvPr/>
+        </p:nvSpPr>
+        <p:spPr>
+          <a:xfrm>
+            <a:off x="7340501" y="177701"/>
+            <a:ext cx="1168301" cy="279350"/>
+          </a:xfrm>
+          <a:prstGeom prst="roundRect">
+            <a:avLst>
+              <a:gd name="adj" fmla="val 22731"/>
+            </a:avLst>
+          </a:prstGeom>
+          <a:solidFill>
+            <a:srgbClr val="1A7F37"/>
+          </a:solidFill>
+          <a:ln/>
+        </p:spPr>
+        <p:txBody>
+          <a:bodyPr wrap="square" rtlCol="0" anchor="ctr"/>
+          <a:lstStyle/>
+          <a:p>
+            <a:pPr indent="0" marL="0">
+              <a:buNone/>
+            </a:pPr>
+            <a:endParaRPr lang="en-US" dirty="0"/>
+          </a:p>
+        </p:txBody>
+      </p:sp>
+      <p:sp>
+        <p:nvSpPr>
+          <p:cNvPr id="4" name="Text 1"/>
+          <p:cNvSpPr/>
+          <p:nvPr/>
+        </p:nvSpPr>
+        <p:spPr>
+          <a:xfrm>
+            <a:off x="7461041" y="231577"/>
+            <a:ext cx="927071" cy="171450"/>
+          </a:xfrm>
+          <a:prstGeom prst="rect">
+            <a:avLst/>
+          </a:prstGeom>
+          <a:noFill/>
+          <a:ln/>
+        </p:spPr>
+        <p:txBody>
+          <a:bodyPr wrap="square" lIns="0" tIns="0" rIns="0" bIns="0" rtlCol="0" anchor="t"/>
+          <a:lstStyle/>
+          <a:p>
+            <a:pPr algn="ctr" indent="0" marL="0">
+              <a:buNone/>
+            </a:pPr>
+            <a:r>
+              <a:rPr lang="en-US" sz="1150" b="1" dirty="0">
+                <a:solidFill>
+                  <a:srgbClr val="FFFFFF"/>
+                </a:solidFill>
+                <a:latin typeface="Arial" pitchFamily="34" charset="0"/>
+                <a:ea typeface="Arial" pitchFamily="34" charset="-122"/>
+                <a:cs typeface="Arial" pitchFamily="34" charset="-120"/>
+              </a:rPr>
+              <a:t>CHAPTER 06</a:t>
+            </a:r>
+            <a:endParaRPr lang="en-US" sz="1150" dirty="0"/>
+          </a:p>
+        </p:txBody>
+      </p:sp>
+      <p:pic>
+        <p:nvPicPr>
+          <p:cNvPr id="5" name="Image 1" descr="/Users/danwahlin/.copilot/session-state/56a7a0da-def8-48d4-b5e8-0ac3878cb8dd/files/slides-build/icons/FaGithub-1F2328.png">
+            <a:hlinkClick r:id="rId3" tooltip="https://github.com/github/copilot-app-for-beginners/tree/main/06-canvases"/>
+          </p:cNvPr>
+          <p:cNvPicPr>
+            <a:picLocks noChangeAspect="1"/>
+          </p:cNvPicPr>
+          <p:nvPr/>
+        </p:nvPicPr>
+        <p:blipFill>
+          <a:blip r:embed="rId2"/>
+          <a:stretch>
+            <a:fillRect/>
+          </a:stretch>
+        </p:blipFill>
+        <p:spPr>
+          <a:xfrm>
             <a:off x="8610600" y="165050"/>
             <a:ext cx="304800" cy="304800"/>
           </a:xfrm>
@@ -10805,7 +10665,7 @@
       </p:pic>
       <p:sp>
         <p:nvSpPr>
-          <p:cNvPr id="6" name="Text 3"/>
+          <p:cNvPr id="6" name="Text 2"/>
           <p:cNvSpPr/>
           <p:nvPr/>
         </p:nvSpPr>
@@ -10844,7 +10704,7 @@
       </p:sp>
       <p:sp>
         <p:nvSpPr>
-          <p:cNvPr id="7" name="Text 4"/>
+          <p:cNvPr id="7" name="Text 3"/>
           <p:cNvSpPr/>
           <p:nvPr/>
         </p:nvSpPr>
@@ -10889,7 +10749,7 @@
       </p:sp>
       <p:sp>
         <p:nvSpPr>
-          <p:cNvPr id="8" name="Text 5"/>
+          <p:cNvPr id="8" name="Text 4"/>
           <p:cNvSpPr/>
           <p:nvPr/>
         </p:nvSpPr>
@@ -10934,7 +10794,7 @@
       </p:sp>
       <p:sp>
         <p:nvSpPr>
-          <p:cNvPr id="9" name="Text 6"/>
+          <p:cNvPr id="9" name="Text 5"/>
           <p:cNvSpPr/>
           <p:nvPr/>
         </p:nvSpPr>
@@ -10977,14 +10837,14 @@
       </p:sp>
       <p:pic>
         <p:nvPicPr>
-          <p:cNvPr id="10" name="Image 1" descr="/Users/danwahlin/.copilot/session-state/56a7a0da-def8-48d4-b5e8-0ac3878cb8dd/files/slides-build/img/06-human-agent-shared-surface.jpg">    </p:cNvPr>
+          <p:cNvPr id="10" name="Image 2" descr="/Users/danwahlin/.copilot/session-state/56a7a0da-def8-48d4-b5e8-0ac3878cb8dd/files/slides-build/img/06-human-agent-shared-surface.jpg">    </p:cNvPr>
           <p:cNvPicPr>
             <a:picLocks noChangeAspect="1"/>
           </p:cNvPicPr>
           <p:nvPr/>
         </p:nvPicPr>
         <p:blipFill>
-          <a:blip r:embed="rId3"/>
+          <a:blip r:embed="rId4"/>
           <a:stretch>
             <a:fillRect/>
           </a:stretch>
@@ -11001,7 +10861,7 @@
       </p:pic>
       <p:sp>
         <p:nvSpPr>
-          <p:cNvPr id="11" name="Text 7"/>
+          <p:cNvPr id="11" name="Text 6"/>
           <p:cNvSpPr/>
           <p:nvPr/>
         </p:nvSpPr>
@@ -11033,7 +10893,7 @@
       </p:sp>
       <p:sp>
         <p:nvSpPr>
-          <p:cNvPr id="12" name="Text 8"/>
+          <p:cNvPr id="12" name="Text 7"/>
           <p:cNvSpPr/>
           <p:nvPr/>
         </p:nvSpPr>
@@ -11072,7 +10932,7 @@
       </p:sp>
       <p:sp>
         <p:nvSpPr>
-          <p:cNvPr id="13" name="Text 9"/>
+          <p:cNvPr id="13" name="Text 8"/>
           <p:cNvSpPr/>
           <p:nvPr/>
         </p:nvSpPr>
@@ -11111,7 +10971,7 @@
       </p:sp>
       <p:sp>
         <p:nvSpPr>
-          <p:cNvPr id="14" name="Text 10"/>
+          <p:cNvPr id="14" name="Text 9"/>
           <p:cNvSpPr/>
           <p:nvPr/>
         </p:nvSpPr>
@@ -11153,7 +11013,7 @@
       </p:sp>
       <p:sp>
         <p:nvSpPr>
-          <p:cNvPr id="15" name="Text 11"/>
+          <p:cNvPr id="15" name="Text 10"/>
           <p:cNvSpPr/>
           <p:nvPr/>
         </p:nvSpPr>
@@ -11185,7 +11045,7 @@
       </p:sp>
       <p:sp>
         <p:nvSpPr>
-          <p:cNvPr id="16" name="Text 12"/>
+          <p:cNvPr id="16" name="Text 11"/>
           <p:cNvSpPr/>
           <p:nvPr/>
         </p:nvSpPr>
@@ -11224,7 +11084,7 @@
       </p:sp>
       <p:sp>
         <p:nvSpPr>
-          <p:cNvPr id="17" name="Text 13"/>
+          <p:cNvPr id="17" name="Text 12"/>
           <p:cNvSpPr/>
           <p:nvPr/>
         </p:nvSpPr>
@@ -11263,7 +11123,7 @@
       </p:sp>
       <p:sp>
         <p:nvSpPr>
-          <p:cNvPr id="18" name="Text 14"/>
+          <p:cNvPr id="18" name="Text 13"/>
           <p:cNvSpPr/>
           <p:nvPr/>
         </p:nvSpPr>
@@ -11305,7 +11165,7 @@
       </p:sp>
       <p:sp>
         <p:nvSpPr>
-          <p:cNvPr id="19" name="Text 15"/>
+          <p:cNvPr id="19" name="Text 14"/>
           <p:cNvSpPr/>
           <p:nvPr/>
         </p:nvSpPr>
@@ -11337,7 +11197,7 @@
       </p:sp>
       <p:sp>
         <p:nvSpPr>
-          <p:cNvPr id="20" name="Text 16"/>
+          <p:cNvPr id="20" name="Text 15"/>
           <p:cNvSpPr/>
           <p:nvPr/>
         </p:nvSpPr>
@@ -11376,7 +11236,7 @@
       </p:sp>
       <p:sp>
         <p:nvSpPr>
-          <p:cNvPr id="21" name="Text 17"/>
+          <p:cNvPr id="21" name="Text 16"/>
           <p:cNvSpPr/>
           <p:nvPr/>
         </p:nvSpPr>
@@ -11415,7 +11275,7 @@
       </p:sp>
       <p:sp>
         <p:nvSpPr>
-          <p:cNvPr id="22" name="Text 18"/>
+          <p:cNvPr id="22" name="Text 17"/>
           <p:cNvSpPr/>
           <p:nvPr/>
         </p:nvSpPr>
@@ -11589,82 +11449,9 @@
           </a:p>
         </p:txBody>
       </p:sp>
-      <p:sp>
-        <p:nvSpPr>
-          <p:cNvPr id="5" name="Text 3"/>
-          <p:cNvSpPr/>
-          <p:nvPr/>
-        </p:nvSpPr>
-        <p:spPr>
-          <a:xfrm>
-            <a:off x="7340501" y="177701"/>
-            <a:ext cx="1168301" cy="279350"/>
-          </a:xfrm>
-          <a:prstGeom prst="roundRect">
-            <a:avLst>
-              <a:gd name="adj" fmla="val 22731"/>
-            </a:avLst>
-          </a:prstGeom>
-          <a:solidFill>
-            <a:srgbClr val="1A7F37"/>
-          </a:solidFill>
-          <a:ln/>
-        </p:spPr>
-        <p:txBody>
-          <a:bodyPr wrap="square" rtlCol="0" anchor="ctr"/>
-          <a:lstStyle/>
-          <a:p>
-            <a:pPr indent="0" marL="0">
-              <a:buNone/>
-            </a:pPr>
-            <a:endParaRPr lang="en-US" dirty="0"/>
-          </a:p>
-        </p:txBody>
-      </p:sp>
-      <p:sp>
-        <p:nvSpPr>
-          <p:cNvPr id="6" name="Text 4"/>
-          <p:cNvSpPr/>
-          <p:nvPr/>
-        </p:nvSpPr>
-        <p:spPr>
-          <a:xfrm>
-            <a:off x="7461041" y="231577"/>
-            <a:ext cx="927071" cy="171450"/>
-          </a:xfrm>
-          <a:prstGeom prst="rect">
-            <a:avLst/>
-          </a:prstGeom>
-          <a:noFill/>
-          <a:ln/>
-        </p:spPr>
-        <p:txBody>
-          <a:bodyPr wrap="square" lIns="0" tIns="0" rIns="0" bIns="0" rtlCol="0" anchor="t"/>
-          <a:lstStyle/>
-          <a:p>
-            <a:pPr algn="ctr" indent="0" marL="0">
-              <a:buNone/>
-            </a:pPr>
-            <a:r>
-              <a:rPr lang="en-US" sz="1150" b="1" dirty="0">
-                <a:solidFill>
-                  <a:srgbClr val="FFFFFF"/>
-                </a:solidFill>
-                <a:latin typeface="Arial" pitchFamily="34" charset="0"/>
-                <a:ea typeface="Arial" pitchFamily="34" charset="-122"/>
-                <a:cs typeface="Arial" pitchFamily="34" charset="-120"/>
-              </a:rPr>
-              <a:t>CHAPTER 06</a:t>
-            </a:r>
-            <a:endParaRPr lang="en-US" sz="1150" dirty="0"/>
-          </a:p>
-        </p:txBody>
-      </p:sp>
       <p:pic>
         <p:nvPicPr>
-          <p:cNvPr id="7" name="Image 0" descr="/Users/danwahlin/.copilot/session-state/56a7a0da-def8-48d4-b5e8-0ac3878cb8dd/files/slides-build/icons/FaGithub-1F2328.png">
-            <a:hlinkClick r:id="rId2" tooltip="https://github.com/github/copilot-app-for-beginners/tree/main/06-canvases"/>
-          </p:cNvPr>
+          <p:cNvPr id="5" name="Image 0" descr="/Users/danwahlin/.copilot/session-state/56a7a0da-def8-48d4-b5e8-0ac3878cb8dd/files/slides-build/img/grad-corner.png">    </p:cNvPr>
           <p:cNvPicPr>
             <a:picLocks noChangeAspect="1"/>
           </p:cNvPicPr>
@@ -11678,6 +11465,103 @@
         </p:blipFill>
         <p:spPr>
           <a:xfrm>
+            <a:off x="6349901" y="0"/>
+            <a:ext cx="2793950" cy="1308050"/>
+          </a:xfrm>
+          <a:prstGeom prst="rect">
+            <a:avLst/>
+          </a:prstGeom>
+        </p:spPr>
+      </p:pic>
+      <p:sp>
+        <p:nvSpPr>
+          <p:cNvPr id="6" name="Text 3"/>
+          <p:cNvSpPr/>
+          <p:nvPr/>
+        </p:nvSpPr>
+        <p:spPr>
+          <a:xfrm>
+            <a:off x="7340501" y="177701"/>
+            <a:ext cx="1168301" cy="279350"/>
+          </a:xfrm>
+          <a:prstGeom prst="roundRect">
+            <a:avLst>
+              <a:gd name="adj" fmla="val 22731"/>
+            </a:avLst>
+          </a:prstGeom>
+          <a:solidFill>
+            <a:srgbClr val="1A7F37"/>
+          </a:solidFill>
+          <a:ln/>
+        </p:spPr>
+        <p:txBody>
+          <a:bodyPr wrap="square" rtlCol="0" anchor="ctr"/>
+          <a:lstStyle/>
+          <a:p>
+            <a:pPr indent="0" marL="0">
+              <a:buNone/>
+            </a:pPr>
+            <a:endParaRPr lang="en-US" dirty="0"/>
+          </a:p>
+        </p:txBody>
+      </p:sp>
+      <p:sp>
+        <p:nvSpPr>
+          <p:cNvPr id="7" name="Text 4"/>
+          <p:cNvSpPr/>
+          <p:nvPr/>
+        </p:nvSpPr>
+        <p:spPr>
+          <a:xfrm>
+            <a:off x="7461041" y="231577"/>
+            <a:ext cx="927071" cy="171450"/>
+          </a:xfrm>
+          <a:prstGeom prst="rect">
+            <a:avLst/>
+          </a:prstGeom>
+          <a:noFill/>
+          <a:ln/>
+        </p:spPr>
+        <p:txBody>
+          <a:bodyPr wrap="square" lIns="0" tIns="0" rIns="0" bIns="0" rtlCol="0" anchor="t"/>
+          <a:lstStyle/>
+          <a:p>
+            <a:pPr algn="ctr" indent="0" marL="0">
+              <a:buNone/>
+            </a:pPr>
+            <a:r>
+              <a:rPr lang="en-US" sz="1150" b="1" dirty="0">
+                <a:solidFill>
+                  <a:srgbClr val="FFFFFF"/>
+                </a:solidFill>
+                <a:latin typeface="Arial" pitchFamily="34" charset="0"/>
+                <a:ea typeface="Arial" pitchFamily="34" charset="-122"/>
+                <a:cs typeface="Arial" pitchFamily="34" charset="-120"/>
+              </a:rPr>
+              <a:t>CHAPTER 06</a:t>
+            </a:r>
+            <a:endParaRPr lang="en-US" sz="1150" dirty="0"/>
+          </a:p>
+        </p:txBody>
+      </p:sp>
+      <p:pic>
+        <p:nvPicPr>
+          <p:cNvPr id="8" name="Image 1" descr="/Users/danwahlin/.copilot/session-state/56a7a0da-def8-48d4-b5e8-0ac3878cb8dd/files/slides-build/icons/FaGithub-1F2328.png">
+            <a:hlinkClick r:id="rId3" tooltip="https://github.com/github/copilot-app-for-beginners/tree/main/06-canvases"/>
+          </p:cNvPr>
+          <p:cNvPicPr>
+            <a:picLocks noChangeAspect="1"/>
+          </p:cNvPicPr>
+          <p:nvPr/>
+        </p:nvPicPr>
+        <p:blipFill>
+          <a:blip r:embed="rId2"/>
+          <a:stretch>
+            <a:fillRect/>
+          </a:stretch>
+        </p:blipFill>
+        <p:spPr>
+          <a:xfrm>
             <a:off x="8610600" y="165050"/>
             <a:ext cx="304800" cy="304800"/>
           </a:xfrm>
@@ -11688,7 +11572,7 @@
       </p:pic>
       <p:sp>
         <p:nvSpPr>
-          <p:cNvPr id="8" name="Text 5"/>
+          <p:cNvPr id="9" name="Text 5"/>
           <p:cNvSpPr/>
           <p:nvPr/>
         </p:nvSpPr>
@@ -11727,7 +11611,7 @@
       </p:sp>
       <p:sp>
         <p:nvSpPr>
-          <p:cNvPr id="9" name="Text 6"/>
+          <p:cNvPr id="10" name="Text 6"/>
           <p:cNvSpPr/>
           <p:nvPr/>
         </p:nvSpPr>
@@ -11772,7 +11656,7 @@
       </p:sp>
       <p:sp>
         <p:nvSpPr>
-          <p:cNvPr id="10" name="Text 7"/>
+          <p:cNvPr id="11" name="Text 7"/>
           <p:cNvSpPr/>
           <p:nvPr/>
         </p:nvSpPr>
@@ -11804,7 +11688,7 @@
       </p:sp>
       <p:sp>
         <p:nvSpPr>
-          <p:cNvPr id="11" name="Text 8"/>
+          <p:cNvPr id="12" name="Text 8"/>
           <p:cNvSpPr/>
           <p:nvPr/>
         </p:nvSpPr>
@@ -11876,112 +11760,9 @@
           <a:chExt cx="0" cy="0"/>
         </a:xfrm>
       </p:grpSpPr>
-      <p:sp>
-        <p:nvSpPr>
-          <p:cNvPr id="2" name="Text 0"/>
-          <p:cNvSpPr/>
-          <p:nvPr/>
-        </p:nvSpPr>
-        <p:spPr>
-          <a:xfrm>
-            <a:off x="0" y="0"/>
-            <a:ext cx="9144000" cy="76200"/>
-          </a:xfrm>
-          <a:prstGeom prst="rect">
-            <a:avLst/>
-          </a:prstGeom>
-          <a:solidFill>
-            <a:srgbClr val="8250DF"/>
-          </a:solidFill>
-          <a:ln/>
-        </p:spPr>
-        <p:txBody>
-          <a:bodyPr wrap="square" rtlCol="0" anchor="ctr"/>
-          <a:lstStyle/>
-          <a:p>
-            <a:pPr indent="0" marL="0">
-              <a:buNone/>
-            </a:pPr>
-            <a:endParaRPr lang="en-US" dirty="0"/>
-          </a:p>
-        </p:txBody>
-      </p:sp>
-      <p:sp>
-        <p:nvSpPr>
-          <p:cNvPr id="3" name="Text 1"/>
-          <p:cNvSpPr/>
-          <p:nvPr/>
-        </p:nvSpPr>
-        <p:spPr>
-          <a:xfrm>
-            <a:off x="7340501" y="177701"/>
-            <a:ext cx="1168301" cy="279350"/>
-          </a:xfrm>
-          <a:prstGeom prst="roundRect">
-            <a:avLst>
-              <a:gd name="adj" fmla="val 22731"/>
-            </a:avLst>
-          </a:prstGeom>
-          <a:solidFill>
-            <a:srgbClr val="1A7F37"/>
-          </a:solidFill>
-          <a:ln/>
-        </p:spPr>
-        <p:txBody>
-          <a:bodyPr wrap="square" rtlCol="0" anchor="ctr"/>
-          <a:lstStyle/>
-          <a:p>
-            <a:pPr indent="0" marL="0">
-              <a:buNone/>
-            </a:pPr>
-            <a:endParaRPr lang="en-US" dirty="0"/>
-          </a:p>
-        </p:txBody>
-      </p:sp>
-      <p:sp>
-        <p:nvSpPr>
-          <p:cNvPr id="4" name="Text 2"/>
-          <p:cNvSpPr/>
-          <p:nvPr/>
-        </p:nvSpPr>
-        <p:spPr>
-          <a:xfrm>
-            <a:off x="7461041" y="231577"/>
-            <a:ext cx="927071" cy="171450"/>
-          </a:xfrm>
-          <a:prstGeom prst="rect">
-            <a:avLst/>
-          </a:prstGeom>
-          <a:noFill/>
-          <a:ln/>
-        </p:spPr>
-        <p:txBody>
-          <a:bodyPr wrap="square" lIns="0" tIns="0" rIns="0" bIns="0" rtlCol="0" anchor="t"/>
-          <a:lstStyle/>
-          <a:p>
-            <a:pPr algn="ctr" indent="0" marL="0">
-              <a:buNone/>
-            </a:pPr>
-            <a:r>
-              <a:rPr lang="en-US" sz="1150" b="1" dirty="0">
-                <a:solidFill>
-                  <a:srgbClr val="FFFFFF"/>
-                </a:solidFill>
-                <a:latin typeface="Arial" pitchFamily="34" charset="0"/>
-                <a:ea typeface="Arial" pitchFamily="34" charset="-122"/>
-                <a:cs typeface="Arial" pitchFamily="34" charset="-120"/>
-              </a:rPr>
-              <a:t>CHAPTER 06</a:t>
-            </a:r>
-            <a:endParaRPr lang="en-US" sz="1150" dirty="0"/>
-          </a:p>
-        </p:txBody>
-      </p:sp>
       <p:pic>
         <p:nvPicPr>
-          <p:cNvPr id="5" name="Image 0" descr="/Users/danwahlin/.copilot/session-state/56a7a0da-def8-48d4-b5e8-0ac3878cb8dd/files/slides-build/icons/FaGithub-1F2328.png">
-            <a:hlinkClick r:id="rId2" tooltip="https://github.com/github/copilot-app-for-beginners/tree/main/06-canvases"/>
-          </p:cNvPr>
+          <p:cNvPr id="2" name="Image 0" descr="/Users/danwahlin/.copilot/session-state/56a7a0da-def8-48d4-b5e8-0ac3878cb8dd/files/slides-build/img/grad-corner.png">    </p:cNvPr>
           <p:cNvPicPr>
             <a:picLocks noChangeAspect="1"/>
           </p:cNvPicPr>
@@ -11995,6 +11776,103 @@
         </p:blipFill>
         <p:spPr>
           <a:xfrm>
+            <a:off x="6349901" y="0"/>
+            <a:ext cx="2793950" cy="1308050"/>
+          </a:xfrm>
+          <a:prstGeom prst="rect">
+            <a:avLst/>
+          </a:prstGeom>
+        </p:spPr>
+      </p:pic>
+      <p:sp>
+        <p:nvSpPr>
+          <p:cNvPr id="3" name="Text 0"/>
+          <p:cNvSpPr/>
+          <p:nvPr/>
+        </p:nvSpPr>
+        <p:spPr>
+          <a:xfrm>
+            <a:off x="7340501" y="177701"/>
+            <a:ext cx="1168301" cy="279350"/>
+          </a:xfrm>
+          <a:prstGeom prst="roundRect">
+            <a:avLst>
+              <a:gd name="adj" fmla="val 22731"/>
+            </a:avLst>
+          </a:prstGeom>
+          <a:solidFill>
+            <a:srgbClr val="1A7F37"/>
+          </a:solidFill>
+          <a:ln/>
+        </p:spPr>
+        <p:txBody>
+          <a:bodyPr wrap="square" rtlCol="0" anchor="ctr"/>
+          <a:lstStyle/>
+          <a:p>
+            <a:pPr indent="0" marL="0">
+              <a:buNone/>
+            </a:pPr>
+            <a:endParaRPr lang="en-US" dirty="0"/>
+          </a:p>
+        </p:txBody>
+      </p:sp>
+      <p:sp>
+        <p:nvSpPr>
+          <p:cNvPr id="4" name="Text 1"/>
+          <p:cNvSpPr/>
+          <p:nvPr/>
+        </p:nvSpPr>
+        <p:spPr>
+          <a:xfrm>
+            <a:off x="7461041" y="231577"/>
+            <a:ext cx="927071" cy="171450"/>
+          </a:xfrm>
+          <a:prstGeom prst="rect">
+            <a:avLst/>
+          </a:prstGeom>
+          <a:noFill/>
+          <a:ln/>
+        </p:spPr>
+        <p:txBody>
+          <a:bodyPr wrap="square" lIns="0" tIns="0" rIns="0" bIns="0" rtlCol="0" anchor="t"/>
+          <a:lstStyle/>
+          <a:p>
+            <a:pPr algn="ctr" indent="0" marL="0">
+              <a:buNone/>
+            </a:pPr>
+            <a:r>
+              <a:rPr lang="en-US" sz="1150" b="1" dirty="0">
+                <a:solidFill>
+                  <a:srgbClr val="FFFFFF"/>
+                </a:solidFill>
+                <a:latin typeface="Arial" pitchFamily="34" charset="0"/>
+                <a:ea typeface="Arial" pitchFamily="34" charset="-122"/>
+                <a:cs typeface="Arial" pitchFamily="34" charset="-120"/>
+              </a:rPr>
+              <a:t>CHAPTER 06</a:t>
+            </a:r>
+            <a:endParaRPr lang="en-US" sz="1150" dirty="0"/>
+          </a:p>
+        </p:txBody>
+      </p:sp>
+      <p:pic>
+        <p:nvPicPr>
+          <p:cNvPr id="5" name="Image 1" descr="/Users/danwahlin/.copilot/session-state/56a7a0da-def8-48d4-b5e8-0ac3878cb8dd/files/slides-build/icons/FaGithub-1F2328.png">
+            <a:hlinkClick r:id="rId3" tooltip="https://github.com/github/copilot-app-for-beginners/tree/main/06-canvases"/>
+          </p:cNvPr>
+          <p:cNvPicPr>
+            <a:picLocks noChangeAspect="1"/>
+          </p:cNvPicPr>
+          <p:nvPr/>
+        </p:nvPicPr>
+        <p:blipFill>
+          <a:blip r:embed="rId2"/>
+          <a:stretch>
+            <a:fillRect/>
+          </a:stretch>
+        </p:blipFill>
+        <p:spPr>
+          <a:xfrm>
             <a:off x="8610600" y="165050"/>
             <a:ext cx="304800" cy="304800"/>
           </a:xfrm>
@@ -12005,7 +11883,7 @@
       </p:pic>
       <p:sp>
         <p:nvSpPr>
-          <p:cNvPr id="6" name="Text 3"/>
+          <p:cNvPr id="6" name="Text 2"/>
           <p:cNvSpPr/>
           <p:nvPr/>
         </p:nvSpPr>
@@ -12044,7 +11922,7 @@
       </p:sp>
       <p:sp>
         <p:nvSpPr>
-          <p:cNvPr id="7" name="Text 4"/>
+          <p:cNvPr id="7" name="Text 3"/>
           <p:cNvSpPr/>
           <p:nvPr/>
         </p:nvSpPr>
@@ -12089,7 +11967,7 @@
       </p:sp>
       <p:sp>
         <p:nvSpPr>
-          <p:cNvPr id="8" name="Text 5"/>
+          <p:cNvPr id="8" name="Text 4"/>
           <p:cNvSpPr/>
           <p:nvPr/>
         </p:nvSpPr>
@@ -12134,7 +12012,7 @@
       </p:sp>
       <p:sp>
         <p:nvSpPr>
-          <p:cNvPr id="9" name="Text 6"/>
+          <p:cNvPr id="9" name="Text 5"/>
           <p:cNvSpPr/>
           <p:nvPr/>
         </p:nvSpPr>
@@ -12177,14 +12055,14 @@
       </p:sp>
       <p:pic>
         <p:nvPicPr>
-          <p:cNvPr id="10" name="Image 1" descr="/Users/danwahlin/.copilot/session-state/56a7a0da-def8-48d4-b5e8-0ac3878cb8dd/files/slides-build/img/06-kanban-crop.png">    </p:cNvPr>
+          <p:cNvPr id="10" name="Image 2" descr="/Users/danwahlin/.copilot/session-state/56a7a0da-def8-48d4-b5e8-0ac3878cb8dd/files/slides-build/img/06-kanban-crop.png">    </p:cNvPr>
           <p:cNvPicPr>
             <a:picLocks noChangeAspect="1"/>
           </p:cNvPicPr>
           <p:nvPr/>
         </p:nvPicPr>
         <p:blipFill>
-          <a:blip r:embed="rId3"/>
+          <a:blip r:embed="rId4"/>
           <a:stretch>
             <a:fillRect/>
           </a:stretch>
@@ -12201,7 +12079,7 @@
       </p:pic>
       <p:sp>
         <p:nvSpPr>
-          <p:cNvPr id="11" name="Text 7"/>
+          <p:cNvPr id="11" name="Text 6"/>
           <p:cNvSpPr/>
           <p:nvPr/>
         </p:nvSpPr>
@@ -12233,7 +12111,7 @@
       </p:sp>
       <p:sp>
         <p:nvSpPr>
-          <p:cNvPr id="12" name="Text 8"/>
+          <p:cNvPr id="12" name="Text 7"/>
           <p:cNvSpPr/>
           <p:nvPr/>
         </p:nvSpPr>
@@ -12272,7 +12150,7 @@
       </p:sp>
       <p:sp>
         <p:nvSpPr>
-          <p:cNvPr id="13" name="Text 9"/>
+          <p:cNvPr id="13" name="Text 8"/>
           <p:cNvSpPr/>
           <p:nvPr/>
         </p:nvSpPr>
@@ -12314,7 +12192,7 @@
       </p:sp>
       <p:sp>
         <p:nvSpPr>
-          <p:cNvPr id="14" name="Text 10"/>
+          <p:cNvPr id="14" name="Text 9"/>
           <p:cNvSpPr/>
           <p:nvPr/>
         </p:nvSpPr>
@@ -12407,7 +12285,7 @@
       </p:sp>
       <p:sp>
         <p:nvSpPr>
-          <p:cNvPr id="15" name="Text 11"/>
+          <p:cNvPr id="15" name="Text 10"/>
           <p:cNvSpPr/>
           <p:nvPr/>
         </p:nvSpPr>
@@ -12439,7 +12317,7 @@
       </p:sp>
       <p:sp>
         <p:nvSpPr>
-          <p:cNvPr id="16" name="Text 12"/>
+          <p:cNvPr id="16" name="Text 11"/>
           <p:cNvSpPr/>
           <p:nvPr/>
         </p:nvSpPr>
@@ -12478,7 +12356,7 @@
       </p:sp>
       <p:sp>
         <p:nvSpPr>
-          <p:cNvPr id="17" name="Text 13"/>
+          <p:cNvPr id="17" name="Text 12"/>
           <p:cNvSpPr/>
           <p:nvPr/>
         </p:nvSpPr>
@@ -12520,7 +12398,7 @@
       </p:sp>
       <p:sp>
         <p:nvSpPr>
-          <p:cNvPr id="18" name="Text 14"/>
+          <p:cNvPr id="18" name="Text 13"/>
           <p:cNvSpPr/>
           <p:nvPr/>
         </p:nvSpPr>
@@ -12596,7 +12474,7 @@
       </p:sp>
       <p:sp>
         <p:nvSpPr>
-          <p:cNvPr id="19" name="Text 15"/>
+          <p:cNvPr id="19" name="Text 14"/>
           <p:cNvSpPr/>
           <p:nvPr/>
         </p:nvSpPr>
@@ -12628,7 +12506,7 @@
       </p:sp>
       <p:sp>
         <p:nvSpPr>
-          <p:cNvPr id="20" name="Text 16"/>
+          <p:cNvPr id="20" name="Text 15"/>
           <p:cNvSpPr/>
           <p:nvPr/>
         </p:nvSpPr>
@@ -12667,7 +12545,7 @@
       </p:sp>
       <p:sp>
         <p:nvSpPr>
-          <p:cNvPr id="21" name="Text 17"/>
+          <p:cNvPr id="21" name="Text 16"/>
           <p:cNvSpPr/>
           <p:nvPr/>
         </p:nvSpPr>
@@ -12709,7 +12587,7 @@
       </p:sp>
       <p:sp>
         <p:nvSpPr>
-          <p:cNvPr id="22" name="Text 18"/>
+          <p:cNvPr id="22" name="Text 17"/>
           <p:cNvSpPr/>
           <p:nvPr/>
         </p:nvSpPr>
@@ -12849,112 +12727,9 @@
           <a:chExt cx="0" cy="0"/>
         </a:xfrm>
       </p:grpSpPr>
-      <p:sp>
-        <p:nvSpPr>
-          <p:cNvPr id="2" name="Text 0"/>
-          <p:cNvSpPr/>
-          <p:nvPr/>
-        </p:nvSpPr>
-        <p:spPr>
-          <a:xfrm>
-            <a:off x="0" y="0"/>
-            <a:ext cx="9144000" cy="76200"/>
-          </a:xfrm>
-          <a:prstGeom prst="rect">
-            <a:avLst/>
-          </a:prstGeom>
-          <a:solidFill>
-            <a:srgbClr val="8250DF"/>
-          </a:solidFill>
-          <a:ln/>
-        </p:spPr>
-        <p:txBody>
-          <a:bodyPr wrap="square" rtlCol="0" anchor="ctr"/>
-          <a:lstStyle/>
-          <a:p>
-            <a:pPr indent="0" marL="0">
-              <a:buNone/>
-            </a:pPr>
-            <a:endParaRPr lang="en-US" dirty="0"/>
-          </a:p>
-        </p:txBody>
-      </p:sp>
-      <p:sp>
-        <p:nvSpPr>
-          <p:cNvPr id="3" name="Text 1"/>
-          <p:cNvSpPr/>
-          <p:nvPr/>
-        </p:nvSpPr>
-        <p:spPr>
-          <a:xfrm>
-            <a:off x="7340501" y="177701"/>
-            <a:ext cx="1168301" cy="279350"/>
-          </a:xfrm>
-          <a:prstGeom prst="roundRect">
-            <a:avLst>
-              <a:gd name="adj" fmla="val 22731"/>
-            </a:avLst>
-          </a:prstGeom>
-          <a:solidFill>
-            <a:srgbClr val="1A7F37"/>
-          </a:solidFill>
-          <a:ln/>
-        </p:spPr>
-        <p:txBody>
-          <a:bodyPr wrap="square" rtlCol="0" anchor="ctr"/>
-          <a:lstStyle/>
-          <a:p>
-            <a:pPr indent="0" marL="0">
-              <a:buNone/>
-            </a:pPr>
-            <a:endParaRPr lang="en-US" dirty="0"/>
-          </a:p>
-        </p:txBody>
-      </p:sp>
-      <p:sp>
-        <p:nvSpPr>
-          <p:cNvPr id="4" name="Text 2"/>
-          <p:cNvSpPr/>
-          <p:nvPr/>
-        </p:nvSpPr>
-        <p:spPr>
-          <a:xfrm>
-            <a:off x="7461041" y="231577"/>
-            <a:ext cx="927071" cy="171450"/>
-          </a:xfrm>
-          <a:prstGeom prst="rect">
-            <a:avLst/>
-          </a:prstGeom>
-          <a:noFill/>
-          <a:ln/>
-        </p:spPr>
-        <p:txBody>
-          <a:bodyPr wrap="square" lIns="0" tIns="0" rIns="0" bIns="0" rtlCol="0" anchor="t"/>
-          <a:lstStyle/>
-          <a:p>
-            <a:pPr algn="ctr" indent="0" marL="0">
-              <a:buNone/>
-            </a:pPr>
-            <a:r>
-              <a:rPr lang="en-US" sz="1150" b="1" dirty="0">
-                <a:solidFill>
-                  <a:srgbClr val="FFFFFF"/>
-                </a:solidFill>
-                <a:latin typeface="Arial" pitchFamily="34" charset="0"/>
-                <a:ea typeface="Arial" pitchFamily="34" charset="-122"/>
-                <a:cs typeface="Arial" pitchFamily="34" charset="-120"/>
-              </a:rPr>
-              <a:t>CHAPTER 06</a:t>
-            </a:r>
-            <a:endParaRPr lang="en-US" sz="1150" dirty="0"/>
-          </a:p>
-        </p:txBody>
-      </p:sp>
       <p:pic>
         <p:nvPicPr>
-          <p:cNvPr id="5" name="Image 0" descr="/Users/danwahlin/.copilot/session-state/56a7a0da-def8-48d4-b5e8-0ac3878cb8dd/files/slides-build/icons/FaGithub-1F2328.png">
-            <a:hlinkClick r:id="rId2" tooltip="https://github.com/github/copilot-app-for-beginners/tree/main/06-canvases"/>
-          </p:cNvPr>
+          <p:cNvPr id="2" name="Image 0" descr="/Users/danwahlin/.copilot/session-state/56a7a0da-def8-48d4-b5e8-0ac3878cb8dd/files/slides-build/img/grad-corner.png">    </p:cNvPr>
           <p:cNvPicPr>
             <a:picLocks noChangeAspect="1"/>
           </p:cNvPicPr>
@@ -12968,6 +12743,103 @@
         </p:blipFill>
         <p:spPr>
           <a:xfrm>
+            <a:off x="6349901" y="0"/>
+            <a:ext cx="2793950" cy="1308050"/>
+          </a:xfrm>
+          <a:prstGeom prst="rect">
+            <a:avLst/>
+          </a:prstGeom>
+        </p:spPr>
+      </p:pic>
+      <p:sp>
+        <p:nvSpPr>
+          <p:cNvPr id="3" name="Text 0"/>
+          <p:cNvSpPr/>
+          <p:nvPr/>
+        </p:nvSpPr>
+        <p:spPr>
+          <a:xfrm>
+            <a:off x="7340501" y="177701"/>
+            <a:ext cx="1168301" cy="279350"/>
+          </a:xfrm>
+          <a:prstGeom prst="roundRect">
+            <a:avLst>
+              <a:gd name="adj" fmla="val 22731"/>
+            </a:avLst>
+          </a:prstGeom>
+          <a:solidFill>
+            <a:srgbClr val="1A7F37"/>
+          </a:solidFill>
+          <a:ln/>
+        </p:spPr>
+        <p:txBody>
+          <a:bodyPr wrap="square" rtlCol="0" anchor="ctr"/>
+          <a:lstStyle/>
+          <a:p>
+            <a:pPr indent="0" marL="0">
+              <a:buNone/>
+            </a:pPr>
+            <a:endParaRPr lang="en-US" dirty="0"/>
+          </a:p>
+        </p:txBody>
+      </p:sp>
+      <p:sp>
+        <p:nvSpPr>
+          <p:cNvPr id="4" name="Text 1"/>
+          <p:cNvSpPr/>
+          <p:nvPr/>
+        </p:nvSpPr>
+        <p:spPr>
+          <a:xfrm>
+            <a:off x="7461041" y="231577"/>
+            <a:ext cx="927071" cy="171450"/>
+          </a:xfrm>
+          <a:prstGeom prst="rect">
+            <a:avLst/>
+          </a:prstGeom>
+          <a:noFill/>
+          <a:ln/>
+        </p:spPr>
+        <p:txBody>
+          <a:bodyPr wrap="square" lIns="0" tIns="0" rIns="0" bIns="0" rtlCol="0" anchor="t"/>
+          <a:lstStyle/>
+          <a:p>
+            <a:pPr algn="ctr" indent="0" marL="0">
+              <a:buNone/>
+            </a:pPr>
+            <a:r>
+              <a:rPr lang="en-US" sz="1150" b="1" dirty="0">
+                <a:solidFill>
+                  <a:srgbClr val="FFFFFF"/>
+                </a:solidFill>
+                <a:latin typeface="Arial" pitchFamily="34" charset="0"/>
+                <a:ea typeface="Arial" pitchFamily="34" charset="-122"/>
+                <a:cs typeface="Arial" pitchFamily="34" charset="-120"/>
+              </a:rPr>
+              <a:t>CHAPTER 06</a:t>
+            </a:r>
+            <a:endParaRPr lang="en-US" sz="1150" dirty="0"/>
+          </a:p>
+        </p:txBody>
+      </p:sp>
+      <p:pic>
+        <p:nvPicPr>
+          <p:cNvPr id="5" name="Image 1" descr="/Users/danwahlin/.copilot/session-state/56a7a0da-def8-48d4-b5e8-0ac3878cb8dd/files/slides-build/icons/FaGithub-1F2328.png">
+            <a:hlinkClick r:id="rId3" tooltip="https://github.com/github/copilot-app-for-beginners/tree/main/06-canvases"/>
+          </p:cNvPr>
+          <p:cNvPicPr>
+            <a:picLocks noChangeAspect="1"/>
+          </p:cNvPicPr>
+          <p:nvPr/>
+        </p:nvPicPr>
+        <p:blipFill>
+          <a:blip r:embed="rId2"/>
+          <a:stretch>
+            <a:fillRect/>
+          </a:stretch>
+        </p:blipFill>
+        <p:spPr>
+          <a:xfrm>
             <a:off x="8610600" y="165050"/>
             <a:ext cx="304800" cy="304800"/>
           </a:xfrm>
@@ -12978,7 +12850,7 @@
       </p:pic>
       <p:sp>
         <p:nvSpPr>
-          <p:cNvPr id="6" name="Text 3"/>
+          <p:cNvPr id="6" name="Text 2"/>
           <p:cNvSpPr/>
           <p:nvPr/>
         </p:nvSpPr>
@@ -13017,7 +12889,7 @@
       </p:sp>
       <p:sp>
         <p:nvSpPr>
-          <p:cNvPr id="7" name="Text 4"/>
+          <p:cNvPr id="7" name="Text 3"/>
           <p:cNvSpPr/>
           <p:nvPr/>
         </p:nvSpPr>
@@ -13062,7 +12934,7 @@
       </p:sp>
       <p:sp>
         <p:nvSpPr>
-          <p:cNvPr id="8" name="Text 5"/>
+          <p:cNvPr id="8" name="Text 4"/>
           <p:cNvSpPr/>
           <p:nvPr/>
         </p:nvSpPr>
@@ -13147,7 +13019,7 @@
       </p:sp>
       <p:sp>
         <p:nvSpPr>
-          <p:cNvPr id="9" name="Text 6"/>
+          <p:cNvPr id="9" name="Text 5"/>
           <p:cNvSpPr/>
           <p:nvPr/>
         </p:nvSpPr>
@@ -13179,7 +13051,7 @@
       </p:sp>
       <p:sp>
         <p:nvSpPr>
-          <p:cNvPr id="10" name="Shape 7"/>
+          <p:cNvPr id="10" name="Shape 6"/>
           <p:cNvSpPr/>
           <p:nvPr/>
         </p:nvSpPr>
@@ -13202,7 +13074,7 @@
       </p:sp>
       <p:sp>
         <p:nvSpPr>
-          <p:cNvPr id="11" name="Shape 8"/>
+          <p:cNvPr id="11" name="Shape 7"/>
           <p:cNvSpPr/>
           <p:nvPr/>
         </p:nvSpPr>
@@ -13225,7 +13097,7 @@
       </p:sp>
       <p:sp>
         <p:nvSpPr>
-          <p:cNvPr id="12" name="Shape 9"/>
+          <p:cNvPr id="12" name="Shape 8"/>
           <p:cNvSpPr/>
           <p:nvPr/>
         </p:nvSpPr>
@@ -13248,7 +13120,7 @@
       </p:sp>
       <p:sp>
         <p:nvSpPr>
-          <p:cNvPr id="13" name="Shape 10"/>
+          <p:cNvPr id="13" name="Shape 9"/>
           <p:cNvSpPr/>
           <p:nvPr/>
         </p:nvSpPr>
@@ -13271,14 +13143,14 @@
       </p:sp>
       <p:pic>
         <p:nvPicPr>
-          <p:cNvPr id="14" name="Image 1" descr="/Users/danwahlin/.copilot/session-state/56a7a0da-def8-48d4-b5e8-0ac3878cb8dd/files/slides-build/icons/GoCopilot-8250DF.png">    </p:cNvPr>
+          <p:cNvPr id="14" name="Image 2" descr="/Users/danwahlin/.copilot/session-state/56a7a0da-def8-48d4-b5e8-0ac3878cb8dd/files/slides-build/icons/GoCopilot-8250DF.png">    </p:cNvPr>
           <p:cNvPicPr>
             <a:picLocks noChangeAspect="1"/>
           </p:cNvPicPr>
           <p:nvPr/>
         </p:nvPicPr>
         <p:blipFill>
-          <a:blip r:embed="rId3"/>
+          <a:blip r:embed="rId4"/>
           <a:stretch>
             <a:fillRect/>
           </a:stretch>
@@ -13295,7 +13167,7 @@
       </p:pic>
       <p:sp>
         <p:nvSpPr>
-          <p:cNvPr id="15" name="Text 11"/>
+          <p:cNvPr id="15" name="Text 10"/>
           <p:cNvSpPr/>
           <p:nvPr/>
         </p:nvSpPr>
@@ -13334,7 +13206,7 @@
       </p:sp>
       <p:sp>
         <p:nvSpPr>
-          <p:cNvPr id="16" name="Text 12"/>
+          <p:cNvPr id="16" name="Text 11"/>
           <p:cNvSpPr/>
           <p:nvPr/>
         </p:nvSpPr>
@@ -13376,7 +13248,7 @@
       </p:sp>
       <p:sp>
         <p:nvSpPr>
-          <p:cNvPr id="17" name="Text 13"/>
+          <p:cNvPr id="17" name="Text 12"/>
           <p:cNvSpPr/>
           <p:nvPr/>
         </p:nvSpPr>
@@ -13412,14 +13284,14 @@
       </p:sp>
       <p:pic>
         <p:nvPicPr>
-          <p:cNvPr id="18" name="Image 2" descr="/Users/danwahlin/.copilot/session-state/56a7a0da-def8-48d4-b5e8-0ac3878cb8dd/files/slides-build/icons/GoCheckCircle-1A7F37.png">    </p:cNvPr>
+          <p:cNvPr id="18" name="Image 3" descr="/Users/danwahlin/.copilot/session-state/56a7a0da-def8-48d4-b5e8-0ac3878cb8dd/files/slides-build/icons/GoCheckCircle-1A7F37.png">    </p:cNvPr>
           <p:cNvPicPr>
             <a:picLocks noChangeAspect="1"/>
           </p:cNvPicPr>
           <p:nvPr/>
         </p:nvPicPr>
         <p:blipFill>
-          <a:blip r:embed="rId4"/>
+          <a:blip r:embed="rId5"/>
           <a:stretch>
             <a:fillRect/>
           </a:stretch>
@@ -13436,7 +13308,7 @@
       </p:pic>
       <p:sp>
         <p:nvSpPr>
-          <p:cNvPr id="19" name="Text 14"/>
+          <p:cNvPr id="19" name="Text 13"/>
           <p:cNvSpPr/>
           <p:nvPr/>
         </p:nvSpPr>
@@ -13478,7 +13350,7 @@
       </p:sp>
       <p:sp>
         <p:nvSpPr>
-          <p:cNvPr id="20" name="Text 15"/>
+          <p:cNvPr id="20" name="Text 14"/>
           <p:cNvSpPr/>
           <p:nvPr/>
         </p:nvSpPr>
@@ -13521,14 +13393,14 @@
       </p:sp>
       <p:pic>
         <p:nvPicPr>
-          <p:cNvPr id="21" name="Image 3" descr="/Users/danwahlin/.copilot/session-state/56a7a0da-def8-48d4-b5e8-0ac3878cb8dd/files/slides-build/img/06-session-board-collaboration.jpg">    </p:cNvPr>
+          <p:cNvPr id="21" name="Image 4" descr="/Users/danwahlin/.copilot/session-state/56a7a0da-def8-48d4-b5e8-0ac3878cb8dd/files/slides-build/img/06-session-board-collaboration.jpg">    </p:cNvPr>
           <p:cNvPicPr>
             <a:picLocks noChangeAspect="1"/>
           </p:cNvPicPr>
           <p:nvPr/>
         </p:nvPicPr>
         <p:blipFill>
-          <a:blip r:embed="rId5"/>
+          <a:blip r:embed="rId6"/>
           <a:stretch>
             <a:fillRect/>
           </a:stretch>
@@ -13677,82 +13549,9 @@
           </a:p>
         </p:txBody>
       </p:sp>
-      <p:sp>
-        <p:nvSpPr>
-          <p:cNvPr id="5" name="Text 3"/>
-          <p:cNvSpPr/>
-          <p:nvPr/>
-        </p:nvSpPr>
-        <p:spPr>
-          <a:xfrm>
-            <a:off x="7340501" y="177701"/>
-            <a:ext cx="1168301" cy="279350"/>
-          </a:xfrm>
-          <a:prstGeom prst="roundRect">
-            <a:avLst>
-              <a:gd name="adj" fmla="val 22731"/>
-            </a:avLst>
-          </a:prstGeom>
-          <a:solidFill>
-            <a:srgbClr val="1A7F37"/>
-          </a:solidFill>
-          <a:ln/>
-        </p:spPr>
-        <p:txBody>
-          <a:bodyPr wrap="square" rtlCol="0" anchor="ctr"/>
-          <a:lstStyle/>
-          <a:p>
-            <a:pPr indent="0" marL="0">
-              <a:buNone/>
-            </a:pPr>
-            <a:endParaRPr lang="en-US" dirty="0"/>
-          </a:p>
-        </p:txBody>
-      </p:sp>
-      <p:sp>
-        <p:nvSpPr>
-          <p:cNvPr id="6" name="Text 4"/>
-          <p:cNvSpPr/>
-          <p:nvPr/>
-        </p:nvSpPr>
-        <p:spPr>
-          <a:xfrm>
-            <a:off x="7461041" y="231577"/>
-            <a:ext cx="927071" cy="171450"/>
-          </a:xfrm>
-          <a:prstGeom prst="rect">
-            <a:avLst/>
-          </a:prstGeom>
-          <a:noFill/>
-          <a:ln/>
-        </p:spPr>
-        <p:txBody>
-          <a:bodyPr wrap="square" lIns="0" tIns="0" rIns="0" bIns="0" rtlCol="0" anchor="t"/>
-          <a:lstStyle/>
-          <a:p>
-            <a:pPr algn="ctr" indent="0" marL="0">
-              <a:buNone/>
-            </a:pPr>
-            <a:r>
-              <a:rPr lang="en-US" sz="1150" b="1" dirty="0">
-                <a:solidFill>
-                  <a:srgbClr val="FFFFFF"/>
-                </a:solidFill>
-                <a:latin typeface="Arial" pitchFamily="34" charset="0"/>
-                <a:ea typeface="Arial" pitchFamily="34" charset="-122"/>
-                <a:cs typeface="Arial" pitchFamily="34" charset="-120"/>
-              </a:rPr>
-              <a:t>CHAPTER 06</a:t>
-            </a:r>
-            <a:endParaRPr lang="en-US" sz="1150" dirty="0"/>
-          </a:p>
-        </p:txBody>
-      </p:sp>
       <p:pic>
         <p:nvPicPr>
-          <p:cNvPr id="7" name="Image 0" descr="/Users/danwahlin/.copilot/session-state/56a7a0da-def8-48d4-b5e8-0ac3878cb8dd/files/slides-build/icons/FaGithub-1F2328.png">
-            <a:hlinkClick r:id="rId2" tooltip="https://github.com/github/copilot-app-for-beginners/tree/main/06-canvases"/>
-          </p:cNvPr>
+          <p:cNvPr id="5" name="Image 0" descr="/Users/danwahlin/.copilot/session-state/56a7a0da-def8-48d4-b5e8-0ac3878cb8dd/files/slides-build/img/grad-corner.png">    </p:cNvPr>
           <p:cNvPicPr>
             <a:picLocks noChangeAspect="1"/>
           </p:cNvPicPr>
@@ -13766,6 +13565,103 @@
         </p:blipFill>
         <p:spPr>
           <a:xfrm>
+            <a:off x="6349901" y="0"/>
+            <a:ext cx="2793950" cy="1308050"/>
+          </a:xfrm>
+          <a:prstGeom prst="rect">
+            <a:avLst/>
+          </a:prstGeom>
+        </p:spPr>
+      </p:pic>
+      <p:sp>
+        <p:nvSpPr>
+          <p:cNvPr id="6" name="Text 3"/>
+          <p:cNvSpPr/>
+          <p:nvPr/>
+        </p:nvSpPr>
+        <p:spPr>
+          <a:xfrm>
+            <a:off x="7340501" y="177701"/>
+            <a:ext cx="1168301" cy="279350"/>
+          </a:xfrm>
+          <a:prstGeom prst="roundRect">
+            <a:avLst>
+              <a:gd name="adj" fmla="val 22731"/>
+            </a:avLst>
+          </a:prstGeom>
+          <a:solidFill>
+            <a:srgbClr val="1A7F37"/>
+          </a:solidFill>
+          <a:ln/>
+        </p:spPr>
+        <p:txBody>
+          <a:bodyPr wrap="square" rtlCol="0" anchor="ctr"/>
+          <a:lstStyle/>
+          <a:p>
+            <a:pPr indent="0" marL="0">
+              <a:buNone/>
+            </a:pPr>
+            <a:endParaRPr lang="en-US" dirty="0"/>
+          </a:p>
+        </p:txBody>
+      </p:sp>
+      <p:sp>
+        <p:nvSpPr>
+          <p:cNvPr id="7" name="Text 4"/>
+          <p:cNvSpPr/>
+          <p:nvPr/>
+        </p:nvSpPr>
+        <p:spPr>
+          <a:xfrm>
+            <a:off x="7461041" y="231577"/>
+            <a:ext cx="927071" cy="171450"/>
+          </a:xfrm>
+          <a:prstGeom prst="rect">
+            <a:avLst/>
+          </a:prstGeom>
+          <a:noFill/>
+          <a:ln/>
+        </p:spPr>
+        <p:txBody>
+          <a:bodyPr wrap="square" lIns="0" tIns="0" rIns="0" bIns="0" rtlCol="0" anchor="t"/>
+          <a:lstStyle/>
+          <a:p>
+            <a:pPr algn="ctr" indent="0" marL="0">
+              <a:buNone/>
+            </a:pPr>
+            <a:r>
+              <a:rPr lang="en-US" sz="1150" b="1" dirty="0">
+                <a:solidFill>
+                  <a:srgbClr val="FFFFFF"/>
+                </a:solidFill>
+                <a:latin typeface="Arial" pitchFamily="34" charset="0"/>
+                <a:ea typeface="Arial" pitchFamily="34" charset="-122"/>
+                <a:cs typeface="Arial" pitchFamily="34" charset="-120"/>
+              </a:rPr>
+              <a:t>CHAPTER 06</a:t>
+            </a:r>
+            <a:endParaRPr lang="en-US" sz="1150" dirty="0"/>
+          </a:p>
+        </p:txBody>
+      </p:sp>
+      <p:pic>
+        <p:nvPicPr>
+          <p:cNvPr id="8" name="Image 1" descr="/Users/danwahlin/.copilot/session-state/56a7a0da-def8-48d4-b5e8-0ac3878cb8dd/files/slides-build/icons/FaGithub-1F2328.png">
+            <a:hlinkClick r:id="rId3" tooltip="https://github.com/github/copilot-app-for-beginners/tree/main/06-canvases"/>
+          </p:cNvPr>
+          <p:cNvPicPr>
+            <a:picLocks noChangeAspect="1"/>
+          </p:cNvPicPr>
+          <p:nvPr/>
+        </p:nvPicPr>
+        <p:blipFill>
+          <a:blip r:embed="rId2"/>
+          <a:stretch>
+            <a:fillRect/>
+          </a:stretch>
+        </p:blipFill>
+        <p:spPr>
+          <a:xfrm>
             <a:off x="8610600" y="165050"/>
             <a:ext cx="304800" cy="304800"/>
           </a:xfrm>
@@ -13776,7 +13672,7 @@
       </p:pic>
       <p:sp>
         <p:nvSpPr>
-          <p:cNvPr id="8" name="Text 5"/>
+          <p:cNvPr id="9" name="Text 5"/>
           <p:cNvSpPr/>
           <p:nvPr/>
         </p:nvSpPr>
@@ -13815,7 +13711,7 @@
       </p:sp>
       <p:sp>
         <p:nvSpPr>
-          <p:cNvPr id="9" name="Text 6"/>
+          <p:cNvPr id="10" name="Text 6"/>
           <p:cNvSpPr/>
           <p:nvPr/>
         </p:nvSpPr>
@@ -13860,7 +13756,7 @@
       </p:sp>
       <p:sp>
         <p:nvSpPr>
-          <p:cNvPr id="10" name="Text 7"/>
+          <p:cNvPr id="11" name="Text 7"/>
           <p:cNvSpPr/>
           <p:nvPr/>
         </p:nvSpPr>
@@ -13892,7 +13788,7 @@
       </p:sp>
       <p:sp>
         <p:nvSpPr>
-          <p:cNvPr id="11" name="Text 8"/>
+          <p:cNvPr id="12" name="Text 8"/>
           <p:cNvSpPr/>
           <p:nvPr/>
         </p:nvSpPr>

--- a/slides/06-canvases.pptx
+++ b/slides/06-canvases.pptx
@@ -5461,12 +5461,12 @@
         </p:nvSpPr>
         <p:spPr>
           <a:xfrm>
-            <a:off x="511076" y="2151906"/>
-            <a:ext cx="8121551" cy="947291"/>
+            <a:off x="511076" y="2204591"/>
+            <a:ext cx="8121551" cy="841921"/>
           </a:xfrm>
           <a:prstGeom prst="roundRect">
             <a:avLst>
-              <a:gd name="adj" fmla="val 8044"/>
+              <a:gd name="adj" fmla="val 9051"/>
             </a:avLst>
           </a:prstGeom>
           <a:solidFill>
@@ -5512,8 +5512,8 @@
         </p:blipFill>
         <p:spPr>
           <a:xfrm>
-            <a:off x="558701" y="2199531"/>
-            <a:ext cx="8026301" cy="852041"/>
+            <a:off x="558701" y="2252216"/>
+            <a:ext cx="8026301" cy="746671"/>
           </a:xfrm>
           <a:prstGeom prst="rect">
             <a:avLst/>

--- a/slides/06-canvases.pptx
+++ b/slides/06-canvases.pptx
@@ -3311,12 +3311,12 @@
         </p:nvSpPr>
         <p:spPr>
           <a:xfrm>
-            <a:off x="3762226" y="1624905"/>
-            <a:ext cx="4870400" cy="2947541"/>
+            <a:off x="3762226" y="1973461"/>
+            <a:ext cx="4870400" cy="2250430"/>
           </a:xfrm>
           <a:prstGeom prst="roundRect">
             <a:avLst>
-              <a:gd name="adj" fmla="val 2585"/>
+              <a:gd name="adj" fmla="val 3386"/>
             </a:avLst>
           </a:prstGeom>
           <a:solidFill>
@@ -3362,8 +3362,8 @@
         </p:blipFill>
         <p:spPr>
           <a:xfrm>
-            <a:off x="3809851" y="1672530"/>
-            <a:ext cx="4775150" cy="2852291"/>
+            <a:off x="3809851" y="2021086"/>
+            <a:ext cx="4775150" cy="2155180"/>
           </a:xfrm>
           <a:prstGeom prst="rect">
             <a:avLst/>
@@ -4465,12 +4465,12 @@
         </p:nvSpPr>
         <p:spPr>
           <a:xfrm>
-            <a:off x="511076" y="1594693"/>
-            <a:ext cx="8121551" cy="1386780"/>
+            <a:off x="754261" y="1580108"/>
+            <a:ext cx="7635180" cy="1415951"/>
           </a:xfrm>
           <a:prstGeom prst="roundRect">
             <a:avLst>
-              <a:gd name="adj" fmla="val 5495"/>
+              <a:gd name="adj" fmla="val 5382"/>
             </a:avLst>
           </a:prstGeom>
           <a:solidFill>
@@ -4516,8 +4516,8 @@
         </p:blipFill>
         <p:spPr>
           <a:xfrm>
-            <a:off x="558701" y="1642318"/>
-            <a:ext cx="8026301" cy="1291530"/>
+            <a:off x="801886" y="1627733"/>
+            <a:ext cx="7539930" cy="1320701"/>
           </a:xfrm>
           <a:prstGeom prst="rect">
             <a:avLst/>
@@ -12018,12 +12018,12 @@
         </p:nvSpPr>
         <p:spPr>
           <a:xfrm>
-            <a:off x="511076" y="1920776"/>
-            <a:ext cx="4311551" cy="2305050"/>
+            <a:off x="511076" y="1923901"/>
+            <a:ext cx="4311551" cy="2298650"/>
           </a:xfrm>
           <a:prstGeom prst="roundRect">
             <a:avLst>
-              <a:gd name="adj" fmla="val 3306"/>
+              <a:gd name="adj" fmla="val 3315"/>
             </a:avLst>
           </a:prstGeom>
           <a:solidFill>
@@ -12069,8 +12069,8 @@
         </p:blipFill>
         <p:spPr>
           <a:xfrm>
-            <a:off x="558701" y="1968401"/>
-            <a:ext cx="4216301" cy="2209800"/>
+            <a:off x="558701" y="1971526"/>
+            <a:ext cx="4216301" cy="2203400"/>
           </a:xfrm>
           <a:prstGeom prst="rect">
             <a:avLst/>

--- a/slides/06-canvases.pptx
+++ b/slides/06-canvases.pptx
@@ -2123,7 +2123,7 @@
       </p:grpSpPr>
       <p:pic>
         <p:nvPicPr>
-          <p:cNvPr id="2" name="Image 0" descr="/Users/danwahlin/.copilot/session-state/56a7a0da-def8-48d4-b5e8-0ac3878cb8dd/files/slides-build/img/grad-title.jpg">    </p:cNvPr>
+          <p:cNvPr id="2" name="Image 0" descr="/Users/danwahlin/.copilot/session-state/56a7a0da-def8-48d4-b5e8-0ac3878cb8dd/files/slides-build/img/grad-title-pattern.jpg">    </p:cNvPr>
           <p:cNvPicPr>
             <a:picLocks noChangeAspect="1"/>
           </p:cNvPicPr>
@@ -2433,7 +2433,7 @@
       </p:grpSpPr>
       <p:pic>
         <p:nvPicPr>
-          <p:cNvPr id="2" name="Image 0" descr="/Users/danwahlin/.copilot/session-state/56a7a0da-def8-48d4-b5e8-0ac3878cb8dd/files/slides-build/img/grad-corner.png">    </p:cNvPr>
+          <p:cNvPr id="2" name="Image 0" descr="/Users/danwahlin/.copilot/session-state/56a7a0da-def8-48d4-b5e8-0ac3878cb8dd/files/slides-build/img/grad-corner-pattern.png">    </p:cNvPr>
           <p:cNvPicPr>
             <a:picLocks noChangeAspect="1"/>
           </p:cNvPicPr>
@@ -3404,7 +3404,7 @@
       </p:grpSpPr>
       <p:pic>
         <p:nvPicPr>
-          <p:cNvPr id="2" name="Image 0" descr="/Users/danwahlin/.copilot/session-state/56a7a0da-def8-48d4-b5e8-0ac3878cb8dd/files/slides-build/img/grad-corner.png">    </p:cNvPr>
+          <p:cNvPr id="2" name="Image 0" descr="/Users/danwahlin/.copilot/session-state/56a7a0da-def8-48d4-b5e8-0ac3878cb8dd/files/slides-build/img/grad-corner-pattern.png">    </p:cNvPr>
           <p:cNvPicPr>
             <a:picLocks noChangeAspect="1"/>
           </p:cNvPicPr>
@@ -4129,7 +4129,7 @@
       </p:grpSpPr>
       <p:pic>
         <p:nvPicPr>
-          <p:cNvPr id="2" name="Image 0" descr="/Users/danwahlin/.copilot/session-state/56a7a0da-def8-48d4-b5e8-0ac3878cb8dd/files/slides-build/img/grad-corner.png">    </p:cNvPr>
+          <p:cNvPr id="2" name="Image 0" descr="/Users/danwahlin/.copilot/session-state/56a7a0da-def8-48d4-b5e8-0ac3878cb8dd/files/slides-build/img/grad-corner-pattern.png">    </p:cNvPr>
           <p:cNvPicPr>
             <a:picLocks noChangeAspect="1"/>
           </p:cNvPicPr>
@@ -5165,7 +5165,7 @@
       </p:grpSpPr>
       <p:pic>
         <p:nvPicPr>
-          <p:cNvPr id="2" name="Image 0" descr="/Users/danwahlin/.copilot/session-state/56a7a0da-def8-48d4-b5e8-0ac3878cb8dd/files/slides-build/img/grad-corner.png">    </p:cNvPr>
+          <p:cNvPr id="2" name="Image 0" descr="/Users/danwahlin/.copilot/session-state/56a7a0da-def8-48d4-b5e8-0ac3878cb8dd/files/slides-build/img/grad-corner-pattern.png">    </p:cNvPr>
           <p:cNvPicPr>
             <a:picLocks noChangeAspect="1"/>
           </p:cNvPicPr>
@@ -5900,7 +5900,7 @@
       </p:grpSpPr>
       <p:pic>
         <p:nvPicPr>
-          <p:cNvPr id="2" name="Image 0" descr="/Users/danwahlin/.copilot/session-state/56a7a0da-def8-48d4-b5e8-0ac3878cb8dd/files/slides-build/img/grad-corner.png">    </p:cNvPr>
+          <p:cNvPr id="2" name="Image 0" descr="/Users/danwahlin/.copilot/session-state/56a7a0da-def8-48d4-b5e8-0ac3878cb8dd/files/slides-build/img/grad-corner-pattern.png">    </p:cNvPr>
           <p:cNvPicPr>
             <a:picLocks noChangeAspect="1"/>
           </p:cNvPicPr>
@@ -7213,7 +7213,7 @@
       </p:grpSpPr>
       <p:pic>
         <p:nvPicPr>
-          <p:cNvPr id="2" name="Image 0" descr="/Users/danwahlin/.copilot/session-state/56a7a0da-def8-48d4-b5e8-0ac3878cb8dd/files/slides-build/img/grad-corner.png">    </p:cNvPr>
+          <p:cNvPr id="2" name="Image 0" descr="/Users/danwahlin/.copilot/session-state/56a7a0da-def8-48d4-b5e8-0ac3878cb8dd/files/slides-build/img/grad-corner-pattern.png">    </p:cNvPr>
           <p:cNvPicPr>
             <a:picLocks noChangeAspect="1"/>
           </p:cNvPicPr>
@@ -8342,7 +8342,7 @@
       </p:grpSpPr>
       <p:pic>
         <p:nvPicPr>
-          <p:cNvPr id="2" name="Image 0" descr="/Users/danwahlin/.copilot/session-state/56a7a0da-def8-48d4-b5e8-0ac3878cb8dd/files/slides-build/img/grad-corner.png">    </p:cNvPr>
+          <p:cNvPr id="2" name="Image 0" descr="/Users/danwahlin/.copilot/session-state/56a7a0da-def8-48d4-b5e8-0ac3878cb8dd/files/slides-build/img/grad-corner-pattern.png">    </p:cNvPr>
           <p:cNvPicPr>
             <a:picLocks noChangeAspect="1"/>
           </p:cNvPicPr>
@@ -9413,7 +9413,7 @@
       </p:sp>
       <p:pic>
         <p:nvPicPr>
-          <p:cNvPr id="5" name="Image 0" descr="/Users/danwahlin/.copilot/session-state/56a7a0da-def8-48d4-b5e8-0ac3878cb8dd/files/slides-build/img/grad-corner.png">    </p:cNvPr>
+          <p:cNvPr id="5" name="Image 0" descr="/Users/danwahlin/.copilot/session-state/56a7a0da-def8-48d4-b5e8-0ac3878cb8dd/files/slides-build/img/grad-corner-pattern.png">    </p:cNvPr>
           <p:cNvPicPr>
             <a:picLocks noChangeAspect="1"/>
           </p:cNvPicPr>
@@ -9724,7 +9724,7 @@
       </p:grpSpPr>
       <p:pic>
         <p:nvPicPr>
-          <p:cNvPr id="2" name="Image 0" descr="/Users/danwahlin/.copilot/session-state/56a7a0da-def8-48d4-b5e8-0ac3878cb8dd/files/slides-build/img/grad-corner.png">    </p:cNvPr>
+          <p:cNvPr id="2" name="Image 0" descr="/Users/danwahlin/.copilot/session-state/56a7a0da-def8-48d4-b5e8-0ac3878cb8dd/files/slides-build/img/grad-corner-pattern.png">    </p:cNvPr>
           <p:cNvPicPr>
             <a:picLocks noChangeAspect="1"/>
           </p:cNvPicPr>
@@ -10544,7 +10544,7 @@
       </p:grpSpPr>
       <p:pic>
         <p:nvPicPr>
-          <p:cNvPr id="2" name="Image 0" descr="/Users/danwahlin/.copilot/session-state/56a7a0da-def8-48d4-b5e8-0ac3878cb8dd/files/slides-build/img/grad-corner.png">    </p:cNvPr>
+          <p:cNvPr id="2" name="Image 0" descr="/Users/danwahlin/.copilot/session-state/56a7a0da-def8-48d4-b5e8-0ac3878cb8dd/files/slides-build/img/grad-corner-pattern.png">    </p:cNvPr>
           <p:cNvPicPr>
             <a:picLocks noChangeAspect="1"/>
           </p:cNvPicPr>
@@ -11451,7 +11451,7 @@
       </p:sp>
       <p:pic>
         <p:nvPicPr>
-          <p:cNvPr id="5" name="Image 0" descr="/Users/danwahlin/.copilot/session-state/56a7a0da-def8-48d4-b5e8-0ac3878cb8dd/files/slides-build/img/grad-corner.png">    </p:cNvPr>
+          <p:cNvPr id="5" name="Image 0" descr="/Users/danwahlin/.copilot/session-state/56a7a0da-def8-48d4-b5e8-0ac3878cb8dd/files/slides-build/img/grad-corner-pattern.png">    </p:cNvPr>
           <p:cNvPicPr>
             <a:picLocks noChangeAspect="1"/>
           </p:cNvPicPr>
@@ -11762,7 +11762,7 @@
       </p:grpSpPr>
       <p:pic>
         <p:nvPicPr>
-          <p:cNvPr id="2" name="Image 0" descr="/Users/danwahlin/.copilot/session-state/56a7a0da-def8-48d4-b5e8-0ac3878cb8dd/files/slides-build/img/grad-corner.png">    </p:cNvPr>
+          <p:cNvPr id="2" name="Image 0" descr="/Users/danwahlin/.copilot/session-state/56a7a0da-def8-48d4-b5e8-0ac3878cb8dd/files/slides-build/img/grad-corner-pattern.png">    </p:cNvPr>
           <p:cNvPicPr>
             <a:picLocks noChangeAspect="1"/>
           </p:cNvPicPr>
@@ -12729,7 +12729,7 @@
       </p:grpSpPr>
       <p:pic>
         <p:nvPicPr>
-          <p:cNvPr id="2" name="Image 0" descr="/Users/danwahlin/.copilot/session-state/56a7a0da-def8-48d4-b5e8-0ac3878cb8dd/files/slides-build/img/grad-corner.png">    </p:cNvPr>
+          <p:cNvPr id="2" name="Image 0" descr="/Users/danwahlin/.copilot/session-state/56a7a0da-def8-48d4-b5e8-0ac3878cb8dd/files/slides-build/img/grad-corner-pattern.png">    </p:cNvPr>
           <p:cNvPicPr>
             <a:picLocks noChangeAspect="1"/>
           </p:cNvPicPr>
@@ -13551,7 +13551,7 @@
       </p:sp>
       <p:pic>
         <p:nvPicPr>
-          <p:cNvPr id="5" name="Image 0" descr="/Users/danwahlin/.copilot/session-state/56a7a0da-def8-48d4-b5e8-0ac3878cb8dd/files/slides-build/img/grad-corner.png">    </p:cNvPr>
+          <p:cNvPr id="5" name="Image 0" descr="/Users/danwahlin/.copilot/session-state/56a7a0da-def8-48d4-b5e8-0ac3878cb8dd/files/slides-build/img/grad-corner-pattern.png">    </p:cNvPr>
           <p:cNvPicPr>
             <a:picLocks noChangeAspect="1"/>
           </p:cNvPicPr>

--- a/slides/06-canvases.pptx
+++ b/slides/06-canvases.pptx
@@ -2123,7 +2123,13 @@
       </p:grpSpPr>
       <p:pic>
         <p:nvPicPr>
-          <p:cNvPr id="2" name="Image 0" descr="/Users/danwahlin/.copilot/session-state/56a7a0da-def8-48d4-b5e8-0ac3878cb8dd/files/slides-build/img/grad-title-pattern.jpg">    </p:cNvPr>
+          <p:cNvPr id="2" name="Image 0" descr="">
+            <a:extLst>
+              <a:ext uri="{C183D7F6-B498-43B3-948B-1728B52AA6E4}">
+                <adec:decorative xmlns:adec="http://schemas.microsoft.com/office/drawing/2017/decorative" val="1"/>
+              </a:ext>
+            </a:extLst>
+          </p:cNvPr>
           <p:cNvPicPr>
             <a:picLocks noChangeAspect="1"/>
           </p:cNvPicPr>
@@ -2147,7 +2153,7 @@
       </p:pic>
       <p:pic>
         <p:nvPicPr>
-          <p:cNvPr id="3" name="Image 1" descr="/Users/danwahlin/.copilot/session-state/56a7a0da-def8-48d4-b5e8-0ac3878cb8dd/files/slides-build/icons/FaGithub-1F2328.png">
+          <p:cNvPr id="3" name="Image 1" descr="Open this chapter on GitHub">
             <a:hlinkClick r:id="rId3" tooltip="https://github.com/github/copilot-app-for-beginners/tree/main/06-canvases"/>
           </p:cNvPr>
           <p:cNvPicPr>
@@ -2331,7 +2337,13 @@
       </p:sp>
       <p:pic>
         <p:nvPicPr>
-          <p:cNvPr id="8" name="Image 2" descr="/Users/danwahlin/.copilot/session-state/56a7a0da-def8-48d4-b5e8-0ac3878cb8dd/files/slides-build/icons/FaGithub-0969DA.png">    </p:cNvPr>
+          <p:cNvPr id="8" name="Image 2" descr="">
+            <a:extLst>
+              <a:ext uri="{C183D7F6-B498-43B3-948B-1728B52AA6E4}">
+                <adec:decorative xmlns:adec="http://schemas.microsoft.com/office/drawing/2017/decorative" val="1"/>
+              </a:ext>
+            </a:extLst>
+          </p:cNvPr>
           <p:cNvPicPr>
             <a:picLocks noChangeAspect="1"/>
           </p:cNvPicPr>
@@ -2433,7 +2445,13 @@
       </p:grpSpPr>
       <p:pic>
         <p:nvPicPr>
-          <p:cNvPr id="2" name="Image 0" descr="/Users/danwahlin/.copilot/session-state/56a7a0da-def8-48d4-b5e8-0ac3878cb8dd/files/slides-build/img/grad-corner-pattern.png">    </p:cNvPr>
+          <p:cNvPr id="2" name="Image 0" descr="">
+            <a:extLst>
+              <a:ext uri="{C183D7F6-B498-43B3-948B-1728B52AA6E4}">
+                <adec:decorative xmlns:adec="http://schemas.microsoft.com/office/drawing/2017/decorative" val="1"/>
+              </a:ext>
+            </a:extLst>
+          </p:cNvPr>
           <p:cNvPicPr>
             <a:picLocks noChangeAspect="1"/>
           </p:cNvPicPr>
@@ -2528,7 +2546,7 @@
       </p:sp>
       <p:pic>
         <p:nvPicPr>
-          <p:cNvPr id="5" name="Image 1" descr="/Users/danwahlin/.copilot/session-state/56a7a0da-def8-48d4-b5e8-0ac3878cb8dd/files/slides-build/icons/FaGithub-1F2328.png">
+          <p:cNvPr id="5" name="Image 1" descr="Open this chapter on GitHub">
             <a:hlinkClick r:id="rId3" tooltip="https://github.com/github/copilot-app-for-beginners/tree/main/06-canvases"/>
           </p:cNvPr>
           <p:cNvPicPr>
@@ -2755,7 +2773,13 @@
       </p:sp>
       <p:pic>
         <p:nvPicPr>
-          <p:cNvPr id="10" name="Image 2" descr="/Users/danwahlin/.copilot/session-state/56a7a0da-def8-48d4-b5e8-0ac3878cb8dd/files/slides-build/icons/GoMilestone-1A7F37.png">    </p:cNvPr>
+          <p:cNvPr id="10" name="Image 2" descr="">
+            <a:extLst>
+              <a:ext uri="{C183D7F6-B498-43B3-948B-1728B52AA6E4}">
+                <adec:decorative xmlns:adec="http://schemas.microsoft.com/office/drawing/2017/decorative" val="1"/>
+              </a:ext>
+            </a:extLst>
+          </p:cNvPr>
           <p:cNvPicPr>
             <a:picLocks noChangeAspect="1"/>
           </p:cNvPicPr>
@@ -2892,7 +2916,13 @@
       </p:sp>
       <p:pic>
         <p:nvPicPr>
-          <p:cNvPr id="14" name="Image 3" descr="/Users/danwahlin/.copilot/session-state/56a7a0da-def8-48d4-b5e8-0ac3878cb8dd/files/slides-build/icons/GoPencil-1A7F37.png">    </p:cNvPr>
+          <p:cNvPr id="14" name="Image 3" descr="">
+            <a:extLst>
+              <a:ext uri="{C183D7F6-B498-43B3-948B-1728B52AA6E4}">
+                <adec:decorative xmlns:adec="http://schemas.microsoft.com/office/drawing/2017/decorative" val="1"/>
+              </a:ext>
+            </a:extLst>
+          </p:cNvPr>
           <p:cNvPicPr>
             <a:picLocks noChangeAspect="1"/>
           </p:cNvPicPr>
@@ -3063,7 +3093,13 @@
       </p:sp>
       <p:pic>
         <p:nvPicPr>
-          <p:cNvPr id="18" name="Image 4" descr="/Users/danwahlin/.copilot/session-state/56a7a0da-def8-48d4-b5e8-0ac3878cb8dd/files/slides-build/icons/GoPlay-1A7F37.png">    </p:cNvPr>
+          <p:cNvPr id="18" name="Image 4" descr="">
+            <a:extLst>
+              <a:ext uri="{C183D7F6-B498-43B3-948B-1728B52AA6E4}">
+                <adec:decorative xmlns:adec="http://schemas.microsoft.com/office/drawing/2017/decorative" val="1"/>
+              </a:ext>
+            </a:extLst>
+          </p:cNvPr>
           <p:cNvPicPr>
             <a:picLocks noChangeAspect="1"/>
           </p:cNvPicPr>
@@ -3200,7 +3236,13 @@
       </p:sp>
       <p:pic>
         <p:nvPicPr>
-          <p:cNvPr id="22" name="Image 5" descr="/Users/danwahlin/.copilot/session-state/56a7a0da-def8-48d4-b5e8-0ac3878cb8dd/files/slides-build/icons/GoTasklist-1A7F37.png">    </p:cNvPr>
+          <p:cNvPr id="22" name="Image 5" descr="">
+            <a:extLst>
+              <a:ext uri="{C183D7F6-B498-43B3-948B-1728B52AA6E4}">
+                <adec:decorative xmlns:adec="http://schemas.microsoft.com/office/drawing/2017/decorative" val="1"/>
+              </a:ext>
+            </a:extLst>
+          </p:cNvPr>
           <p:cNvPicPr>
             <a:picLocks noChangeAspect="1"/>
           </p:cNvPicPr>
@@ -3348,7 +3390,7 @@
       </p:sp>
       <p:pic>
         <p:nvPicPr>
-          <p:cNvPr id="26" name="Image 6" descr="/Users/danwahlin/.copilot/session-state/56a7a0da-def8-48d4-b5e8-0ac3878cb8dd/files/slides-build/img/06-workbench-crop.png">    </p:cNvPr>
+          <p:cNvPr id="26" name="Image 6" descr="Feature Workbench canvas in the side panel with five stages, a feature proposal field, actions, a checklist, and an empty evidence area">    </p:cNvPr>
           <p:cNvPicPr>
             <a:picLocks noChangeAspect="1"/>
           </p:cNvPicPr>
@@ -3404,7 +3446,13 @@
       </p:grpSpPr>
       <p:pic>
         <p:nvPicPr>
-          <p:cNvPr id="2" name="Image 0" descr="/Users/danwahlin/.copilot/session-state/56a7a0da-def8-48d4-b5e8-0ac3878cb8dd/files/slides-build/img/grad-corner-pattern.png">    </p:cNvPr>
+          <p:cNvPr id="2" name="Image 0" descr="">
+            <a:extLst>
+              <a:ext uri="{C183D7F6-B498-43B3-948B-1728B52AA6E4}">
+                <adec:decorative xmlns:adec="http://schemas.microsoft.com/office/drawing/2017/decorative" val="1"/>
+              </a:ext>
+            </a:extLst>
+          </p:cNvPr>
           <p:cNvPicPr>
             <a:picLocks noChangeAspect="1"/>
           </p:cNvPicPr>
@@ -3499,7 +3547,7 @@
       </p:sp>
       <p:pic>
         <p:nvPicPr>
-          <p:cNvPr id="5" name="Image 1" descr="/Users/danwahlin/.copilot/session-state/56a7a0da-def8-48d4-b5e8-0ac3878cb8dd/files/slides-build/icons/FaGithub-1F2328.png">
+          <p:cNvPr id="5" name="Image 1" descr="Open this chapter on GitHub">
             <a:hlinkClick r:id="rId3" tooltip="https://github.com/github/copilot-app-for-beginners/tree/main/06-canvases"/>
           </p:cNvPr>
           <p:cNvPicPr>
@@ -3808,7 +3856,7 @@
       </p:sp>
       <p:pic>
         <p:nvPicPr>
-          <p:cNvPr id="12" name="Image 2" descr="/Users/danwahlin/.copilot/session-state/56a7a0da-def8-48d4-b5e8-0ac3878cb8dd/files/slides-build/img/06-plan-crop.png">    </p:cNvPr>
+          <p:cNvPr id="12" name="Image 2" descr="Feature Workbench with the Propose and Plan stages complete and the status Approved">    </p:cNvPr>
           <p:cNvPicPr>
             <a:picLocks noChangeAspect="1"/>
           </p:cNvPicPr>
@@ -3946,7 +3994,7 @@
       </p:sp>
       <p:pic>
         <p:nvPicPr>
-          <p:cNvPr id="16" name="Image 3" descr="/Users/danwahlin/.copilot/session-state/56a7a0da-def8-48d4-b5e8-0ac3878cb8dd/files/slides-build/img/06-baseline-ev-crop.png">    </p:cNvPr>
+          <p:cNvPr id="16" name="Image 3" descr="Expanded npm test output with 4 passed tests, next to the Feature Workbench Baseline evidence of 4/4 tests and a passing build">    </p:cNvPr>
           <p:cNvPicPr>
             <a:picLocks noChangeAspect="1"/>
           </p:cNvPicPr>
@@ -4129,7 +4177,13 @@
       </p:grpSpPr>
       <p:pic>
         <p:nvPicPr>
-          <p:cNvPr id="2" name="Image 0" descr="/Users/danwahlin/.copilot/session-state/56a7a0da-def8-48d4-b5e8-0ac3878cb8dd/files/slides-build/img/grad-corner-pattern.png">    </p:cNvPr>
+          <p:cNvPr id="2" name="Image 0" descr="">
+            <a:extLst>
+              <a:ext uri="{C183D7F6-B498-43B3-948B-1728B52AA6E4}">
+                <adec:decorative xmlns:adec="http://schemas.microsoft.com/office/drawing/2017/decorative" val="1"/>
+              </a:ext>
+            </a:extLst>
+          </p:cNvPr>
           <p:cNvPicPr>
             <a:picLocks noChangeAspect="1"/>
           </p:cNvPicPr>
@@ -4224,7 +4278,7 @@
       </p:sp>
       <p:pic>
         <p:nvPicPr>
-          <p:cNvPr id="5" name="Image 1" descr="/Users/danwahlin/.copilot/session-state/56a7a0da-def8-48d4-b5e8-0ac3878cb8dd/files/slides-build/icons/FaGithub-1F2328.png">
+          <p:cNvPr id="5" name="Image 1" descr="Open this chapter on GitHub">
             <a:hlinkClick r:id="rId3" tooltip="https://github.com/github/copilot-app-for-beginners/tree/main/06-canvases"/>
           </p:cNvPr>
           <p:cNvPicPr>
@@ -4502,7 +4556,7 @@
       </p:sp>
       <p:pic>
         <p:nvPicPr>
-          <p:cNvPr id="10" name="Image 2" descr="/Users/danwahlin/.copilot/session-state/56a7a0da-def8-48d4-b5e8-0ac3878cb8dd/files/slides-build/img/06-implement-crop.png">    </p:cNvPr>
+          <p:cNvPr id="10" name="Image 2" descr="Feature Workbench with the Implement stage complete and a Diff row in the evidence, next to the Changes pill above the prompt box">    </p:cNvPr>
           <p:cNvPicPr>
             <a:picLocks noChangeAspect="1"/>
           </p:cNvPicPr>
@@ -5033,7 +5087,13 @@
       </p:sp>
       <p:pic>
         <p:nvPicPr>
-          <p:cNvPr id="25" name="Image 3" descr="/Users/danwahlin/.copilot/session-state/56a7a0da-def8-48d4-b5e8-0ac3878cb8dd/files/slides-build/icons/GoFileDiff-8250DF.png">    </p:cNvPr>
+          <p:cNvPr id="25" name="Image 3" descr="">
+            <a:extLst>
+              <a:ext uri="{C183D7F6-B498-43B3-948B-1728B52AA6E4}">
+                <adec:decorative xmlns:adec="http://schemas.microsoft.com/office/drawing/2017/decorative" val="1"/>
+              </a:ext>
+            </a:extLst>
+          </p:cNvPr>
           <p:cNvPicPr>
             <a:picLocks noChangeAspect="1"/>
           </p:cNvPicPr>
@@ -5165,7 +5225,13 @@
       </p:grpSpPr>
       <p:pic>
         <p:nvPicPr>
-          <p:cNvPr id="2" name="Image 0" descr="/Users/danwahlin/.copilot/session-state/56a7a0da-def8-48d4-b5e8-0ac3878cb8dd/files/slides-build/img/grad-corner-pattern.png">    </p:cNvPr>
+          <p:cNvPr id="2" name="Image 0" descr="">
+            <a:extLst>
+              <a:ext uri="{C183D7F6-B498-43B3-948B-1728B52AA6E4}">
+                <adec:decorative xmlns:adec="http://schemas.microsoft.com/office/drawing/2017/decorative" val="1"/>
+              </a:ext>
+            </a:extLst>
+          </p:cNvPr>
           <p:cNvPicPr>
             <a:picLocks noChangeAspect="1"/>
           </p:cNvPicPr>
@@ -5260,7 +5326,7 @@
       </p:sp>
       <p:pic>
         <p:nvPicPr>
-          <p:cNvPr id="5" name="Image 1" descr="/Users/danwahlin/.copilot/session-state/56a7a0da-def8-48d4-b5e8-0ac3878cb8dd/files/slides-build/icons/FaGithub-1F2328.png">
+          <p:cNvPr id="5" name="Image 1" descr="Open this chapter on GitHub">
             <a:hlinkClick r:id="rId3" tooltip="https://github.com/github/copilot-app-for-beginners/tree/main/06-canvases"/>
           </p:cNvPr>
           <p:cNvPicPr>
@@ -5498,7 +5564,7 @@
       </p:sp>
       <p:pic>
         <p:nvPicPr>
-          <p:cNvPr id="10" name="Image 2" descr="/Users/danwahlin/.copilot/session-state/56a7a0da-def8-48d4-b5e8-0ac3878cb8dd/files/slides-build/img/06-validate-crop.png">    </p:cNvPr>
+          <p:cNvPr id="10" name="Image 2" descr="Feature Workbench with all five stages complete, and evidence that shows 4 baseline tests and 9 final tests">    </p:cNvPr>
           <p:cNvPicPr>
             <a:picLocks noChangeAspect="1"/>
           </p:cNvPicPr>
@@ -5900,7 +5966,13 @@
       </p:grpSpPr>
       <p:pic>
         <p:nvPicPr>
-          <p:cNvPr id="2" name="Image 0" descr="/Users/danwahlin/.copilot/session-state/56a7a0da-def8-48d4-b5e8-0ac3878cb8dd/files/slides-build/img/grad-corner-pattern.png">    </p:cNvPr>
+          <p:cNvPr id="2" name="Image 0" descr="">
+            <a:extLst>
+              <a:ext uri="{C183D7F6-B498-43B3-948B-1728B52AA6E4}">
+                <adec:decorative xmlns:adec="http://schemas.microsoft.com/office/drawing/2017/decorative" val="1"/>
+              </a:ext>
+            </a:extLst>
+          </p:cNvPr>
           <p:cNvPicPr>
             <a:picLocks noChangeAspect="1"/>
           </p:cNvPicPr>
@@ -5995,7 +6067,7 @@
       </p:sp>
       <p:pic>
         <p:nvPicPr>
-          <p:cNvPr id="5" name="Image 1" descr="/Users/danwahlin/.copilot/session-state/56a7a0da-def8-48d4-b5e8-0ac3878cb8dd/files/slides-build/icons/FaGithub-1F2328.png">
+          <p:cNvPr id="5" name="Image 1" descr="Open this chapter on GitHub">
             <a:hlinkClick r:id="rId3" tooltip="https://github.com/github/copilot-app-for-beginners/tree/main/06-canvases"/>
           </p:cNvPr>
           <p:cNvPicPr>
@@ -6863,7 +6935,13 @@
       </p:sp>
       <p:pic>
         <p:nvPicPr>
-          <p:cNvPr id="28" name="Image 2" descr="/Users/danwahlin/.copilot/session-state/56a7a0da-def8-48d4-b5e8-0ac3878cb8dd/files/slides-build/icons/GoGoal-BC4C00.png">    </p:cNvPr>
+          <p:cNvPr id="28" name="Image 2" descr="">
+            <a:extLst>
+              <a:ext uri="{C183D7F6-B498-43B3-948B-1728B52AA6E4}">
+                <adec:decorative xmlns:adec="http://schemas.microsoft.com/office/drawing/2017/decorative" val="1"/>
+              </a:ext>
+            </a:extLst>
+          </p:cNvPr>
           <p:cNvPicPr>
             <a:picLocks noChangeAspect="1"/>
           </p:cNvPicPr>
@@ -7073,7 +7151,13 @@
       </p:sp>
       <p:pic>
         <p:nvPicPr>
-          <p:cNvPr id="33" name="Image 3" descr="/Users/danwahlin/.copilot/session-state/56a7a0da-def8-48d4-b5e8-0ac3878cb8dd/files/slides-build/icons/FaGithub-59636E.png">    </p:cNvPr>
+          <p:cNvPr id="33" name="Image 3" descr="">
+            <a:extLst>
+              <a:ext uri="{C183D7F6-B498-43B3-948B-1728B52AA6E4}">
+                <adec:decorative xmlns:adec="http://schemas.microsoft.com/office/drawing/2017/decorative" val="1"/>
+              </a:ext>
+            </a:extLst>
+          </p:cNvPr>
           <p:cNvPicPr>
             <a:picLocks noChangeAspect="1"/>
           </p:cNvPicPr>
@@ -7213,7 +7297,13 @@
       </p:grpSpPr>
       <p:pic>
         <p:nvPicPr>
-          <p:cNvPr id="2" name="Image 0" descr="/Users/danwahlin/.copilot/session-state/56a7a0da-def8-48d4-b5e8-0ac3878cb8dd/files/slides-build/img/grad-corner-pattern.png">    </p:cNvPr>
+          <p:cNvPr id="2" name="Image 0" descr="">
+            <a:extLst>
+              <a:ext uri="{C183D7F6-B498-43B3-948B-1728B52AA6E4}">
+                <adec:decorative xmlns:adec="http://schemas.microsoft.com/office/drawing/2017/decorative" val="1"/>
+              </a:ext>
+            </a:extLst>
+          </p:cNvPr>
           <p:cNvPicPr>
             <a:picLocks noChangeAspect="1"/>
           </p:cNvPicPr>
@@ -7308,7 +7398,7 @@
       </p:sp>
       <p:pic>
         <p:nvPicPr>
-          <p:cNvPr id="5" name="Image 1" descr="/Users/danwahlin/.copilot/session-state/56a7a0da-def8-48d4-b5e8-0ac3878cb8dd/files/slides-build/icons/FaGithub-1F2328.png">
+          <p:cNvPr id="5" name="Image 1" descr="Open this chapter on GitHub">
             <a:hlinkClick r:id="rId3" tooltip="https://github.com/github/copilot-app-for-beginners/tree/main/06-canvases"/>
           </p:cNvPr>
           <p:cNvPicPr>
@@ -8116,7 +8206,13 @@
       </p:sp>
       <p:pic>
         <p:nvPicPr>
-          <p:cNvPr id="26" name="Image 2" descr="/Users/danwahlin/.copilot/session-state/56a7a0da-def8-48d4-b5e8-0ac3878cb8dd/files/slides-build/icons/FaGithub-0969DA.png">    </p:cNvPr>
+          <p:cNvPr id="26" name="Image 2" descr="">
+            <a:extLst>
+              <a:ext uri="{C183D7F6-B498-43B3-948B-1728B52AA6E4}">
+                <adec:decorative xmlns:adec="http://schemas.microsoft.com/office/drawing/2017/decorative" val="1"/>
+              </a:ext>
+            </a:extLst>
+          </p:cNvPr>
           <p:cNvPicPr>
             <a:picLocks noChangeAspect="1"/>
           </p:cNvPicPr>
@@ -8342,7 +8438,13 @@
       </p:grpSpPr>
       <p:pic>
         <p:nvPicPr>
-          <p:cNvPr id="2" name="Image 0" descr="/Users/danwahlin/.copilot/session-state/56a7a0da-def8-48d4-b5e8-0ac3878cb8dd/files/slides-build/img/grad-corner-pattern.png">    </p:cNvPr>
+          <p:cNvPr id="2" name="Image 0" descr="">
+            <a:extLst>
+              <a:ext uri="{C183D7F6-B498-43B3-948B-1728B52AA6E4}">
+                <adec:decorative xmlns:adec="http://schemas.microsoft.com/office/drawing/2017/decorative" val="1"/>
+              </a:ext>
+            </a:extLst>
+          </p:cNvPr>
           <p:cNvPicPr>
             <a:picLocks noChangeAspect="1"/>
           </p:cNvPicPr>
@@ -8437,7 +8539,7 @@
       </p:sp>
       <p:pic>
         <p:nvPicPr>
-          <p:cNvPr id="5" name="Image 1" descr="/Users/danwahlin/.copilot/session-state/56a7a0da-def8-48d4-b5e8-0ac3878cb8dd/files/slides-build/icons/FaGithub-1F2328.png">
+          <p:cNvPr id="5" name="Image 1" descr="Open this chapter on GitHub">
             <a:hlinkClick r:id="rId3" tooltip="https://github.com/github/copilot-app-for-beginners/tree/main/06-canvases"/>
           </p:cNvPr>
           <p:cNvPicPr>
@@ -9413,7 +9515,13 @@
       </p:sp>
       <p:pic>
         <p:nvPicPr>
-          <p:cNvPr id="5" name="Image 0" descr="/Users/danwahlin/.copilot/session-state/56a7a0da-def8-48d4-b5e8-0ac3878cb8dd/files/slides-build/img/grad-corner-pattern.png">    </p:cNvPr>
+          <p:cNvPr id="5" name="Image 0" descr="">
+            <a:extLst>
+              <a:ext uri="{C183D7F6-B498-43B3-948B-1728B52AA6E4}">
+                <adec:decorative xmlns:adec="http://schemas.microsoft.com/office/drawing/2017/decorative" val="1"/>
+              </a:ext>
+            </a:extLst>
+          </p:cNvPr>
           <p:cNvPicPr>
             <a:picLocks noChangeAspect="1"/>
           </p:cNvPicPr>
@@ -9508,7 +9616,7 @@
       </p:sp>
       <p:pic>
         <p:nvPicPr>
-          <p:cNvPr id="8" name="Image 1" descr="/Users/danwahlin/.copilot/session-state/56a7a0da-def8-48d4-b5e8-0ac3878cb8dd/files/slides-build/icons/FaGithub-1F2328.png">
+          <p:cNvPr id="8" name="Image 1" descr="Open this chapter on GitHub">
             <a:hlinkClick r:id="rId3" tooltip="https://github.com/github/copilot-app-for-beginners/tree/main/06-canvases"/>
           </p:cNvPr>
           <p:cNvPicPr>
@@ -9724,7 +9832,13 @@
       </p:grpSpPr>
       <p:pic>
         <p:nvPicPr>
-          <p:cNvPr id="2" name="Image 0" descr="/Users/danwahlin/.copilot/session-state/56a7a0da-def8-48d4-b5e8-0ac3878cb8dd/files/slides-build/img/grad-corner-pattern.png">    </p:cNvPr>
+          <p:cNvPr id="2" name="Image 0" descr="">
+            <a:extLst>
+              <a:ext uri="{C183D7F6-B498-43B3-948B-1728B52AA6E4}">
+                <adec:decorative xmlns:adec="http://schemas.microsoft.com/office/drawing/2017/decorative" val="1"/>
+              </a:ext>
+            </a:extLst>
+          </p:cNvPr>
           <p:cNvPicPr>
             <a:picLocks noChangeAspect="1"/>
           </p:cNvPicPr>
@@ -9819,7 +9933,7 @@
       </p:sp>
       <p:pic>
         <p:nvPicPr>
-          <p:cNvPr id="5" name="Image 1" descr="/Users/danwahlin/.copilot/session-state/56a7a0da-def8-48d4-b5e8-0ac3878cb8dd/files/slides-build/icons/FaGithub-1F2328.png">
+          <p:cNvPr id="5" name="Image 1" descr="Open this chapter on GitHub">
             <a:hlinkClick r:id="rId3" tooltip="https://github.com/github/copilot-app-for-beginners/tree/main/06-canvases"/>
           </p:cNvPr>
           <p:cNvPicPr>
@@ -10017,7 +10131,7 @@
       </p:sp>
       <p:pic>
         <p:nvPicPr>
-          <p:cNvPr id="10" name="Image 2" descr="/Users/danwahlin/.copilot/session-state/56a7a0da-def8-48d4-b5e8-0ac3878cb8dd/files/slides-build/img/06-arrangement-board-canvas.jpg">    </p:cNvPr>
+          <p:cNvPr id="10" name="Image 2" descr="Arrangement board analogy for canvases">    </p:cNvPr>
           <p:cNvPicPr>
             <a:picLocks noChangeAspect="1"/>
           </p:cNvPicPr>
@@ -10544,7 +10658,13 @@
       </p:grpSpPr>
       <p:pic>
         <p:nvPicPr>
-          <p:cNvPr id="2" name="Image 0" descr="/Users/danwahlin/.copilot/session-state/56a7a0da-def8-48d4-b5e8-0ac3878cb8dd/files/slides-build/img/grad-corner-pattern.png">    </p:cNvPr>
+          <p:cNvPr id="2" name="Image 0" descr="">
+            <a:extLst>
+              <a:ext uri="{C183D7F6-B498-43B3-948B-1728B52AA6E4}">
+                <adec:decorative xmlns:adec="http://schemas.microsoft.com/office/drawing/2017/decorative" val="1"/>
+              </a:ext>
+            </a:extLst>
+          </p:cNvPr>
           <p:cNvPicPr>
             <a:picLocks noChangeAspect="1"/>
           </p:cNvPicPr>
@@ -10639,7 +10759,7 @@
       </p:sp>
       <p:pic>
         <p:nvPicPr>
-          <p:cNvPr id="5" name="Image 1" descr="/Users/danwahlin/.copilot/session-state/56a7a0da-def8-48d4-b5e8-0ac3878cb8dd/files/slides-build/icons/FaGithub-1F2328.png">
+          <p:cNvPr id="5" name="Image 1" descr="Open this chapter on GitHub">
             <a:hlinkClick r:id="rId3" tooltip="https://github.com/github/copilot-app-for-beginners/tree/main/06-canvases"/>
           </p:cNvPr>
           <p:cNvPicPr>
@@ -10837,7 +10957,7 @@
       </p:sp>
       <p:pic>
         <p:nvPicPr>
-          <p:cNvPr id="10" name="Image 2" descr="/Users/danwahlin/.copilot/session-state/56a7a0da-def8-48d4-b5e8-0ac3878cb8dd/files/slides-build/img/06-human-agent-shared-surface.jpg">    </p:cNvPr>
+          <p:cNvPr id="10" name="Image 2" descr="You and the agent share one canvas. You use UI controls, the agent uses actions such as get, add, and move, and both sides can change the same board.">    </p:cNvPr>
           <p:cNvPicPr>
             <a:picLocks noChangeAspect="1"/>
           </p:cNvPicPr>
@@ -11451,7 +11571,13 @@
       </p:sp>
       <p:pic>
         <p:nvPicPr>
-          <p:cNvPr id="5" name="Image 0" descr="/Users/danwahlin/.copilot/session-state/56a7a0da-def8-48d4-b5e8-0ac3878cb8dd/files/slides-build/img/grad-corner-pattern.png">    </p:cNvPr>
+          <p:cNvPr id="5" name="Image 0" descr="">
+            <a:extLst>
+              <a:ext uri="{C183D7F6-B498-43B3-948B-1728B52AA6E4}">
+                <adec:decorative xmlns:adec="http://schemas.microsoft.com/office/drawing/2017/decorative" val="1"/>
+              </a:ext>
+            </a:extLst>
+          </p:cNvPr>
           <p:cNvPicPr>
             <a:picLocks noChangeAspect="1"/>
           </p:cNvPicPr>
@@ -11546,7 +11672,7 @@
       </p:sp>
       <p:pic>
         <p:nvPicPr>
-          <p:cNvPr id="8" name="Image 1" descr="/Users/danwahlin/.copilot/session-state/56a7a0da-def8-48d4-b5e8-0ac3878cb8dd/files/slides-build/icons/FaGithub-1F2328.png">
+          <p:cNvPr id="8" name="Image 1" descr="Open this chapter on GitHub">
             <a:hlinkClick r:id="rId3" tooltip="https://github.com/github/copilot-app-for-beginners/tree/main/06-canvases"/>
           </p:cNvPr>
           <p:cNvPicPr>
@@ -11762,7 +11888,13 @@
       </p:grpSpPr>
       <p:pic>
         <p:nvPicPr>
-          <p:cNvPr id="2" name="Image 0" descr="/Users/danwahlin/.copilot/session-state/56a7a0da-def8-48d4-b5e8-0ac3878cb8dd/files/slides-build/img/grad-corner-pattern.png">    </p:cNvPr>
+          <p:cNvPr id="2" name="Image 0" descr="">
+            <a:extLst>
+              <a:ext uri="{C183D7F6-B498-43B3-948B-1728B52AA6E4}">
+                <adec:decorative xmlns:adec="http://schemas.microsoft.com/office/drawing/2017/decorative" val="1"/>
+              </a:ext>
+            </a:extLst>
+          </p:cNvPr>
           <p:cNvPicPr>
             <a:picLocks noChangeAspect="1"/>
           </p:cNvPicPr>
@@ -11857,7 +11989,7 @@
       </p:sp>
       <p:pic>
         <p:nvPicPr>
-          <p:cNvPr id="5" name="Image 1" descr="/Users/danwahlin/.copilot/session-state/56a7a0da-def8-48d4-b5e8-0ac3878cb8dd/files/slides-build/icons/FaGithub-1F2328.png">
+          <p:cNvPr id="5" name="Image 1" descr="Open this chapter on GitHub">
             <a:hlinkClick r:id="rId3" tooltip="https://github.com/github/copilot-app-for-beginners/tree/main/06-canvases"/>
           </p:cNvPr>
           <p:cNvPicPr>
@@ -12055,7 +12187,7 @@
       </p:sp>
       <p:pic>
         <p:nvPicPr>
-          <p:cNvPr id="10" name="Image 2" descr="/Users/danwahlin/.copilot/session-state/56a7a0da-def8-48d4-b5e8-0ac3878cb8dd/files/slides-build/img/06-kanban-crop.png">    </p:cNvPr>
+          <p:cNvPr id="10" name="Image 2" descr="Repository Issues Kanban preview">    </p:cNvPr>
           <p:cNvPicPr>
             <a:picLocks noChangeAspect="1"/>
           </p:cNvPicPr>
@@ -12729,7 +12861,13 @@
       </p:grpSpPr>
       <p:pic>
         <p:nvPicPr>
-          <p:cNvPr id="2" name="Image 0" descr="/Users/danwahlin/.copilot/session-state/56a7a0da-def8-48d4-b5e8-0ac3878cb8dd/files/slides-build/img/grad-corner-pattern.png">    </p:cNvPr>
+          <p:cNvPr id="2" name="Image 0" descr="">
+            <a:extLst>
+              <a:ext uri="{C183D7F6-B498-43B3-948B-1728B52AA6E4}">
+                <adec:decorative xmlns:adec="http://schemas.microsoft.com/office/drawing/2017/decorative" val="1"/>
+              </a:ext>
+            </a:extLst>
+          </p:cNvPr>
           <p:cNvPicPr>
             <a:picLocks noChangeAspect="1"/>
           </p:cNvPicPr>
@@ -12824,7 +12962,7 @@
       </p:sp>
       <p:pic>
         <p:nvPicPr>
-          <p:cNvPr id="5" name="Image 1" descr="/Users/danwahlin/.copilot/session-state/56a7a0da-def8-48d4-b5e8-0ac3878cb8dd/files/slides-build/icons/FaGithub-1F2328.png">
+          <p:cNvPr id="5" name="Image 1" descr="Open this chapter on GitHub">
             <a:hlinkClick r:id="rId3" tooltip="https://github.com/github/copilot-app-for-beginners/tree/main/06-canvases"/>
           </p:cNvPr>
           <p:cNvPicPr>
@@ -13143,7 +13281,13 @@
       </p:sp>
       <p:pic>
         <p:nvPicPr>
-          <p:cNvPr id="14" name="Image 2" descr="/Users/danwahlin/.copilot/session-state/56a7a0da-def8-48d4-b5e8-0ac3878cb8dd/files/slides-build/icons/GoCopilot-8250DF.png">    </p:cNvPr>
+          <p:cNvPr id="14" name="Image 2" descr="">
+            <a:extLst>
+              <a:ext uri="{C183D7F6-B498-43B3-948B-1728B52AA6E4}">
+                <adec:decorative xmlns:adec="http://schemas.microsoft.com/office/drawing/2017/decorative" val="1"/>
+              </a:ext>
+            </a:extLst>
+          </p:cNvPr>
           <p:cNvPicPr>
             <a:picLocks noChangeAspect="1"/>
           </p:cNvPicPr>
@@ -13284,7 +13428,13 @@
       </p:sp>
       <p:pic>
         <p:nvPicPr>
-          <p:cNvPr id="18" name="Image 3" descr="/Users/danwahlin/.copilot/session-state/56a7a0da-def8-48d4-b5e8-0ac3878cb8dd/files/slides-build/icons/GoCheckCircle-1A7F37.png">    </p:cNvPr>
+          <p:cNvPr id="18" name="Image 3" descr="">
+            <a:extLst>
+              <a:ext uri="{C183D7F6-B498-43B3-948B-1728B52AA6E4}">
+                <adec:decorative xmlns:adec="http://schemas.microsoft.com/office/drawing/2017/decorative" val="1"/>
+              </a:ext>
+            </a:extLst>
+          </p:cNvPr>
           <p:cNvPicPr>
             <a:picLocks noChangeAspect="1"/>
           </p:cNvPicPr>
@@ -13393,7 +13543,7 @@
       </p:sp>
       <p:pic>
         <p:nvPicPr>
-          <p:cNvPr id="21" name="Image 4" descr="/Users/danwahlin/.copilot/session-state/56a7a0da-def8-48d4-b5e8-0ac3878cb8dd/files/slides-build/img/06-session-board-collaboration.jpg">    </p:cNvPr>
+          <p:cNvPr id="21" name="Image 4" descr="You and the agent update the same Session Board">    </p:cNvPr>
           <p:cNvPicPr>
             <a:picLocks noChangeAspect="1"/>
           </p:cNvPicPr>
@@ -13551,7 +13701,13 @@
       </p:sp>
       <p:pic>
         <p:nvPicPr>
-          <p:cNvPr id="5" name="Image 0" descr="/Users/danwahlin/.copilot/session-state/56a7a0da-def8-48d4-b5e8-0ac3878cb8dd/files/slides-build/img/grad-corner-pattern.png">    </p:cNvPr>
+          <p:cNvPr id="5" name="Image 0" descr="">
+            <a:extLst>
+              <a:ext uri="{C183D7F6-B498-43B3-948B-1728B52AA6E4}">
+                <adec:decorative xmlns:adec="http://schemas.microsoft.com/office/drawing/2017/decorative" val="1"/>
+              </a:ext>
+            </a:extLst>
+          </p:cNvPr>
           <p:cNvPicPr>
             <a:picLocks noChangeAspect="1"/>
           </p:cNvPicPr>
@@ -13646,7 +13802,7 @@
       </p:sp>
       <p:pic>
         <p:nvPicPr>
-          <p:cNvPr id="8" name="Image 1" descr="/Users/danwahlin/.copilot/session-state/56a7a0da-def8-48d4-b5e8-0ac3878cb8dd/files/slides-build/icons/FaGithub-1F2328.png">
+          <p:cNvPr id="8" name="Image 1" descr="Open this chapter on GitHub">
             <a:hlinkClick r:id="rId3" tooltip="https://github.com/github/copilot-app-for-beginners/tree/main/06-canvases"/>
           </p:cNvPr>
           <p:cNvPicPr>
